--- a/slides/Apresentacao_TP_BD.pptx
+++ b/slides/Apresentacao_TP_BD.pptx
@@ -3152,14 +3152,58 @@
       </p:sp>
       <p:sp>
         <p:nvSpPr>
-          <p:cNvPr id="3" name="Rectangle 2"/>
+          <p:cNvPr id="3" name="Right Triangle 2"/>
           <p:cNvSpPr/>
           <p:nvPr/>
         </p:nvSpPr>
         <p:spPr>
-          <a:xfrm>
-            <a:off x="0" y="3840480"/>
-            <a:ext cx="12191695" cy="73152"/>
+          <a:xfrm rot="10800000">
+            <a:off x="8686800" y="0"/>
+            <a:ext cx="3657600" cy="6858000"/>
+          </a:xfrm>
+          <a:prstGeom prst="rtTriangle">
+            <a:avLst/>
+          </a:prstGeom>
+          <a:solidFill>
+            <a:srgbClr val="2E86AB"/>
+          </a:solidFill>
+          <a:ln>
+            <a:noFill/>
+          </a:ln>
+        </p:spPr>
+        <p:style>
+          <a:lnRef idx="1">
+            <a:schemeClr val="accent1"/>
+          </a:lnRef>
+          <a:fillRef idx="3">
+            <a:schemeClr val="accent1"/>
+          </a:fillRef>
+          <a:effectRef idx="2">
+            <a:schemeClr val="accent1"/>
+          </a:effectRef>
+          <a:fontRef idx="minor">
+            <a:schemeClr val="lt1"/>
+          </a:fontRef>
+        </p:style>
+        <p:txBody>
+          <a:bodyPr rtlCol="0" anchor="ctr"/>
+          <a:lstStyle/>
+          <a:p>
+            <a:pPr algn="ctr"/>
+            <a:endParaRPr/>
+          </a:p>
+        </p:txBody>
+      </p:sp>
+      <p:sp>
+        <p:nvSpPr>
+          <p:cNvPr id="4" name="Rectangle 3"/>
+          <p:cNvSpPr/>
+          <p:nvPr/>
+        </p:nvSpPr>
+        <p:spPr>
+          <a:xfrm>
+            <a:off x="0" y="3977639"/>
+            <a:ext cx="9144000" cy="54864"/>
           </a:xfrm>
           <a:prstGeom prst="rect">
             <a:avLst/>
@@ -3196,14 +3240,14 @@
       </p:sp>
       <p:sp>
         <p:nvSpPr>
-          <p:cNvPr id="4" name="TextBox 3"/>
+          <p:cNvPr id="5" name="TextBox 4"/>
           <p:cNvSpPr txBox="1"/>
           <p:nvPr/>
         </p:nvSpPr>
         <p:spPr>
           <a:xfrm>
-            <a:off x="640080" y="1554480"/>
-            <a:ext cx="10972800" cy="1828800"/>
+            <a:off x="640080" y="1097280"/>
+            <a:ext cx="9144000" cy="365760"/>
           </a:xfrm>
           <a:prstGeom prst="rect">
             <a:avLst/>
@@ -3216,37 +3260,29 @@
           </a:bodyPr>
           <a:lstStyle/>
           <a:p>
-            <a:r>
-              <a:rPr sz="5400" b="1">
-                <a:solidFill>
-                  <a:srgbClr val="FFFFFF"/>
-                </a:solidFill>
-              </a:rPr>
-              <a:t>Do Mundo Real ao Insight</a:t>
-            </a:r>
-          </a:p>
-          <a:p>
-            <a:r>
-              <a:rPr sz="2400" i="1">
+            <a:pPr algn="l"/>
+            <a:r>
+              <a:rPr sz="1200" b="1" i="0">
                 <a:solidFill>
                   <a:srgbClr val="E8B40F"/>
                 </a:solidFill>
-              </a:rPr>
-              <a:t>Modelagem, implementação e análise do CPGF</a:t>
-            </a:r>
-          </a:p>
-        </p:txBody>
-      </p:sp>
-      <p:sp>
-        <p:nvSpPr>
-          <p:cNvPr id="5" name="TextBox 4"/>
+                <a:latin typeface="Calibri"/>
+              </a:rPr>
+              <a:t>TRABALHO PRÁTICO · BANCO DE DADOS · DCC/UFMG</a:t>
+            </a:r>
+          </a:p>
+        </p:txBody>
+      </p:sp>
+      <p:sp>
+        <p:nvSpPr>
+          <p:cNvPr id="6" name="TextBox 5"/>
           <p:cNvSpPr txBox="1"/>
           <p:nvPr/>
         </p:nvSpPr>
         <p:spPr>
           <a:xfrm>
-            <a:off x="640080" y="4206240"/>
-            <a:ext cx="10972800" cy="1828800"/>
+            <a:off x="640080" y="1554480"/>
+            <a:ext cx="10058400" cy="1463040"/>
           </a:xfrm>
           <a:prstGeom prst="rect">
             <a:avLst/>
@@ -3259,47 +3295,29 @@
           </a:bodyPr>
           <a:lstStyle/>
           <a:p>
-            <a:r>
-              <a:rPr sz="2200">
+            <a:pPr algn="l"/>
+            <a:r>
+              <a:rPr sz="5600" b="1" i="0">
                 <a:solidFill>
                   <a:srgbClr val="FFFFFF"/>
                 </a:solidFill>
-              </a:rPr>
-              <a:t>Lucas Soares Benfica</a:t>
-            </a:r>
-          </a:p>
-          <a:p>
-            <a:r>
-              <a:rPr sz="2200">
-                <a:solidFill>
-                  <a:srgbClr val="FFFFFF"/>
-                </a:solidFill>
-              </a:rPr>
-              <a:t>Vinícius Cardoso Antunes</a:t>
-            </a:r>
-          </a:p>
-          <a:p>
-            <a:r>
-              <a:rPr sz="2200">
-                <a:solidFill>
-                  <a:srgbClr val="FFFFFF"/>
-                </a:solidFill>
-              </a:rPr>
-              <a:t>Pedro Soares Pinto</a:t>
-            </a:r>
-          </a:p>
-        </p:txBody>
-      </p:sp>
-      <p:sp>
-        <p:nvSpPr>
-          <p:cNvPr id="6" name="TextBox 5"/>
+                <a:latin typeface="Calibri"/>
+              </a:rPr>
+              <a:t>Do Mundo Real ao Insight</a:t>
+            </a:r>
+          </a:p>
+        </p:txBody>
+      </p:sp>
+      <p:sp>
+        <p:nvSpPr>
+          <p:cNvPr id="7" name="TextBox 6"/>
           <p:cNvSpPr txBox="1"/>
           <p:nvPr/>
         </p:nvSpPr>
         <p:spPr>
           <a:xfrm>
-            <a:off x="640080" y="6217920"/>
-            <a:ext cx="10972800" cy="365760"/>
+            <a:off x="640080" y="3017520"/>
+            <a:ext cx="10058400" cy="731520"/>
           </a:xfrm>
           <a:prstGeom prst="rect">
             <a:avLst/>
@@ -3312,13 +3330,118 @@
           </a:bodyPr>
           <a:lstStyle/>
           <a:p>
-            <a:r>
-              <a:rPr sz="1300" i="1">
+            <a:pPr algn="l"/>
+            <a:r>
+              <a:rPr sz="2200" b="0" i="1">
                 <a:solidFill>
                   <a:srgbClr val="E8B40F"/>
                 </a:solidFill>
-              </a:rPr>
-              <a:t>DCC/UFMG · Banco de Dados · Prof. Pedro H. Barros · 2026</a:t>
+                <a:latin typeface="Calibri"/>
+              </a:rPr>
+              <a:t>Modelagem, implementação e análise do CPGF</a:t>
+            </a:r>
+          </a:p>
+        </p:txBody>
+      </p:sp>
+      <p:sp>
+        <p:nvSpPr>
+          <p:cNvPr id="8" name="TextBox 7"/>
+          <p:cNvSpPr txBox="1"/>
+          <p:nvPr/>
+        </p:nvSpPr>
+        <p:spPr>
+          <a:xfrm>
+            <a:off x="640080" y="4297680"/>
+            <a:ext cx="10058400" cy="1554480"/>
+          </a:xfrm>
+          <a:prstGeom prst="rect">
+            <a:avLst/>
+          </a:prstGeom>
+          <a:noFill/>
+        </p:spPr>
+        <p:txBody>
+          <a:bodyPr wrap="none">
+            <a:spAutoFit/>
+          </a:bodyPr>
+          <a:lstStyle/>
+          <a:p>
+            <a:pPr>
+              <a:spcAft>
+                <a:spcPts val="200"/>
+              </a:spcAft>
+            </a:pPr>
+            <a:r>
+              <a:rPr sz="2000">
+                <a:solidFill>
+                  <a:srgbClr val="FFFFFF"/>
+                </a:solidFill>
+              </a:rPr>
+              <a:t>Lucas Soares Benfica</a:t>
+            </a:r>
+          </a:p>
+          <a:p>
+            <a:pPr>
+              <a:spcAft>
+                <a:spcPts val="200"/>
+              </a:spcAft>
+            </a:pPr>
+            <a:r>
+              <a:rPr sz="2000">
+                <a:solidFill>
+                  <a:srgbClr val="FFFFFF"/>
+                </a:solidFill>
+              </a:rPr>
+              <a:t>Vinícius Cardoso Antunes</a:t>
+            </a:r>
+          </a:p>
+          <a:p>
+            <a:pPr>
+              <a:spcAft>
+                <a:spcPts val="200"/>
+              </a:spcAft>
+            </a:pPr>
+            <a:r>
+              <a:rPr sz="2000">
+                <a:solidFill>
+                  <a:srgbClr val="FFFFFF"/>
+                </a:solidFill>
+              </a:rPr>
+              <a:t>Pedro Soares Pinto</a:t>
+            </a:r>
+          </a:p>
+        </p:txBody>
+      </p:sp>
+      <p:sp>
+        <p:nvSpPr>
+          <p:cNvPr id="9" name="TextBox 8"/>
+          <p:cNvSpPr txBox="1"/>
+          <p:nvPr/>
+        </p:nvSpPr>
+        <p:spPr>
+          <a:xfrm>
+            <a:off x="640080" y="6217920"/>
+            <a:ext cx="10058400" cy="365760"/>
+          </a:xfrm>
+          <a:prstGeom prst="rect">
+            <a:avLst/>
+          </a:prstGeom>
+          <a:noFill/>
+        </p:spPr>
+        <p:txBody>
+          <a:bodyPr wrap="none">
+            <a:spAutoFit/>
+          </a:bodyPr>
+          <a:lstStyle/>
+          <a:p>
+            <a:pPr algn="l"/>
+            <a:r>
+              <a:rPr sz="1300" b="0" i="1">
+                <a:solidFill>
+                  <a:srgbClr val="E8B40F"/>
+                </a:solidFill>
+                <a:latin typeface="Calibri"/>
+              </a:rPr>
+              <a:t>Prof. Pedro H. Barros · 2026</a:t>
             </a:r>
           </a:p>
         </p:txBody>
@@ -3357,7 +3480,7 @@
         <p:spPr>
           <a:xfrm>
             <a:off x="0" y="0"/>
-            <a:ext cx="12191695" cy="731520"/>
+            <a:ext cx="12191695" cy="777240"/>
           </a:xfrm>
           <a:prstGeom prst="rect">
             <a:avLst/>
@@ -3394,14 +3517,58 @@
       </p:sp>
       <p:sp>
         <p:nvSpPr>
-          <p:cNvPr id="3" name="TextBox 2"/>
+          <p:cNvPr id="3" name="Rectangle 2"/>
+          <p:cNvSpPr/>
+          <p:nvPr/>
+        </p:nvSpPr>
+        <p:spPr>
+          <a:xfrm>
+            <a:off x="0" y="777240"/>
+            <a:ext cx="12191695" cy="54864"/>
+          </a:xfrm>
+          <a:prstGeom prst="rect">
+            <a:avLst/>
+          </a:prstGeom>
+          <a:solidFill>
+            <a:srgbClr val="E8B40F"/>
+          </a:solidFill>
+          <a:ln>
+            <a:noFill/>
+          </a:ln>
+        </p:spPr>
+        <p:style>
+          <a:lnRef idx="1">
+            <a:schemeClr val="accent1"/>
+          </a:lnRef>
+          <a:fillRef idx="3">
+            <a:schemeClr val="accent1"/>
+          </a:fillRef>
+          <a:effectRef idx="2">
+            <a:schemeClr val="accent1"/>
+          </a:effectRef>
+          <a:fontRef idx="minor">
+            <a:schemeClr val="lt1"/>
+          </a:fontRef>
+        </p:style>
+        <p:txBody>
+          <a:bodyPr rtlCol="0" anchor="ctr"/>
+          <a:lstStyle/>
+          <a:p>
+            <a:pPr algn="ctr"/>
+            <a:endParaRPr/>
+          </a:p>
+        </p:txBody>
+      </p:sp>
+      <p:sp>
+        <p:nvSpPr>
+          <p:cNvPr id="4" name="TextBox 3"/>
           <p:cNvSpPr txBox="1"/>
           <p:nvPr/>
         </p:nvSpPr>
         <p:spPr>
           <a:xfrm>
             <a:off x="457200" y="91440"/>
-            <a:ext cx="10972800" cy="640080"/>
+            <a:ext cx="11247120" cy="640080"/>
           </a:xfrm>
           <a:prstGeom prst="rect">
             <a:avLst/>
@@ -3416,10 +3583,11 @@
           <a:p>
             <a:pPr algn="l"/>
             <a:r>
-              <a:rPr sz="2800" b="1">
+              <a:rPr sz="2800" b="1" i="0">
                 <a:solidFill>
                   <a:srgbClr val="FFFFFF"/>
                 </a:solidFill>
+                <a:latin typeface="Calibri"/>
               </a:rPr>
               <a:t>P2 — Há sazonalidade nos gastos?</a:t>
             </a:r>
@@ -3428,14 +3596,14 @@
       </p:sp>
       <p:sp>
         <p:nvSpPr>
-          <p:cNvPr id="4" name="TextBox 3"/>
+          <p:cNvPr id="5" name="TextBox 4"/>
           <p:cNvSpPr txBox="1"/>
           <p:nvPr/>
         </p:nvSpPr>
         <p:spPr>
           <a:xfrm>
-            <a:off x="457200" y="777240"/>
-            <a:ext cx="10972800" cy="365760"/>
+            <a:off x="457200" y="914400"/>
+            <a:ext cx="11247120" cy="457200"/>
           </a:xfrm>
           <a:prstGeom prst="rect">
             <a:avLst/>
@@ -3448,11 +3616,13 @@
           </a:bodyPr>
           <a:lstStyle/>
           <a:p>
-            <a:r>
-              <a:rPr sz="1400" i="1">
-                <a:solidFill>
-                  <a:srgbClr val="1F3A5F"/>
-                </a:solidFill>
+            <a:pPr algn="l"/>
+            <a:r>
+              <a:rPr sz="1500" b="0" i="1">
+                <a:solidFill>
+                  <a:srgbClr val="555B66"/>
+                </a:solidFill>
+                <a:latin typeface="Calibri"/>
               </a:rPr>
               <a:t>GROUP BY composto + agregação temporal</a:t>
             </a:r>
@@ -3461,7 +3631,7 @@
       </p:sp>
       <p:pic>
         <p:nvPicPr>
-          <p:cNvPr id="5" name="Picture 4" descr="q2_serie_temporal.png"/>
+          <p:cNvPr id="6" name="Picture 5" descr="q2_serie_temporal.png"/>
           <p:cNvPicPr>
             <a:picLocks noChangeAspect="1"/>
           </p:cNvPicPr>
@@ -3475,14 +3645,49 @@
         </p:blipFill>
         <p:spPr>
           <a:xfrm>
-            <a:off x="0" y="1828800"/>
-            <a:ext cx="12191997" cy="4571999"/>
+            <a:off x="0" y="1609344"/>
+            <a:ext cx="12045693" cy="4517135"/>
           </a:xfrm>
           <a:prstGeom prst="rect">
             <a:avLst/>
           </a:prstGeom>
         </p:spPr>
       </p:pic>
+      <p:sp>
+        <p:nvSpPr>
+          <p:cNvPr id="7" name="TextBox 6"/>
+          <p:cNvSpPr txBox="1"/>
+          <p:nvPr/>
+        </p:nvSpPr>
+        <p:spPr>
+          <a:xfrm>
+            <a:off x="365760" y="6446520"/>
+            <a:ext cx="11430000" cy="320040"/>
+          </a:xfrm>
+          <a:prstGeom prst="rect">
+            <a:avLst/>
+          </a:prstGeom>
+          <a:noFill/>
+        </p:spPr>
+        <p:txBody>
+          <a:bodyPr wrap="none">
+            <a:spAutoFit/>
+          </a:bodyPr>
+          <a:lstStyle/>
+          <a:p>
+            <a:pPr algn="r"/>
+            <a:r>
+              <a:rPr sz="900" b="0" i="1">
+                <a:solidFill>
+                  <a:srgbClr val="1F3A5F"/>
+                </a:solidFill>
+                <a:latin typeface="Calibri"/>
+              </a:rPr>
+              <a:t>TP Banco de Dados · DCC/UFMG · 10/17</a:t>
+            </a:r>
+          </a:p>
+        </p:txBody>
+      </p:sp>
     </p:spTree>
   </p:cSld>
   <p:clrMapOvr>
@@ -3517,7 +3722,7 @@
         <p:spPr>
           <a:xfrm>
             <a:off x="0" y="0"/>
-            <a:ext cx="12191695" cy="731520"/>
+            <a:ext cx="12191695" cy="777240"/>
           </a:xfrm>
           <a:prstGeom prst="rect">
             <a:avLst/>
@@ -3554,14 +3759,58 @@
       </p:sp>
       <p:sp>
         <p:nvSpPr>
-          <p:cNvPr id="3" name="TextBox 2"/>
+          <p:cNvPr id="3" name="Rectangle 2"/>
+          <p:cNvSpPr/>
+          <p:nvPr/>
+        </p:nvSpPr>
+        <p:spPr>
+          <a:xfrm>
+            <a:off x="0" y="777240"/>
+            <a:ext cx="12191695" cy="54864"/>
+          </a:xfrm>
+          <a:prstGeom prst="rect">
+            <a:avLst/>
+          </a:prstGeom>
+          <a:solidFill>
+            <a:srgbClr val="E8B40F"/>
+          </a:solidFill>
+          <a:ln>
+            <a:noFill/>
+          </a:ln>
+        </p:spPr>
+        <p:style>
+          <a:lnRef idx="1">
+            <a:schemeClr val="accent1"/>
+          </a:lnRef>
+          <a:fillRef idx="3">
+            <a:schemeClr val="accent1"/>
+          </a:fillRef>
+          <a:effectRef idx="2">
+            <a:schemeClr val="accent1"/>
+          </a:effectRef>
+          <a:fontRef idx="minor">
+            <a:schemeClr val="lt1"/>
+          </a:fontRef>
+        </p:style>
+        <p:txBody>
+          <a:bodyPr rtlCol="0" anchor="ctr"/>
+          <a:lstStyle/>
+          <a:p>
+            <a:pPr algn="ctr"/>
+            <a:endParaRPr/>
+          </a:p>
+        </p:txBody>
+      </p:sp>
+      <p:sp>
+        <p:nvSpPr>
+          <p:cNvPr id="4" name="TextBox 3"/>
           <p:cNvSpPr txBox="1"/>
           <p:nvPr/>
         </p:nvSpPr>
         <p:spPr>
           <a:xfrm>
             <a:off x="457200" y="91440"/>
-            <a:ext cx="10972800" cy="640080"/>
+            <a:ext cx="11247120" cy="640080"/>
           </a:xfrm>
           <a:prstGeom prst="rect">
             <a:avLst/>
@@ -3576,10 +3825,11 @@
           <a:p>
             <a:pPr algn="l"/>
             <a:r>
-              <a:rPr sz="2800" b="1">
+              <a:rPr sz="2800" b="1" i="0">
                 <a:solidFill>
                   <a:srgbClr val="FFFFFF"/>
                 </a:solidFill>
+                <a:latin typeface="Calibri"/>
               </a:rPr>
               <a:t>P3 — Top-10 favorecidos e concentração</a:t>
             </a:r>
@@ -3588,14 +3838,14 @@
       </p:sp>
       <p:sp>
         <p:nvSpPr>
-          <p:cNvPr id="4" name="TextBox 3"/>
+          <p:cNvPr id="5" name="TextBox 4"/>
           <p:cNvSpPr txBox="1"/>
           <p:nvPr/>
         </p:nvSpPr>
         <p:spPr>
           <a:xfrm>
-            <a:off x="457200" y="777240"/>
-            <a:ext cx="10972800" cy="365760"/>
+            <a:off x="457200" y="914400"/>
+            <a:ext cx="11247120" cy="457200"/>
           </a:xfrm>
           <a:prstGeom prst="rect">
             <a:avLst/>
@@ -3608,11 +3858,13 @@
           </a:bodyPr>
           <a:lstStyle/>
           <a:p>
-            <a:r>
-              <a:rPr sz="1400" i="1">
-                <a:solidFill>
-                  <a:srgbClr val="1F3A5F"/>
-                </a:solidFill>
+            <a:pPr algn="l"/>
+            <a:r>
+              <a:rPr sz="1500" b="0" i="1">
+                <a:solidFill>
+                  <a:srgbClr val="555B66"/>
+                </a:solidFill>
+                <a:latin typeface="Calibri"/>
               </a:rPr>
               <a:t>JOIN + GROUP BY + HAVING + LIMIT</a:t>
             </a:r>
@@ -3621,7 +3873,7 @@
       </p:sp>
       <p:pic>
         <p:nvPicPr>
-          <p:cNvPr id="5" name="Picture 4" descr="q3_top_favorecidos.png"/>
+          <p:cNvPr id="6" name="Picture 5" descr="q3_top_favorecidos.png"/>
           <p:cNvPicPr>
             <a:picLocks noChangeAspect="1"/>
           </p:cNvPicPr>
@@ -3635,14 +3887,49 @@
         </p:blipFill>
         <p:spPr>
           <a:xfrm>
-            <a:off x="463143" y="1280160"/>
-            <a:ext cx="11265408" cy="5120640"/>
+            <a:off x="664311" y="1554480"/>
+            <a:ext cx="10863072" cy="4937760"/>
           </a:xfrm>
           <a:prstGeom prst="rect">
             <a:avLst/>
           </a:prstGeom>
         </p:spPr>
       </p:pic>
+      <p:sp>
+        <p:nvSpPr>
+          <p:cNvPr id="7" name="TextBox 6"/>
+          <p:cNvSpPr txBox="1"/>
+          <p:nvPr/>
+        </p:nvSpPr>
+        <p:spPr>
+          <a:xfrm>
+            <a:off x="365760" y="6446520"/>
+            <a:ext cx="11430000" cy="320040"/>
+          </a:xfrm>
+          <a:prstGeom prst="rect">
+            <a:avLst/>
+          </a:prstGeom>
+          <a:noFill/>
+        </p:spPr>
+        <p:txBody>
+          <a:bodyPr wrap="none">
+            <a:spAutoFit/>
+          </a:bodyPr>
+          <a:lstStyle/>
+          <a:p>
+            <a:pPr algn="r"/>
+            <a:r>
+              <a:rPr sz="900" b="0" i="1">
+                <a:solidFill>
+                  <a:srgbClr val="1F3A5F"/>
+                </a:solidFill>
+                <a:latin typeface="Calibri"/>
+              </a:rPr>
+              <a:t>TP Banco de Dados · DCC/UFMG · 11/17</a:t>
+            </a:r>
+          </a:p>
+        </p:txBody>
+      </p:sp>
     </p:spTree>
   </p:cSld>
   <p:clrMapOvr>
@@ -3677,7 +3964,7 @@
         <p:spPr>
           <a:xfrm>
             <a:off x="0" y="0"/>
-            <a:ext cx="12191695" cy="731520"/>
+            <a:ext cx="12191695" cy="777240"/>
           </a:xfrm>
           <a:prstGeom prst="rect">
             <a:avLst/>
@@ -3714,14 +4001,58 @@
       </p:sp>
       <p:sp>
         <p:nvSpPr>
-          <p:cNvPr id="3" name="TextBox 2"/>
+          <p:cNvPr id="3" name="Rectangle 2"/>
+          <p:cNvSpPr/>
+          <p:nvPr/>
+        </p:nvSpPr>
+        <p:spPr>
+          <a:xfrm>
+            <a:off x="0" y="777240"/>
+            <a:ext cx="12191695" cy="54864"/>
+          </a:xfrm>
+          <a:prstGeom prst="rect">
+            <a:avLst/>
+          </a:prstGeom>
+          <a:solidFill>
+            <a:srgbClr val="E8B40F"/>
+          </a:solidFill>
+          <a:ln>
+            <a:noFill/>
+          </a:ln>
+        </p:spPr>
+        <p:style>
+          <a:lnRef idx="1">
+            <a:schemeClr val="accent1"/>
+          </a:lnRef>
+          <a:fillRef idx="3">
+            <a:schemeClr val="accent1"/>
+          </a:fillRef>
+          <a:effectRef idx="2">
+            <a:schemeClr val="accent1"/>
+          </a:effectRef>
+          <a:fontRef idx="minor">
+            <a:schemeClr val="lt1"/>
+          </a:fontRef>
+        </p:style>
+        <p:txBody>
+          <a:bodyPr rtlCol="0" anchor="ctr"/>
+          <a:lstStyle/>
+          <a:p>
+            <a:pPr algn="ctr"/>
+            <a:endParaRPr/>
+          </a:p>
+        </p:txBody>
+      </p:sp>
+      <p:sp>
+        <p:nvSpPr>
+          <p:cNvPr id="4" name="TextBox 3"/>
           <p:cNvSpPr txBox="1"/>
           <p:nvPr/>
         </p:nvSpPr>
         <p:spPr>
           <a:xfrm>
             <a:off x="457200" y="91440"/>
-            <a:ext cx="10972800" cy="640080"/>
+            <a:ext cx="11247120" cy="640080"/>
           </a:xfrm>
           <a:prstGeom prst="rect">
             <a:avLst/>
@@ -3736,10 +4067,11 @@
           <a:p>
             <a:pPr algn="l"/>
             <a:r>
-              <a:rPr sz="2800" b="1">
+              <a:rPr sz="2800" b="1" i="0">
                 <a:solidFill>
                   <a:srgbClr val="FFFFFF"/>
                 </a:solidFill>
+                <a:latin typeface="Calibri"/>
               </a:rPr>
               <a:t>P4 — Distribuição por tipo de transação</a:t>
             </a:r>
@@ -3748,14 +4080,14 @@
       </p:sp>
       <p:sp>
         <p:nvSpPr>
-          <p:cNvPr id="4" name="TextBox 3"/>
+          <p:cNvPr id="5" name="TextBox 4"/>
           <p:cNvSpPr txBox="1"/>
           <p:nvPr/>
         </p:nvSpPr>
         <p:spPr>
           <a:xfrm>
-            <a:off x="457200" y="777240"/>
-            <a:ext cx="10972800" cy="365760"/>
+            <a:off x="457200" y="914400"/>
+            <a:ext cx="11247120" cy="457200"/>
           </a:xfrm>
           <a:prstGeom prst="rect">
             <a:avLst/>
@@ -3768,11 +4100,13 @@
           </a:bodyPr>
           <a:lstStyle/>
           <a:p>
-            <a:r>
-              <a:rPr sz="1400" i="1">
-                <a:solidFill>
-                  <a:srgbClr val="1F3A5F"/>
-                </a:solidFill>
+            <a:pPr algn="l"/>
+            <a:r>
+              <a:rPr sz="1500" b="0" i="1">
+                <a:solidFill>
+                  <a:srgbClr val="555B66"/>
+                </a:solidFill>
+                <a:latin typeface="Calibri"/>
               </a:rPr>
               <a:t>Saques em espécie merecem monitoramento</a:t>
             </a:r>
@@ -3781,7 +4115,7 @@
       </p:sp>
       <p:pic>
         <p:nvPicPr>
-          <p:cNvPr id="5" name="Picture 4" descr="q4_tipo_transacao.png"/>
+          <p:cNvPr id="6" name="Picture 5" descr="q4_tipo_transacao.png"/>
           <p:cNvPicPr>
             <a:picLocks noChangeAspect="1"/>
           </p:cNvPicPr>
@@ -3795,14 +4129,49 @@
         </p:blipFill>
         <p:spPr>
           <a:xfrm>
-            <a:off x="463143" y="1280160"/>
-            <a:ext cx="11265408" cy="5120640"/>
+            <a:off x="457200" y="1554480"/>
+            <a:ext cx="10863072" cy="4937760"/>
           </a:xfrm>
           <a:prstGeom prst="rect">
             <a:avLst/>
           </a:prstGeom>
         </p:spPr>
       </p:pic>
+      <p:sp>
+        <p:nvSpPr>
+          <p:cNvPr id="7" name="TextBox 6"/>
+          <p:cNvSpPr txBox="1"/>
+          <p:nvPr/>
+        </p:nvSpPr>
+        <p:spPr>
+          <a:xfrm>
+            <a:off x="365760" y="6446520"/>
+            <a:ext cx="11430000" cy="320040"/>
+          </a:xfrm>
+          <a:prstGeom prst="rect">
+            <a:avLst/>
+          </a:prstGeom>
+          <a:noFill/>
+        </p:spPr>
+        <p:txBody>
+          <a:bodyPr wrap="none">
+            <a:spAutoFit/>
+          </a:bodyPr>
+          <a:lstStyle/>
+          <a:p>
+            <a:pPr algn="r"/>
+            <a:r>
+              <a:rPr sz="900" b="0" i="1">
+                <a:solidFill>
+                  <a:srgbClr val="1F3A5F"/>
+                </a:solidFill>
+                <a:latin typeface="Calibri"/>
+              </a:rPr>
+              <a:t>TP Banco de Dados · DCC/UFMG · 12/17</a:t>
+            </a:r>
+          </a:p>
+        </p:txBody>
+      </p:sp>
     </p:spTree>
   </p:cSld>
   <p:clrMapOvr>
@@ -3837,7 +4206,7 @@
         <p:spPr>
           <a:xfrm>
             <a:off x="0" y="0"/>
-            <a:ext cx="12191695" cy="731520"/>
+            <a:ext cx="12191695" cy="777240"/>
           </a:xfrm>
           <a:prstGeom prst="rect">
             <a:avLst/>
@@ -3874,14 +4243,58 @@
       </p:sp>
       <p:sp>
         <p:nvSpPr>
-          <p:cNvPr id="3" name="TextBox 2"/>
+          <p:cNvPr id="3" name="Rectangle 2"/>
+          <p:cNvSpPr/>
+          <p:nvPr/>
+        </p:nvSpPr>
+        <p:spPr>
+          <a:xfrm>
+            <a:off x="0" y="777240"/>
+            <a:ext cx="12191695" cy="54864"/>
+          </a:xfrm>
+          <a:prstGeom prst="rect">
+            <a:avLst/>
+          </a:prstGeom>
+          <a:solidFill>
+            <a:srgbClr val="E8B40F"/>
+          </a:solidFill>
+          <a:ln>
+            <a:noFill/>
+          </a:ln>
+        </p:spPr>
+        <p:style>
+          <a:lnRef idx="1">
+            <a:schemeClr val="accent1"/>
+          </a:lnRef>
+          <a:fillRef idx="3">
+            <a:schemeClr val="accent1"/>
+          </a:fillRef>
+          <a:effectRef idx="2">
+            <a:schemeClr val="accent1"/>
+          </a:effectRef>
+          <a:fontRef idx="minor">
+            <a:schemeClr val="lt1"/>
+          </a:fontRef>
+        </p:style>
+        <p:txBody>
+          <a:bodyPr rtlCol="0" anchor="ctr"/>
+          <a:lstStyle/>
+          <a:p>
+            <a:pPr algn="ctr"/>
+            <a:endParaRPr/>
+          </a:p>
+        </p:txBody>
+      </p:sp>
+      <p:sp>
+        <p:nvSpPr>
+          <p:cNvPr id="4" name="TextBox 3"/>
           <p:cNvSpPr txBox="1"/>
           <p:nvPr/>
         </p:nvSpPr>
         <p:spPr>
           <a:xfrm>
             <a:off x="457200" y="91440"/>
-            <a:ext cx="10972800" cy="640080"/>
+            <a:ext cx="11247120" cy="640080"/>
           </a:xfrm>
           <a:prstGeom prst="rect">
             <a:avLst/>
@@ -3896,26 +4309,27 @@
           <a:p>
             <a:pPr algn="l"/>
             <a:r>
-              <a:rPr sz="2800" b="1">
+              <a:rPr sz="2800" b="1" i="0">
                 <a:solidFill>
                   <a:srgbClr val="FFFFFF"/>
                 </a:solidFill>
-              </a:rPr>
-              <a:t>P5 — Outliers por ministério (Window Function)</a:t>
-            </a:r>
-          </a:p>
-        </p:txBody>
-      </p:sp>
-      <p:sp>
-        <p:nvSpPr>
-          <p:cNvPr id="4" name="TextBox 3"/>
+                <a:latin typeface="Calibri"/>
+              </a:rPr>
+              <a:t>P5 — Outliers por ministério</a:t>
+            </a:r>
+          </a:p>
+        </p:txBody>
+      </p:sp>
+      <p:sp>
+        <p:nvSpPr>
+          <p:cNvPr id="5" name="TextBox 4"/>
           <p:cNvSpPr txBox="1"/>
           <p:nvPr/>
         </p:nvSpPr>
         <p:spPr>
           <a:xfrm>
-            <a:off x="457200" y="777240"/>
-            <a:ext cx="10972800" cy="365760"/>
+            <a:off x="457200" y="914400"/>
+            <a:ext cx="11247120" cy="457200"/>
           </a:xfrm>
           <a:prstGeom prst="rect">
             <a:avLst/>
@@ -3928,11 +4342,13 @@
           </a:bodyPr>
           <a:lstStyle/>
           <a:p>
-            <a:r>
-              <a:rPr sz="1400" i="1">
-                <a:solidFill>
-                  <a:srgbClr val="1F3A5F"/>
-                </a:solidFill>
+            <a:pPr algn="l"/>
+            <a:r>
+              <a:rPr sz="1500" b="0" i="1">
+                <a:solidFill>
+                  <a:srgbClr val="555B66"/>
+                </a:solidFill>
+                <a:latin typeface="Calibri"/>
               </a:rPr>
               <a:t>CTE + RANK() OVER (PARTITION BY ministerio ORDER BY gasto DESC)</a:t>
             </a:r>
@@ -3941,7 +4357,7 @@
       </p:sp>
       <p:pic>
         <p:nvPicPr>
-          <p:cNvPr id="5" name="Picture 4" descr="q5_top_portadores.png"/>
+          <p:cNvPr id="6" name="Picture 5" descr="q5_top_portadores.png"/>
           <p:cNvPicPr>
             <a:picLocks noChangeAspect="1"/>
           </p:cNvPicPr>
@@ -3955,14 +4371,49 @@
         </p:blipFill>
         <p:spPr>
           <a:xfrm>
-            <a:off x="929410" y="1143000"/>
-            <a:ext cx="10332873" cy="5636113"/>
+            <a:off x="1401926" y="1325880"/>
+            <a:ext cx="9387841" cy="5120640"/>
           </a:xfrm>
           <a:prstGeom prst="rect">
             <a:avLst/>
           </a:prstGeom>
         </p:spPr>
       </p:pic>
+      <p:sp>
+        <p:nvSpPr>
+          <p:cNvPr id="7" name="TextBox 6"/>
+          <p:cNvSpPr txBox="1"/>
+          <p:nvPr/>
+        </p:nvSpPr>
+        <p:spPr>
+          <a:xfrm>
+            <a:off x="365760" y="6446520"/>
+            <a:ext cx="11430000" cy="320040"/>
+          </a:xfrm>
+          <a:prstGeom prst="rect">
+            <a:avLst/>
+          </a:prstGeom>
+          <a:noFill/>
+        </p:spPr>
+        <p:txBody>
+          <a:bodyPr wrap="none">
+            <a:spAutoFit/>
+          </a:bodyPr>
+          <a:lstStyle/>
+          <a:p>
+            <a:pPr algn="r"/>
+            <a:r>
+              <a:rPr sz="900" b="0" i="1">
+                <a:solidFill>
+                  <a:srgbClr val="1F3A5F"/>
+                </a:solidFill>
+                <a:latin typeface="Calibri"/>
+              </a:rPr>
+              <a:t>TP Banco de Dados · DCC/UFMG · 13/17</a:t>
+            </a:r>
+          </a:p>
+        </p:txBody>
+      </p:sp>
     </p:spTree>
   </p:cSld>
   <p:clrMapOvr>
@@ -3997,7 +4448,7 @@
         <p:spPr>
           <a:xfrm>
             <a:off x="0" y="0"/>
-            <a:ext cx="12191695" cy="731520"/>
+            <a:ext cx="12191695" cy="777240"/>
           </a:xfrm>
           <a:prstGeom prst="rect">
             <a:avLst/>
@@ -4034,14 +4485,58 @@
       </p:sp>
       <p:sp>
         <p:nvSpPr>
-          <p:cNvPr id="3" name="TextBox 2"/>
+          <p:cNvPr id="3" name="Rectangle 2"/>
+          <p:cNvSpPr/>
+          <p:nvPr/>
+        </p:nvSpPr>
+        <p:spPr>
+          <a:xfrm>
+            <a:off x="0" y="777240"/>
+            <a:ext cx="12191695" cy="54864"/>
+          </a:xfrm>
+          <a:prstGeom prst="rect">
+            <a:avLst/>
+          </a:prstGeom>
+          <a:solidFill>
+            <a:srgbClr val="E8B40F"/>
+          </a:solidFill>
+          <a:ln>
+            <a:noFill/>
+          </a:ln>
+        </p:spPr>
+        <p:style>
+          <a:lnRef idx="1">
+            <a:schemeClr val="accent1"/>
+          </a:lnRef>
+          <a:fillRef idx="3">
+            <a:schemeClr val="accent1"/>
+          </a:fillRef>
+          <a:effectRef idx="2">
+            <a:schemeClr val="accent1"/>
+          </a:effectRef>
+          <a:fontRef idx="minor">
+            <a:schemeClr val="lt1"/>
+          </a:fontRef>
+        </p:style>
+        <p:txBody>
+          <a:bodyPr rtlCol="0" anchor="ctr"/>
+          <a:lstStyle/>
+          <a:p>
+            <a:pPr algn="ctr"/>
+            <a:endParaRPr/>
+          </a:p>
+        </p:txBody>
+      </p:sp>
+      <p:sp>
+        <p:nvSpPr>
+          <p:cNvPr id="4" name="TextBox 3"/>
           <p:cNvSpPr txBox="1"/>
           <p:nvPr/>
         </p:nvSpPr>
         <p:spPr>
           <a:xfrm>
             <a:off x="457200" y="91440"/>
-            <a:ext cx="10972800" cy="640080"/>
+            <a:ext cx="11247120" cy="640080"/>
           </a:xfrm>
           <a:prstGeom prst="rect">
             <a:avLst/>
@@ -4056,26 +4551,145 @@
           <a:p>
             <a:pPr algn="l"/>
             <a:r>
-              <a:rPr sz="2800" b="1">
+              <a:rPr sz="2800" b="1" i="0">
                 <a:solidFill>
                   <a:srgbClr val="FFFFFF"/>
                 </a:solidFill>
-              </a:rPr>
-              <a:t>Bônus — Detecção de anomalias e ligação com a LAI</a:t>
-            </a:r>
-          </a:p>
-        </p:txBody>
-      </p:sp>
-      <p:sp>
-        <p:nvSpPr>
-          <p:cNvPr id="4" name="TextBox 3"/>
+                <a:latin typeface="Calibri"/>
+              </a:rPr>
+              <a:t>Bonus — Além do mínimo exigido</a:t>
+            </a:r>
+          </a:p>
+        </p:txBody>
+      </p:sp>
+      <p:sp>
+        <p:nvSpPr>
+          <p:cNvPr id="5" name="TextBox 4"/>
           <p:cNvSpPr txBox="1"/>
           <p:nvPr/>
         </p:nvSpPr>
         <p:spPr>
           <a:xfrm>
-            <a:off x="548640" y="1371600"/>
-            <a:ext cx="10972800" cy="5029200"/>
+            <a:off x="457200" y="914400"/>
+            <a:ext cx="11247120" cy="457200"/>
+          </a:xfrm>
+          <a:prstGeom prst="rect">
+            <a:avLst/>
+          </a:prstGeom>
+          <a:noFill/>
+        </p:spPr>
+        <p:txBody>
+          <a:bodyPr wrap="none">
+            <a:spAutoFit/>
+          </a:bodyPr>
+          <a:lstStyle/>
+          <a:p>
+            <a:pPr algn="l"/>
+            <a:r>
+              <a:rPr sz="1500" b="0" i="1">
+                <a:solidFill>
+                  <a:srgbClr val="555B66"/>
+                </a:solidFill>
+                <a:latin typeface="Calibri"/>
+              </a:rPr>
+              <a:t>Detecção de anomalias e conexão com a LAI</a:t>
+            </a:r>
+          </a:p>
+        </p:txBody>
+      </p:sp>
+      <p:sp>
+        <p:nvSpPr>
+          <p:cNvPr id="6" name="Rounded Rectangle 5"/>
+          <p:cNvSpPr/>
+          <p:nvPr/>
+        </p:nvSpPr>
+        <p:spPr>
+          <a:xfrm>
+            <a:off x="457200" y="1463040"/>
+            <a:ext cx="5577840" cy="4572000"/>
+          </a:xfrm>
+          <a:prstGeom prst="roundRect">
+            <a:avLst>
+              <a:gd name="adj" fmla="val 6000"/>
+            </a:avLst>
+          </a:prstGeom>
+          <a:solidFill>
+            <a:srgbClr val="F5F7FA"/>
+          </a:solidFill>
+          <a:ln w="19050">
+            <a:solidFill>
+              <a:srgbClr val="C0504D"/>
+            </a:solidFill>
+          </a:ln>
+        </p:spPr>
+        <p:style>
+          <a:lnRef idx="1">
+            <a:schemeClr val="accent1"/>
+          </a:lnRef>
+          <a:fillRef idx="3">
+            <a:schemeClr val="accent1"/>
+          </a:fillRef>
+          <a:effectRef idx="2">
+            <a:schemeClr val="accent1"/>
+          </a:effectRef>
+          <a:fontRef idx="minor">
+            <a:schemeClr val="lt1"/>
+          </a:fontRef>
+        </p:style>
+        <p:txBody>
+          <a:bodyPr rtlCol="0" anchor="ctr"/>
+          <a:lstStyle/>
+          <a:p>
+            <a:pPr algn="ctr"/>
+            <a:endParaRPr/>
+          </a:p>
+        </p:txBody>
+      </p:sp>
+      <p:sp>
+        <p:nvSpPr>
+          <p:cNvPr id="7" name="TextBox 6"/>
+          <p:cNvSpPr txBox="1"/>
+          <p:nvPr/>
+        </p:nvSpPr>
+        <p:spPr>
+          <a:xfrm>
+            <a:off x="640080" y="1600200"/>
+            <a:ext cx="5212080" cy="411480"/>
+          </a:xfrm>
+          <a:prstGeom prst="rect">
+            <a:avLst/>
+          </a:prstGeom>
+          <a:noFill/>
+        </p:spPr>
+        <p:txBody>
+          <a:bodyPr wrap="none">
+            <a:spAutoFit/>
+          </a:bodyPr>
+          <a:lstStyle/>
+          <a:p>
+            <a:pPr algn="l"/>
+            <a:r>
+              <a:rPr sz="1800" b="1" i="0">
+                <a:solidFill>
+                  <a:srgbClr val="C0504D"/>
+                </a:solidFill>
+                <a:latin typeface="Calibri"/>
+              </a:rPr>
+              <a:t>P6 — Detecção de anomalias</a:t>
+            </a:r>
+          </a:p>
+        </p:txBody>
+      </p:sp>
+      <p:sp>
+        <p:nvSpPr>
+          <p:cNvPr id="8" name="TextBox 7"/>
+          <p:cNvSpPr txBox="1"/>
+          <p:nvPr/>
+        </p:nvSpPr>
+        <p:spPr>
+          <a:xfrm>
+            <a:off x="640080" y="2103120"/>
+            <a:ext cx="5212080" cy="3794760"/>
           </a:xfrm>
           <a:prstGeom prst="rect">
             <a:avLst/>
@@ -4090,91 +4704,262 @@
           <a:p>
             <a:pPr algn="l">
               <a:spcAft>
-                <a:spcPts val="800"/>
+                <a:spcPts val="400"/>
               </a:spcAft>
             </a:pPr>
             <a:r>
-              <a:rPr sz="1800">
-                <a:solidFill>
-                  <a:srgbClr val="333333"/>
-                </a:solidFill>
-              </a:rPr>
-              <a:t>• Consulta extra: transações fora do padrão estatístico (μ + 3σ).</a:t>
+              <a:rPr sz="1400">
+                <a:solidFill>
+                  <a:srgbClr val="212529"/>
+                </a:solidFill>
+              </a:rPr>
+              <a:t>• Critério: |valor| &gt; média + 3·desvio-padrão</a:t>
             </a:r>
           </a:p>
           <a:p>
             <a:pPr algn="l">
               <a:spcAft>
-                <a:spcPts val="800"/>
+                <a:spcPts val="400"/>
               </a:spcAft>
             </a:pPr>
             <a:r>
-              <a:rPr sz="1800">
-                <a:solidFill>
-                  <a:srgbClr val="333333"/>
-                </a:solidFill>
-              </a:rPr>
-              <a:t>• Triagem inicial automatizada — útil ao controle interno.</a:t>
+              <a:rPr sz="1400">
+                <a:solidFill>
+                  <a:srgbClr val="212529"/>
+                </a:solidFill>
+              </a:rPr>
+              <a:t>• &lt; 1% das linhas mas parcela desproporcional do valor</a:t>
             </a:r>
           </a:p>
           <a:p>
             <a:pPr algn="l">
               <a:spcAft>
-                <a:spcPts val="800"/>
+                <a:spcPts val="400"/>
               </a:spcAft>
             </a:pPr>
             <a:r>
-              <a:rPr sz="1800">
-                <a:solidFill>
-                  <a:srgbClr val="333333"/>
-                </a:solidFill>
-              </a:rPr>
-              <a:t>• Atende critério bônus: 'técnicas além do escopo'.</a:t>
+              <a:rPr sz="1400">
+                <a:solidFill>
+                  <a:srgbClr val="212529"/>
+                </a:solidFill>
+              </a:rPr>
+              <a:t>• Triagem automatizada — útil ao controle interno</a:t>
             </a:r>
           </a:p>
           <a:p>
             <a:pPr algn="l">
               <a:spcAft>
-                <a:spcPts val="800"/>
+                <a:spcPts val="400"/>
               </a:spcAft>
             </a:pPr>
             <a:r>
-              <a:rPr sz="1800">
-                <a:solidFill>
-                  <a:srgbClr val="333333"/>
-                </a:solidFill>
-              </a:rPr>
-              <a:t>• CPGF é exemplo didático da Lei de Acesso à Informação (LAI):</a:t>
-            </a:r>
-          </a:p>
+              <a:rPr sz="1400">
+                <a:solidFill>
+                  <a:srgbClr val="212529"/>
+                </a:solidFill>
+              </a:rPr>
+              <a:t>• Atende: 'técnicas além do escopo'</a:t>
+            </a:r>
+          </a:p>
+        </p:txBody>
+      </p:sp>
+      <p:sp>
+        <p:nvSpPr>
+          <p:cNvPr id="9" name="Rounded Rectangle 8"/>
+          <p:cNvSpPr/>
+          <p:nvPr/>
+        </p:nvSpPr>
+        <p:spPr>
+          <a:xfrm>
+            <a:off x="6217920" y="1463040"/>
+            <a:ext cx="5486400" cy="4572000"/>
+          </a:xfrm>
+          <a:prstGeom prst="roundRect">
+            <a:avLst>
+              <a:gd name="adj" fmla="val 6000"/>
+            </a:avLst>
+          </a:prstGeom>
+          <a:solidFill>
+            <a:srgbClr val="F5F7FA"/>
+          </a:solidFill>
+          <a:ln w="19050">
+            <a:solidFill>
+              <a:srgbClr val="2E86AB"/>
+            </a:solidFill>
+          </a:ln>
+        </p:spPr>
+        <p:style>
+          <a:lnRef idx="1">
+            <a:schemeClr val="accent1"/>
+          </a:lnRef>
+          <a:fillRef idx="3">
+            <a:schemeClr val="accent1"/>
+          </a:fillRef>
+          <a:effectRef idx="2">
+            <a:schemeClr val="accent1"/>
+          </a:effectRef>
+          <a:fontRef idx="minor">
+            <a:schemeClr val="lt1"/>
+          </a:fontRef>
+        </p:style>
+        <p:txBody>
+          <a:bodyPr rtlCol="0" anchor="ctr"/>
+          <a:lstStyle/>
+          <a:p>
+            <a:pPr algn="ctr"/>
+            <a:endParaRPr/>
+          </a:p>
+        </p:txBody>
+      </p:sp>
+      <p:sp>
+        <p:nvSpPr>
+          <p:cNvPr id="10" name="TextBox 9"/>
+          <p:cNvSpPr txBox="1"/>
+          <p:nvPr/>
+        </p:nvSpPr>
+        <p:spPr>
+          <a:xfrm>
+            <a:off x="6400800" y="1600200"/>
+            <a:ext cx="5120640" cy="411480"/>
+          </a:xfrm>
+          <a:prstGeom prst="rect">
+            <a:avLst/>
+          </a:prstGeom>
+          <a:noFill/>
+        </p:spPr>
+        <p:txBody>
+          <a:bodyPr wrap="none">
+            <a:spAutoFit/>
+          </a:bodyPr>
+          <a:lstStyle/>
+          <a:p>
+            <a:pPr algn="l"/>
+            <a:r>
+              <a:rPr sz="1800" b="1" i="0">
+                <a:solidFill>
+                  <a:srgbClr val="2E86AB"/>
+                </a:solidFill>
+                <a:latin typeface="Calibri"/>
+              </a:rPr>
+              <a:t>Conexão com a LAI</a:t>
+            </a:r>
+          </a:p>
+        </p:txBody>
+      </p:sp>
+      <p:sp>
+        <p:nvSpPr>
+          <p:cNvPr id="11" name="TextBox 10"/>
+          <p:cNvSpPr txBox="1"/>
+          <p:nvPr/>
+        </p:nvSpPr>
+        <p:spPr>
+          <a:xfrm>
+            <a:off x="6400800" y="2103120"/>
+            <a:ext cx="5120640" cy="3794760"/>
+          </a:xfrm>
+          <a:prstGeom prst="rect">
+            <a:avLst/>
+          </a:prstGeom>
+          <a:noFill/>
+        </p:spPr>
+        <p:txBody>
+          <a:bodyPr wrap="square">
+            <a:spAutoFit/>
+          </a:bodyPr>
+          <a:lstStyle/>
           <a:p>
             <a:pPr algn="l">
               <a:spcAft>
-                <a:spcPts val="800"/>
+                <a:spcPts val="400"/>
               </a:spcAft>
             </a:pPr>
             <a:r>
-              <a:rPr sz="1800">
-                <a:solidFill>
-                  <a:srgbClr val="333333"/>
-                </a:solidFill>
-              </a:rPr>
-              <a:t>•     · dado pessoal anonimizado, público por construção, pensado para controle social.</a:t>
+              <a:rPr sz="1400">
+                <a:solidFill>
+                  <a:srgbClr val="212529"/>
+                </a:solidFill>
+              </a:rPr>
+              <a:t>• Lei 12.527/2011 — Acesso à Informação</a:t>
             </a:r>
           </a:p>
           <a:p>
             <a:pPr algn="l">
               <a:spcAft>
-                <a:spcPts val="800"/>
+                <a:spcPts val="400"/>
               </a:spcAft>
             </a:pPr>
             <a:r>
-              <a:rPr sz="1800">
-                <a:solidFill>
-                  <a:srgbClr val="333333"/>
-                </a:solidFill>
-              </a:rPr>
-              <a:t>• Cruzar dimensões (órgão × portador × favorecido × tipo) = trabalho da CGU.</a:t>
+              <a:rPr sz="1400">
+                <a:solidFill>
+                  <a:srgbClr val="212529"/>
+                </a:solidFill>
+              </a:rPr>
+              <a:t>• CPGF: dado anonimizado, público, para controle social</a:t>
+            </a:r>
+          </a:p>
+          <a:p>
+            <a:pPr algn="l">
+              <a:spcAft>
+                <a:spcPts val="400"/>
+              </a:spcAft>
+            </a:pPr>
+            <a:r>
+              <a:rPr sz="1400">
+                <a:solidFill>
+                  <a:srgbClr val="212529"/>
+                </a:solidFill>
+              </a:rPr>
+              <a:t>• Cruzar dimensões = trabalho da CGU</a:t>
+            </a:r>
+          </a:p>
+          <a:p>
+            <a:pPr algn="l">
+              <a:spcAft>
+                <a:spcPts val="400"/>
+              </a:spcAft>
+            </a:pPr>
+            <a:r>
+              <a:rPr sz="1400">
+                <a:solidFill>
+                  <a:srgbClr val="212529"/>
+                </a:solidFill>
+              </a:rPr>
+              <a:t>• Atende: 'cidadania de dados'</a:t>
+            </a:r>
+          </a:p>
+        </p:txBody>
+      </p:sp>
+      <p:sp>
+        <p:nvSpPr>
+          <p:cNvPr id="12" name="TextBox 11"/>
+          <p:cNvSpPr txBox="1"/>
+          <p:nvPr/>
+        </p:nvSpPr>
+        <p:spPr>
+          <a:xfrm>
+            <a:off x="365760" y="6446520"/>
+            <a:ext cx="11430000" cy="320040"/>
+          </a:xfrm>
+          <a:prstGeom prst="rect">
+            <a:avLst/>
+          </a:prstGeom>
+          <a:noFill/>
+        </p:spPr>
+        <p:txBody>
+          <a:bodyPr wrap="none">
+            <a:spAutoFit/>
+          </a:bodyPr>
+          <a:lstStyle/>
+          <a:p>
+            <a:pPr algn="r"/>
+            <a:r>
+              <a:rPr sz="900" b="0" i="1">
+                <a:solidFill>
+                  <a:srgbClr val="1F3A5F"/>
+                </a:solidFill>
+                <a:latin typeface="Calibri"/>
+              </a:rPr>
+              <a:t>TP Banco de Dados · DCC/UFMG · 14/17</a:t>
             </a:r>
           </a:p>
         </p:txBody>
@@ -4213,7 +4998,7 @@
         <p:spPr>
           <a:xfrm>
             <a:off x="0" y="0"/>
-            <a:ext cx="12191695" cy="731520"/>
+            <a:ext cx="12191695" cy="777240"/>
           </a:xfrm>
           <a:prstGeom prst="rect">
             <a:avLst/>
@@ -4250,14 +5035,58 @@
       </p:sp>
       <p:sp>
         <p:nvSpPr>
-          <p:cNvPr id="3" name="TextBox 2"/>
+          <p:cNvPr id="3" name="Rectangle 2"/>
+          <p:cNvSpPr/>
+          <p:nvPr/>
+        </p:nvSpPr>
+        <p:spPr>
+          <a:xfrm>
+            <a:off x="0" y="777240"/>
+            <a:ext cx="12191695" cy="54864"/>
+          </a:xfrm>
+          <a:prstGeom prst="rect">
+            <a:avLst/>
+          </a:prstGeom>
+          <a:solidFill>
+            <a:srgbClr val="E8B40F"/>
+          </a:solidFill>
+          <a:ln>
+            <a:noFill/>
+          </a:ln>
+        </p:spPr>
+        <p:style>
+          <a:lnRef idx="1">
+            <a:schemeClr val="accent1"/>
+          </a:lnRef>
+          <a:fillRef idx="3">
+            <a:schemeClr val="accent1"/>
+          </a:fillRef>
+          <a:effectRef idx="2">
+            <a:schemeClr val="accent1"/>
+          </a:effectRef>
+          <a:fontRef idx="minor">
+            <a:schemeClr val="lt1"/>
+          </a:fontRef>
+        </p:style>
+        <p:txBody>
+          <a:bodyPr rtlCol="0" anchor="ctr"/>
+          <a:lstStyle/>
+          <a:p>
+            <a:pPr algn="ctr"/>
+            <a:endParaRPr/>
+          </a:p>
+        </p:txBody>
+      </p:sp>
+      <p:sp>
+        <p:nvSpPr>
+          <p:cNvPr id="4" name="TextBox 3"/>
           <p:cNvSpPr txBox="1"/>
           <p:nvPr/>
         </p:nvSpPr>
         <p:spPr>
           <a:xfrm>
             <a:off x="457200" y="91440"/>
-            <a:ext cx="10972800" cy="640080"/>
+            <a:ext cx="11247120" cy="640080"/>
           </a:xfrm>
           <a:prstGeom prst="rect">
             <a:avLst/>
@@ -4272,26 +5101,725 @@
           <a:p>
             <a:pPr algn="l"/>
             <a:r>
-              <a:rPr sz="2800" b="1">
+              <a:rPr sz="2800" b="1" i="0">
                 <a:solidFill>
                   <a:srgbClr val="FFFFFF"/>
                 </a:solidFill>
-              </a:rPr>
-              <a:t>Conclusão e próximos passos</a:t>
-            </a:r>
-          </a:p>
-        </p:txBody>
-      </p:sp>
-      <p:sp>
-        <p:nvSpPr>
-          <p:cNvPr id="4" name="TextBox 3"/>
+                <a:latin typeface="Calibri"/>
+              </a:rPr>
+              <a:t>O que entregamos</a:t>
+            </a:r>
+          </a:p>
+        </p:txBody>
+      </p:sp>
+      <p:sp>
+        <p:nvSpPr>
+          <p:cNvPr id="5" name="TextBox 4"/>
           <p:cNvSpPr txBox="1"/>
           <p:nvPr/>
         </p:nvSpPr>
         <p:spPr>
           <a:xfrm>
-            <a:off x="548640" y="1371600"/>
-            <a:ext cx="10972800" cy="5029200"/>
+            <a:off x="457200" y="914400"/>
+            <a:ext cx="11247120" cy="457200"/>
+          </a:xfrm>
+          <a:prstGeom prst="rect">
+            <a:avLst/>
+          </a:prstGeom>
+          <a:noFill/>
+        </p:spPr>
+        <p:txBody>
+          <a:bodyPr wrap="none">
+            <a:spAutoFit/>
+          </a:bodyPr>
+          <a:lstStyle/>
+          <a:p>
+            <a:pPr algn="l"/>
+            <a:r>
+              <a:rPr sz="1500" b="0" i="1">
+                <a:solidFill>
+                  <a:srgbClr val="555B66"/>
+                </a:solidFill>
+                <a:latin typeface="Calibri"/>
+              </a:rPr>
+              <a:t>Síntese dos resultados e próximos passos</a:t>
+            </a:r>
+          </a:p>
+        </p:txBody>
+      </p:sp>
+      <p:sp>
+        <p:nvSpPr>
+          <p:cNvPr id="6" name="Rounded Rectangle 5"/>
+          <p:cNvSpPr/>
+          <p:nvPr/>
+        </p:nvSpPr>
+        <p:spPr>
+          <a:xfrm>
+            <a:off x="504291" y="1463040"/>
+            <a:ext cx="2148840" cy="1280160"/>
+          </a:xfrm>
+          <a:prstGeom prst="roundRect">
+            <a:avLst>
+              <a:gd name="adj" fmla="val 6000"/>
+            </a:avLst>
+          </a:prstGeom>
+          <a:solidFill>
+            <a:srgbClr val="1F3A5F"/>
+          </a:solidFill>
+          <a:ln>
+            <a:noFill/>
+          </a:ln>
+        </p:spPr>
+        <p:style>
+          <a:lnRef idx="1">
+            <a:schemeClr val="accent1"/>
+          </a:lnRef>
+          <a:fillRef idx="3">
+            <a:schemeClr val="accent1"/>
+          </a:fillRef>
+          <a:effectRef idx="2">
+            <a:schemeClr val="accent1"/>
+          </a:effectRef>
+          <a:fontRef idx="minor">
+            <a:schemeClr val="lt1"/>
+          </a:fontRef>
+        </p:style>
+        <p:txBody>
+          <a:bodyPr rtlCol="0" anchor="ctr"/>
+          <a:lstStyle/>
+          <a:p>
+            <a:pPr algn="ctr"/>
+            <a:endParaRPr/>
+          </a:p>
+        </p:txBody>
+      </p:sp>
+      <p:sp>
+        <p:nvSpPr>
+          <p:cNvPr id="7" name="TextBox 6"/>
+          <p:cNvSpPr txBox="1"/>
+          <p:nvPr/>
+        </p:nvSpPr>
+        <p:spPr>
+          <a:xfrm>
+            <a:off x="504291" y="1600200"/>
+            <a:ext cx="2148840" cy="704088"/>
+          </a:xfrm>
+          <a:prstGeom prst="rect">
+            <a:avLst/>
+          </a:prstGeom>
+          <a:noFill/>
+        </p:spPr>
+        <p:txBody>
+          <a:bodyPr wrap="none">
+            <a:spAutoFit/>
+          </a:bodyPr>
+          <a:lstStyle/>
+          <a:p>
+            <a:pPr algn="ctr"/>
+            <a:r>
+              <a:rPr sz="4000" b="1" i="0">
+                <a:solidFill>
+                  <a:srgbClr val="FFFFFF"/>
+                </a:solidFill>
+                <a:latin typeface="Calibri"/>
+              </a:rPr>
+              <a:t>9</a:t>
+            </a:r>
+          </a:p>
+        </p:txBody>
+      </p:sp>
+      <p:sp>
+        <p:nvSpPr>
+          <p:cNvPr id="8" name="TextBox 7"/>
+          <p:cNvSpPr txBox="1"/>
+          <p:nvPr/>
+        </p:nvSpPr>
+        <p:spPr>
+          <a:xfrm>
+            <a:off x="504291" y="2231136"/>
+            <a:ext cx="2148840" cy="448056"/>
+          </a:xfrm>
+          <a:prstGeom prst="rect">
+            <a:avLst/>
+          </a:prstGeom>
+          <a:noFill/>
+        </p:spPr>
+        <p:txBody>
+          <a:bodyPr wrap="none">
+            <a:spAutoFit/>
+          </a:bodyPr>
+          <a:lstStyle/>
+          <a:p>
+            <a:pPr algn="ctr"/>
+            <a:r>
+              <a:rPr sz="1200" b="0" i="0">
+                <a:solidFill>
+                  <a:srgbClr val="FFFFFF"/>
+                </a:solidFill>
+                <a:latin typeface="Calibri"/>
+              </a:rPr>
+              <a:t>relações em BCNF</a:t>
+            </a:r>
+          </a:p>
+        </p:txBody>
+      </p:sp>
+      <p:sp>
+        <p:nvSpPr>
+          <p:cNvPr id="9" name="Rounded Rectangle 8"/>
+          <p:cNvSpPr/>
+          <p:nvPr/>
+        </p:nvSpPr>
+        <p:spPr>
+          <a:xfrm>
+            <a:off x="2762859" y="1463040"/>
+            <a:ext cx="2148840" cy="1280160"/>
+          </a:xfrm>
+          <a:prstGeom prst="roundRect">
+            <a:avLst>
+              <a:gd name="adj" fmla="val 6000"/>
+            </a:avLst>
+          </a:prstGeom>
+          <a:solidFill>
+            <a:srgbClr val="2E86AB"/>
+          </a:solidFill>
+          <a:ln>
+            <a:noFill/>
+          </a:ln>
+        </p:spPr>
+        <p:style>
+          <a:lnRef idx="1">
+            <a:schemeClr val="accent1"/>
+          </a:lnRef>
+          <a:fillRef idx="3">
+            <a:schemeClr val="accent1"/>
+          </a:fillRef>
+          <a:effectRef idx="2">
+            <a:schemeClr val="accent1"/>
+          </a:effectRef>
+          <a:fontRef idx="minor">
+            <a:schemeClr val="lt1"/>
+          </a:fontRef>
+        </p:style>
+        <p:txBody>
+          <a:bodyPr rtlCol="0" anchor="ctr"/>
+          <a:lstStyle/>
+          <a:p>
+            <a:pPr algn="ctr"/>
+            <a:endParaRPr/>
+          </a:p>
+        </p:txBody>
+      </p:sp>
+      <p:sp>
+        <p:nvSpPr>
+          <p:cNvPr id="10" name="TextBox 9"/>
+          <p:cNvSpPr txBox="1"/>
+          <p:nvPr/>
+        </p:nvSpPr>
+        <p:spPr>
+          <a:xfrm>
+            <a:off x="2762859" y="1600200"/>
+            <a:ext cx="2148840" cy="704088"/>
+          </a:xfrm>
+          <a:prstGeom prst="rect">
+            <a:avLst/>
+          </a:prstGeom>
+          <a:noFill/>
+        </p:spPr>
+        <p:txBody>
+          <a:bodyPr wrap="none">
+            <a:spAutoFit/>
+          </a:bodyPr>
+          <a:lstStyle/>
+          <a:p>
+            <a:pPr algn="ctr"/>
+            <a:r>
+              <a:rPr sz="4000" b="1" i="0">
+                <a:solidFill>
+                  <a:srgbClr val="FFFFFF"/>
+                </a:solidFill>
+                <a:latin typeface="Calibri"/>
+              </a:rPr>
+              <a:t>5</a:t>
+            </a:r>
+          </a:p>
+        </p:txBody>
+      </p:sp>
+      <p:sp>
+        <p:nvSpPr>
+          <p:cNvPr id="11" name="TextBox 10"/>
+          <p:cNvSpPr txBox="1"/>
+          <p:nvPr/>
+        </p:nvSpPr>
+        <p:spPr>
+          <a:xfrm>
+            <a:off x="2762859" y="2231136"/>
+            <a:ext cx="2148840" cy="448056"/>
+          </a:xfrm>
+          <a:prstGeom prst="rect">
+            <a:avLst/>
+          </a:prstGeom>
+          <a:noFill/>
+        </p:spPr>
+        <p:txBody>
+          <a:bodyPr wrap="none">
+            <a:spAutoFit/>
+          </a:bodyPr>
+          <a:lstStyle/>
+          <a:p>
+            <a:pPr algn="ctr"/>
+            <a:r>
+              <a:rPr sz="1200" b="0" i="0">
+                <a:solidFill>
+                  <a:srgbClr val="FFFFFF"/>
+                </a:solidFill>
+                <a:latin typeface="Calibri"/>
+              </a:rPr>
+              <a:t>consultas analíticas</a:t>
+            </a:r>
+          </a:p>
+        </p:txBody>
+      </p:sp>
+      <p:sp>
+        <p:nvSpPr>
+          <p:cNvPr id="12" name="Rounded Rectangle 11"/>
+          <p:cNvSpPr/>
+          <p:nvPr/>
+        </p:nvSpPr>
+        <p:spPr>
+          <a:xfrm>
+            <a:off x="5021427" y="1463040"/>
+            <a:ext cx="2148840" cy="1280160"/>
+          </a:xfrm>
+          <a:prstGeom prst="roundRect">
+            <a:avLst>
+              <a:gd name="adj" fmla="val 6000"/>
+            </a:avLst>
+          </a:prstGeom>
+          <a:solidFill>
+            <a:srgbClr val="6A1B9A"/>
+          </a:solidFill>
+          <a:ln>
+            <a:noFill/>
+          </a:ln>
+        </p:spPr>
+        <p:style>
+          <a:lnRef idx="1">
+            <a:schemeClr val="accent1"/>
+          </a:lnRef>
+          <a:fillRef idx="3">
+            <a:schemeClr val="accent1"/>
+          </a:fillRef>
+          <a:effectRef idx="2">
+            <a:schemeClr val="accent1"/>
+          </a:effectRef>
+          <a:fontRef idx="minor">
+            <a:schemeClr val="lt1"/>
+          </a:fontRef>
+        </p:style>
+        <p:txBody>
+          <a:bodyPr rtlCol="0" anchor="ctr"/>
+          <a:lstStyle/>
+          <a:p>
+            <a:pPr algn="ctr"/>
+            <a:endParaRPr/>
+          </a:p>
+        </p:txBody>
+      </p:sp>
+      <p:sp>
+        <p:nvSpPr>
+          <p:cNvPr id="13" name="TextBox 12"/>
+          <p:cNvSpPr txBox="1"/>
+          <p:nvPr/>
+        </p:nvSpPr>
+        <p:spPr>
+          <a:xfrm>
+            <a:off x="5021427" y="1600200"/>
+            <a:ext cx="2148840" cy="704088"/>
+          </a:xfrm>
+          <a:prstGeom prst="rect">
+            <a:avLst/>
+          </a:prstGeom>
+          <a:noFill/>
+        </p:spPr>
+        <p:txBody>
+          <a:bodyPr wrap="none">
+            <a:spAutoFit/>
+          </a:bodyPr>
+          <a:lstStyle/>
+          <a:p>
+            <a:pPr algn="ctr"/>
+            <a:r>
+              <a:rPr sz="4000" b="1" i="0">
+                <a:solidFill>
+                  <a:srgbClr val="FFFFFF"/>
+                </a:solidFill>
+                <a:latin typeface="Calibri"/>
+              </a:rPr>
+              <a:t>1</a:t>
+            </a:r>
+          </a:p>
+        </p:txBody>
+      </p:sp>
+      <p:sp>
+        <p:nvSpPr>
+          <p:cNvPr id="14" name="TextBox 13"/>
+          <p:cNvSpPr txBox="1"/>
+          <p:nvPr/>
+        </p:nvSpPr>
+        <p:spPr>
+          <a:xfrm>
+            <a:off x="5021427" y="2231136"/>
+            <a:ext cx="2148840" cy="448056"/>
+          </a:xfrm>
+          <a:prstGeom prst="rect">
+            <a:avLst/>
+          </a:prstGeom>
+          <a:noFill/>
+        </p:spPr>
+        <p:txBody>
+          <a:bodyPr wrap="none">
+            <a:spAutoFit/>
+          </a:bodyPr>
+          <a:lstStyle/>
+          <a:p>
+            <a:pPr algn="ctr"/>
+            <a:r>
+              <a:rPr sz="1200" b="0" i="0">
+                <a:solidFill>
+                  <a:srgbClr val="FFFFFF"/>
+                </a:solidFill>
+                <a:latin typeface="Calibri"/>
+              </a:rPr>
+              <a:t>window function</a:t>
+            </a:r>
+          </a:p>
+        </p:txBody>
+      </p:sp>
+      <p:sp>
+        <p:nvSpPr>
+          <p:cNvPr id="15" name="Rounded Rectangle 14"/>
+          <p:cNvSpPr/>
+          <p:nvPr/>
+        </p:nvSpPr>
+        <p:spPr>
+          <a:xfrm>
+            <a:off x="7279995" y="1463040"/>
+            <a:ext cx="2148840" cy="1280160"/>
+          </a:xfrm>
+          <a:prstGeom prst="roundRect">
+            <a:avLst>
+              <a:gd name="adj" fmla="val 6000"/>
+            </a:avLst>
+          </a:prstGeom>
+          <a:solidFill>
+            <a:srgbClr val="2E7D32"/>
+          </a:solidFill>
+          <a:ln>
+            <a:noFill/>
+          </a:ln>
+        </p:spPr>
+        <p:style>
+          <a:lnRef idx="1">
+            <a:schemeClr val="accent1"/>
+          </a:lnRef>
+          <a:fillRef idx="3">
+            <a:schemeClr val="accent1"/>
+          </a:fillRef>
+          <a:effectRef idx="2">
+            <a:schemeClr val="accent1"/>
+          </a:effectRef>
+          <a:fontRef idx="minor">
+            <a:schemeClr val="lt1"/>
+          </a:fontRef>
+        </p:style>
+        <p:txBody>
+          <a:bodyPr rtlCol="0" anchor="ctr"/>
+          <a:lstStyle/>
+          <a:p>
+            <a:pPr algn="ctr"/>
+            <a:endParaRPr/>
+          </a:p>
+        </p:txBody>
+      </p:sp>
+      <p:sp>
+        <p:nvSpPr>
+          <p:cNvPr id="16" name="TextBox 15"/>
+          <p:cNvSpPr txBox="1"/>
+          <p:nvPr/>
+        </p:nvSpPr>
+        <p:spPr>
+          <a:xfrm>
+            <a:off x="7279995" y="1600200"/>
+            <a:ext cx="2148840" cy="704088"/>
+          </a:xfrm>
+          <a:prstGeom prst="rect">
+            <a:avLst/>
+          </a:prstGeom>
+          <a:noFill/>
+        </p:spPr>
+        <p:txBody>
+          <a:bodyPr wrap="none">
+            <a:spAutoFit/>
+          </a:bodyPr>
+          <a:lstStyle/>
+          <a:p>
+            <a:pPr algn="ctr"/>
+            <a:r>
+              <a:rPr sz="4000" b="1" i="0">
+                <a:solidFill>
+                  <a:srgbClr val="FFFFFF"/>
+                </a:solidFill>
+                <a:latin typeface="Calibri"/>
+              </a:rPr>
+              <a:t>6</a:t>
+            </a:r>
+          </a:p>
+        </p:txBody>
+      </p:sp>
+      <p:sp>
+        <p:nvSpPr>
+          <p:cNvPr id="17" name="TextBox 16"/>
+          <p:cNvSpPr txBox="1"/>
+          <p:nvPr/>
+        </p:nvSpPr>
+        <p:spPr>
+          <a:xfrm>
+            <a:off x="7279995" y="2231136"/>
+            <a:ext cx="2148840" cy="448056"/>
+          </a:xfrm>
+          <a:prstGeom prst="rect">
+            <a:avLst/>
+          </a:prstGeom>
+          <a:noFill/>
+        </p:spPr>
+        <p:txBody>
+          <a:bodyPr wrap="none">
+            <a:spAutoFit/>
+          </a:bodyPr>
+          <a:lstStyle/>
+          <a:p>
+            <a:pPr algn="ctr"/>
+            <a:r>
+              <a:rPr sz="1200" b="0" i="0">
+                <a:solidFill>
+                  <a:srgbClr val="FFFFFF"/>
+                </a:solidFill>
+                <a:latin typeface="Calibri"/>
+              </a:rPr>
+              <a:t>visualizações</a:t>
+            </a:r>
+          </a:p>
+        </p:txBody>
+      </p:sp>
+      <p:sp>
+        <p:nvSpPr>
+          <p:cNvPr id="18" name="Rounded Rectangle 17"/>
+          <p:cNvSpPr/>
+          <p:nvPr/>
+        </p:nvSpPr>
+        <p:spPr>
+          <a:xfrm>
+            <a:off x="9538563" y="1463040"/>
+            <a:ext cx="2148840" cy="1280160"/>
+          </a:xfrm>
+          <a:prstGeom prst="roundRect">
+            <a:avLst>
+              <a:gd name="adj" fmla="val 6000"/>
+            </a:avLst>
+          </a:prstGeom>
+          <a:solidFill>
+            <a:srgbClr val="C0504D"/>
+          </a:solidFill>
+          <a:ln>
+            <a:noFill/>
+          </a:ln>
+        </p:spPr>
+        <p:style>
+          <a:lnRef idx="1">
+            <a:schemeClr val="accent1"/>
+          </a:lnRef>
+          <a:fillRef idx="3">
+            <a:schemeClr val="accent1"/>
+          </a:fillRef>
+          <a:effectRef idx="2">
+            <a:schemeClr val="accent1"/>
+          </a:effectRef>
+          <a:fontRef idx="minor">
+            <a:schemeClr val="lt1"/>
+          </a:fontRef>
+        </p:style>
+        <p:txBody>
+          <a:bodyPr rtlCol="0" anchor="ctr"/>
+          <a:lstStyle/>
+          <a:p>
+            <a:pPr algn="ctr"/>
+            <a:endParaRPr/>
+          </a:p>
+        </p:txBody>
+      </p:sp>
+      <p:sp>
+        <p:nvSpPr>
+          <p:cNvPr id="19" name="TextBox 18"/>
+          <p:cNvSpPr txBox="1"/>
+          <p:nvPr/>
+        </p:nvSpPr>
+        <p:spPr>
+          <a:xfrm>
+            <a:off x="9538563" y="1600200"/>
+            <a:ext cx="2148840" cy="704088"/>
+          </a:xfrm>
+          <a:prstGeom prst="rect">
+            <a:avLst/>
+          </a:prstGeom>
+          <a:noFill/>
+        </p:spPr>
+        <p:txBody>
+          <a:bodyPr wrap="none">
+            <a:spAutoFit/>
+          </a:bodyPr>
+          <a:lstStyle/>
+          <a:p>
+            <a:pPr algn="ctr"/>
+            <a:r>
+              <a:rPr sz="4000" b="1" i="0">
+                <a:solidFill>
+                  <a:srgbClr val="FFFFFF"/>
+                </a:solidFill>
+                <a:latin typeface="Calibri"/>
+              </a:rPr>
+              <a:t>3</a:t>
+            </a:r>
+          </a:p>
+        </p:txBody>
+      </p:sp>
+      <p:sp>
+        <p:nvSpPr>
+          <p:cNvPr id="20" name="TextBox 19"/>
+          <p:cNvSpPr txBox="1"/>
+          <p:nvPr/>
+        </p:nvSpPr>
+        <p:spPr>
+          <a:xfrm>
+            <a:off x="9538563" y="2231136"/>
+            <a:ext cx="2148840" cy="448056"/>
+          </a:xfrm>
+          <a:prstGeom prst="rect">
+            <a:avLst/>
+          </a:prstGeom>
+          <a:noFill/>
+        </p:spPr>
+        <p:txBody>
+          <a:bodyPr wrap="none">
+            <a:spAutoFit/>
+          </a:bodyPr>
+          <a:lstStyle/>
+          <a:p>
+            <a:pPr algn="ctr"/>
+            <a:r>
+              <a:rPr sz="1200" b="0" i="0">
+                <a:solidFill>
+                  <a:srgbClr val="FFFFFF"/>
+                </a:solidFill>
+                <a:latin typeface="Calibri"/>
+              </a:rPr>
+              <a:t>bônus contemplados</a:t>
+            </a:r>
+          </a:p>
+        </p:txBody>
+      </p:sp>
+      <p:sp>
+        <p:nvSpPr>
+          <p:cNvPr id="21" name="Rounded Rectangle 20"/>
+          <p:cNvSpPr/>
+          <p:nvPr/>
+        </p:nvSpPr>
+        <p:spPr>
+          <a:xfrm>
+            <a:off x="457200" y="3154680"/>
+            <a:ext cx="5577840" cy="2651760"/>
+          </a:xfrm>
+          <a:prstGeom prst="roundRect">
+            <a:avLst>
+              <a:gd name="adj" fmla="val 6000"/>
+            </a:avLst>
+          </a:prstGeom>
+          <a:solidFill>
+            <a:srgbClr val="F5F7FA"/>
+          </a:solidFill>
+          <a:ln w="19050">
+            <a:solidFill>
+              <a:srgbClr val="1F3A5F"/>
+            </a:solidFill>
+          </a:ln>
+        </p:spPr>
+        <p:style>
+          <a:lnRef idx="1">
+            <a:schemeClr val="accent1"/>
+          </a:lnRef>
+          <a:fillRef idx="3">
+            <a:schemeClr val="accent1"/>
+          </a:fillRef>
+          <a:effectRef idx="2">
+            <a:schemeClr val="accent1"/>
+          </a:effectRef>
+          <a:fontRef idx="minor">
+            <a:schemeClr val="lt1"/>
+          </a:fontRef>
+        </p:style>
+        <p:txBody>
+          <a:bodyPr rtlCol="0" anchor="ctr"/>
+          <a:lstStyle/>
+          <a:p>
+            <a:pPr algn="ctr"/>
+            <a:endParaRPr/>
+          </a:p>
+        </p:txBody>
+      </p:sp>
+      <p:sp>
+        <p:nvSpPr>
+          <p:cNvPr id="22" name="TextBox 21"/>
+          <p:cNvSpPr txBox="1"/>
+          <p:nvPr/>
+        </p:nvSpPr>
+        <p:spPr>
+          <a:xfrm>
+            <a:off x="640080" y="3291840"/>
+            <a:ext cx="5212080" cy="411480"/>
+          </a:xfrm>
+          <a:prstGeom prst="rect">
+            <a:avLst/>
+          </a:prstGeom>
+          <a:noFill/>
+        </p:spPr>
+        <p:txBody>
+          <a:bodyPr wrap="none">
+            <a:spAutoFit/>
+          </a:bodyPr>
+          <a:lstStyle/>
+          <a:p>
+            <a:pPr algn="l"/>
+            <a:r>
+              <a:rPr sz="1800" b="1" i="0">
+                <a:solidFill>
+                  <a:srgbClr val="1F3A5F"/>
+                </a:solidFill>
+                <a:latin typeface="Calibri"/>
+              </a:rPr>
+              <a:t>Principal aprendizado</a:t>
+            </a:r>
+          </a:p>
+        </p:txBody>
+      </p:sp>
+      <p:sp>
+        <p:nvSpPr>
+          <p:cNvPr id="23" name="TextBox 22"/>
+          <p:cNvSpPr txBox="1"/>
+          <p:nvPr/>
+        </p:nvSpPr>
+        <p:spPr>
+          <a:xfrm>
+            <a:off x="640080" y="3794760"/>
+            <a:ext cx="5212080" cy="1874520"/>
           </a:xfrm>
           <a:prstGeom prst="rect">
             <a:avLst/>
@@ -4306,76 +5834,262 @@
           <a:p>
             <a:pPr algn="l">
               <a:spcAft>
-                <a:spcPts val="800"/>
+                <a:spcPts val="400"/>
               </a:spcAft>
             </a:pPr>
             <a:r>
-              <a:rPr sz="1800">
-                <a:solidFill>
-                  <a:srgbClr val="333333"/>
-                </a:solidFill>
-              </a:rPr>
-              <a:t>• Cobrimos o ciclo completo: ER → Relacional → SQL → EDA.</a:t>
+              <a:rPr sz="1400">
+                <a:solidFill>
+                  <a:srgbClr val="212529"/>
+                </a:solidFill>
+              </a:rPr>
+              <a:t>• A qualidade do modelo conceitual</a:t>
             </a:r>
           </a:p>
           <a:p>
             <a:pPr algn="l">
               <a:spcAft>
-                <a:spcPts val="800"/>
+                <a:spcPts val="400"/>
               </a:spcAft>
             </a:pPr>
             <a:r>
-              <a:rPr sz="1800">
-                <a:solidFill>
-                  <a:srgbClr val="333333"/>
-                </a:solidFill>
-              </a:rPr>
-              <a:t>• Aprendemos: qualidade da modelagem conceitual = clareza das consultas.</a:t>
+              <a:rPr sz="1400">
+                <a:solidFill>
+                  <a:srgbClr val="212529"/>
+                </a:solidFill>
+              </a:rPr>
+              <a:t>• determina a clareza das consultas.</a:t>
             </a:r>
           </a:p>
           <a:p>
             <a:pPr algn="l">
               <a:spcAft>
-                <a:spcPts val="800"/>
+                <a:spcPts val="400"/>
               </a:spcAft>
             </a:pPr>
             <a:r>
-              <a:rPr sz="1800">
-                <a:solidFill>
-                  <a:srgbClr val="333333"/>
-                </a:solidFill>
-              </a:rPr>
-              <a:t>• Resultado: 9 relações em BCNF, 5 consultas analíticas + 1 bônus, todos os requisitos cobertos.</a:t>
+              <a:rPr sz="1400">
+                <a:solidFill>
+                  <a:srgbClr val="212529"/>
+                </a:solidFill>
+              </a:rPr>
+              <a:t>• Um modelo mal normalizado teria forçado</a:t>
             </a:r>
           </a:p>
           <a:p>
             <a:pPr algn="l">
               <a:spcAft>
-                <a:spcPts val="800"/>
+                <a:spcPts val="400"/>
               </a:spcAft>
             </a:pPr>
             <a:r>
-              <a:rPr sz="1800">
-                <a:solidFill>
-                  <a:srgbClr val="333333"/>
-                </a:solidFill>
-              </a:rPr>
-              <a:t>• Limitações: resultados mostrados sobre amostra de validação — pipeline pronto para os CSVs reais.</a:t>
-            </a:r>
-          </a:p>
+              <a:rPr sz="1400">
+                <a:solidFill>
+                  <a:srgbClr val="212529"/>
+                </a:solidFill>
+              </a:rPr>
+              <a:t>• workarounds em cada query analítica.</a:t>
+            </a:r>
+          </a:p>
+        </p:txBody>
+      </p:sp>
+      <p:sp>
+        <p:nvSpPr>
+          <p:cNvPr id="24" name="Rounded Rectangle 23"/>
+          <p:cNvSpPr/>
+          <p:nvPr/>
+        </p:nvSpPr>
+        <p:spPr>
+          <a:xfrm>
+            <a:off x="6217920" y="3154680"/>
+            <a:ext cx="5486400" cy="2651760"/>
+          </a:xfrm>
+          <a:prstGeom prst="roundRect">
+            <a:avLst>
+              <a:gd name="adj" fmla="val 6000"/>
+            </a:avLst>
+          </a:prstGeom>
+          <a:solidFill>
+            <a:srgbClr val="F5F7FA"/>
+          </a:solidFill>
+          <a:ln w="19050">
+            <a:solidFill>
+              <a:srgbClr val="2E7D32"/>
+            </a:solidFill>
+          </a:ln>
+        </p:spPr>
+        <p:style>
+          <a:lnRef idx="1">
+            <a:schemeClr val="accent1"/>
+          </a:lnRef>
+          <a:fillRef idx="3">
+            <a:schemeClr val="accent1"/>
+          </a:fillRef>
+          <a:effectRef idx="2">
+            <a:schemeClr val="accent1"/>
+          </a:effectRef>
+          <a:fontRef idx="minor">
+            <a:schemeClr val="lt1"/>
+          </a:fontRef>
+        </p:style>
+        <p:txBody>
+          <a:bodyPr rtlCol="0" anchor="ctr"/>
+          <a:lstStyle/>
+          <a:p>
+            <a:pPr algn="ctr"/>
+            <a:endParaRPr/>
+          </a:p>
+        </p:txBody>
+      </p:sp>
+      <p:sp>
+        <p:nvSpPr>
+          <p:cNvPr id="25" name="TextBox 24"/>
+          <p:cNvSpPr txBox="1"/>
+          <p:nvPr/>
+        </p:nvSpPr>
+        <p:spPr>
+          <a:xfrm>
+            <a:off x="6400800" y="3291840"/>
+            <a:ext cx="5120640" cy="411480"/>
+          </a:xfrm>
+          <a:prstGeom prst="rect">
+            <a:avLst/>
+          </a:prstGeom>
+          <a:noFill/>
+        </p:spPr>
+        <p:txBody>
+          <a:bodyPr wrap="none">
+            <a:spAutoFit/>
+          </a:bodyPr>
+          <a:lstStyle/>
+          <a:p>
+            <a:pPr algn="l"/>
+            <a:r>
+              <a:rPr sz="1800" b="1" i="0">
+                <a:solidFill>
+                  <a:srgbClr val="2E7D32"/>
+                </a:solidFill>
+                <a:latin typeface="Calibri"/>
+              </a:rPr>
+              <a:t>Próximos passos</a:t>
+            </a:r>
+          </a:p>
+        </p:txBody>
+      </p:sp>
+      <p:sp>
+        <p:nvSpPr>
+          <p:cNvPr id="26" name="TextBox 25"/>
+          <p:cNvSpPr txBox="1"/>
+          <p:nvPr/>
+        </p:nvSpPr>
+        <p:spPr>
+          <a:xfrm>
+            <a:off x="6400800" y="3794760"/>
+            <a:ext cx="5120640" cy="1874520"/>
+          </a:xfrm>
+          <a:prstGeom prst="rect">
+            <a:avLst/>
+          </a:prstGeom>
+          <a:noFill/>
+        </p:spPr>
+        <p:txBody>
+          <a:bodyPr wrap="square">
+            <a:spAutoFit/>
+          </a:bodyPr>
+          <a:lstStyle/>
           <a:p>
             <a:pPr algn="l">
               <a:spcAft>
-                <a:spcPts val="800"/>
+                <a:spcPts val="400"/>
               </a:spcAft>
             </a:pPr>
             <a:r>
-              <a:rPr sz="1800">
-                <a:solidFill>
-                  <a:srgbClr val="333333"/>
-                </a:solidFill>
-              </a:rPr>
-              <a:t>• Próximos passos: cruzamento com CEIS (Sanções), carga incremental, dashboard interativo.</a:t>
+              <a:rPr sz="1400">
+                <a:solidFill>
+                  <a:srgbClr val="212529"/>
+                </a:solidFill>
+              </a:rPr>
+              <a:t>• Cruzamento com a base CEIS (Sanções)</a:t>
+            </a:r>
+          </a:p>
+          <a:p>
+            <a:pPr algn="l">
+              <a:spcAft>
+                <a:spcPts val="400"/>
+              </a:spcAft>
+            </a:pPr>
+            <a:r>
+              <a:rPr sz="1400">
+                <a:solidFill>
+                  <a:srgbClr val="212529"/>
+                </a:solidFill>
+              </a:rPr>
+              <a:t>• Carga incremental mensal automatizada</a:t>
+            </a:r>
+          </a:p>
+          <a:p>
+            <a:pPr algn="l">
+              <a:spcAft>
+                <a:spcPts val="400"/>
+              </a:spcAft>
+            </a:pPr>
+            <a:r>
+              <a:rPr sz="1400">
+                <a:solidFill>
+                  <a:srgbClr val="212529"/>
+                </a:solidFill>
+              </a:rPr>
+              <a:t>• Dashboard interativo alinhado à LAI</a:t>
+            </a:r>
+          </a:p>
+          <a:p>
+            <a:pPr algn="l">
+              <a:spcAft>
+                <a:spcPts val="400"/>
+              </a:spcAft>
+            </a:pPr>
+            <a:r>
+              <a:rPr sz="1400">
+                <a:solidFill>
+                  <a:srgbClr val="212529"/>
+                </a:solidFill>
+              </a:rPr>
+              <a:t>• Detecção de padrões via técnicas estatísticas</a:t>
+            </a:r>
+          </a:p>
+        </p:txBody>
+      </p:sp>
+      <p:sp>
+        <p:nvSpPr>
+          <p:cNvPr id="27" name="TextBox 26"/>
+          <p:cNvSpPr txBox="1"/>
+          <p:nvPr/>
+        </p:nvSpPr>
+        <p:spPr>
+          <a:xfrm>
+            <a:off x="365760" y="6446520"/>
+            <a:ext cx="11430000" cy="320040"/>
+          </a:xfrm>
+          <a:prstGeom prst="rect">
+            <a:avLst/>
+          </a:prstGeom>
+          <a:noFill/>
+        </p:spPr>
+        <p:txBody>
+          <a:bodyPr wrap="none">
+            <a:spAutoFit/>
+          </a:bodyPr>
+          <a:lstStyle/>
+          <a:p>
+            <a:pPr algn="r"/>
+            <a:r>
+              <a:rPr sz="900" b="0" i="1">
+                <a:solidFill>
+                  <a:srgbClr val="1F3A5F"/>
+                </a:solidFill>
+                <a:latin typeface="Calibri"/>
+              </a:rPr>
+              <a:t>TP Banco de Dados · DCC/UFMG · 15/17</a:t>
             </a:r>
           </a:p>
         </p:txBody>
@@ -4451,14 +6165,58 @@
       </p:sp>
       <p:sp>
         <p:nvSpPr>
-          <p:cNvPr id="3" name="TextBox 2"/>
+          <p:cNvPr id="3" name="Right Triangle 2"/>
+          <p:cNvSpPr/>
+          <p:nvPr/>
+        </p:nvSpPr>
+        <p:spPr>
+          <a:xfrm>
+            <a:off x="0" y="5029200"/>
+            <a:ext cx="12191695" cy="1828800"/>
+          </a:xfrm>
+          <a:prstGeom prst="rtTriangle">
+            <a:avLst/>
+          </a:prstGeom>
+          <a:solidFill>
+            <a:srgbClr val="2E86AB"/>
+          </a:solidFill>
+          <a:ln>
+            <a:noFill/>
+          </a:ln>
+        </p:spPr>
+        <p:style>
+          <a:lnRef idx="1">
+            <a:schemeClr val="accent1"/>
+          </a:lnRef>
+          <a:fillRef idx="3">
+            <a:schemeClr val="accent1"/>
+          </a:fillRef>
+          <a:effectRef idx="2">
+            <a:schemeClr val="accent1"/>
+          </a:effectRef>
+          <a:fontRef idx="minor">
+            <a:schemeClr val="lt1"/>
+          </a:fontRef>
+        </p:style>
+        <p:txBody>
+          <a:bodyPr rtlCol="0" anchor="ctr"/>
+          <a:lstStyle/>
+          <a:p>
+            <a:pPr algn="ctr"/>
+            <a:endParaRPr/>
+          </a:p>
+        </p:txBody>
+      </p:sp>
+      <p:sp>
+        <p:nvSpPr>
+          <p:cNvPr id="4" name="TextBox 3"/>
           <p:cNvSpPr txBox="1"/>
           <p:nvPr/>
         </p:nvSpPr>
         <p:spPr>
           <a:xfrm>
-            <a:off x="4111216" y="2194560"/>
-            <a:ext cx="4030527" cy="1200329"/>
+            <a:off x="640080" y="2286000"/>
+            <a:ext cx="10972800" cy="1828800"/>
           </a:xfrm>
           <a:prstGeom prst="rect">
             <a:avLst/>
@@ -4473,20 +6231,48 @@
           <a:p>
             <a:pPr algn="ctr"/>
             <a:r>
-              <a:rPr sz="7200" b="1" dirty="0" err="1">
+              <a:rPr sz="8400" b="1" i="0">
                 <a:solidFill>
                   <a:srgbClr val="FFFFFF"/>
                 </a:solidFill>
-              </a:rPr>
-              <a:t>Obrigado</a:t>
-            </a:r>
-            <a:r>
-              <a:rPr sz="7200" b="1" dirty="0">
-                <a:solidFill>
-                  <a:srgbClr val="FFFFFF"/>
-                </a:solidFill>
-              </a:rPr>
-              <a:t>!</a:t>
+                <a:latin typeface="Calibri"/>
+              </a:rPr>
+              <a:t>Obrigado!</a:t>
+            </a:r>
+          </a:p>
+        </p:txBody>
+      </p:sp>
+      <p:sp>
+        <p:nvSpPr>
+          <p:cNvPr id="5" name="TextBox 4"/>
+          <p:cNvSpPr txBox="1"/>
+          <p:nvPr/>
+        </p:nvSpPr>
+        <p:spPr>
+          <a:xfrm>
+            <a:off x="640080" y="3840480"/>
+            <a:ext cx="10972800" cy="731520"/>
+          </a:xfrm>
+          <a:prstGeom prst="rect">
+            <a:avLst/>
+          </a:prstGeom>
+          <a:noFill/>
+        </p:spPr>
+        <p:txBody>
+          <a:bodyPr wrap="none">
+            <a:spAutoFit/>
+          </a:bodyPr>
+          <a:lstStyle/>
+          <a:p>
+            <a:pPr algn="ctr"/>
+            <a:r>
+              <a:rPr sz="3200" b="0" i="1">
+                <a:solidFill>
+                  <a:srgbClr val="E8B40F"/>
+                </a:solidFill>
+                <a:latin typeface="Calibri"/>
+              </a:rPr>
+              <a:t>Perguntas?</a:t>
             </a:r>
           </a:p>
         </p:txBody>
@@ -4525,7 +6311,7 @@
         <p:spPr>
           <a:xfrm>
             <a:off x="0" y="0"/>
-            <a:ext cx="12191695" cy="731520"/>
+            <a:ext cx="12191695" cy="777240"/>
           </a:xfrm>
           <a:prstGeom prst="rect">
             <a:avLst/>
@@ -4562,14 +6348,58 @@
       </p:sp>
       <p:sp>
         <p:nvSpPr>
-          <p:cNvPr id="3" name="TextBox 2"/>
+          <p:cNvPr id="3" name="Rectangle 2"/>
+          <p:cNvSpPr/>
+          <p:nvPr/>
+        </p:nvSpPr>
+        <p:spPr>
+          <a:xfrm>
+            <a:off x="0" y="777240"/>
+            <a:ext cx="12191695" cy="54864"/>
+          </a:xfrm>
+          <a:prstGeom prst="rect">
+            <a:avLst/>
+          </a:prstGeom>
+          <a:solidFill>
+            <a:srgbClr val="E8B40F"/>
+          </a:solidFill>
+          <a:ln>
+            <a:noFill/>
+          </a:ln>
+        </p:spPr>
+        <p:style>
+          <a:lnRef idx="1">
+            <a:schemeClr val="accent1"/>
+          </a:lnRef>
+          <a:fillRef idx="3">
+            <a:schemeClr val="accent1"/>
+          </a:fillRef>
+          <a:effectRef idx="2">
+            <a:schemeClr val="accent1"/>
+          </a:effectRef>
+          <a:fontRef idx="minor">
+            <a:schemeClr val="lt1"/>
+          </a:fontRef>
+        </p:style>
+        <p:txBody>
+          <a:bodyPr rtlCol="0" anchor="ctr"/>
+          <a:lstStyle/>
+          <a:p>
+            <a:pPr algn="ctr"/>
+            <a:endParaRPr/>
+          </a:p>
+        </p:txBody>
+      </p:sp>
+      <p:sp>
+        <p:nvSpPr>
+          <p:cNvPr id="4" name="TextBox 3"/>
           <p:cNvSpPr txBox="1"/>
           <p:nvPr/>
         </p:nvSpPr>
         <p:spPr>
           <a:xfrm>
             <a:off x="457200" y="91440"/>
-            <a:ext cx="10972800" cy="640080"/>
+            <a:ext cx="11247120" cy="640080"/>
           </a:xfrm>
           <a:prstGeom prst="rect">
             <a:avLst/>
@@ -4584,10 +6414,11 @@
           <a:p>
             <a:pPr algn="l"/>
             <a:r>
-              <a:rPr sz="2800" b="1">
+              <a:rPr sz="2800" b="1" i="0">
                 <a:solidFill>
                   <a:srgbClr val="FFFFFF"/>
                 </a:solidFill>
+                <a:latin typeface="Calibri"/>
               </a:rPr>
               <a:t>Declaração de uso de IA</a:t>
             </a:r>
@@ -4596,14 +6427,14 @@
       </p:sp>
       <p:sp>
         <p:nvSpPr>
-          <p:cNvPr id="4" name="TextBox 3"/>
+          <p:cNvPr id="5" name="TextBox 4"/>
           <p:cNvSpPr txBox="1"/>
           <p:nvPr/>
         </p:nvSpPr>
         <p:spPr>
           <a:xfrm>
-            <a:off x="457200" y="777240"/>
-            <a:ext cx="10972800" cy="365760"/>
+            <a:off x="457200" y="914400"/>
+            <a:ext cx="11247120" cy="457200"/>
           </a:xfrm>
           <a:prstGeom prst="rect">
             <a:avLst/>
@@ -4616,11 +6447,13 @@
           </a:bodyPr>
           <a:lstStyle/>
           <a:p>
-            <a:r>
-              <a:rPr sz="1400" i="1">
-                <a:solidFill>
-                  <a:srgbClr val="1F3A5F"/>
-                </a:solidFill>
+            <a:pPr algn="l"/>
+            <a:r>
+              <a:rPr sz="1500" b="0" i="1">
+                <a:solidFill>
+                  <a:srgbClr val="555B66"/>
+                </a:solidFill>
+                <a:latin typeface="Calibri"/>
               </a:rPr>
               <a:t>Conforme permitido pelo enunciado</a:t>
             </a:r>
@@ -4629,14 +6462,97 @@
       </p:sp>
       <p:sp>
         <p:nvSpPr>
-          <p:cNvPr id="5" name="TextBox 4"/>
+          <p:cNvPr id="6" name="Rounded Rectangle 5"/>
+          <p:cNvSpPr/>
+          <p:nvPr/>
+        </p:nvSpPr>
+        <p:spPr>
+          <a:xfrm>
+            <a:off x="457200" y="1463040"/>
+            <a:ext cx="5577840" cy="4206240"/>
+          </a:xfrm>
+          <a:prstGeom prst="roundRect">
+            <a:avLst>
+              <a:gd name="adj" fmla="val 6000"/>
+            </a:avLst>
+          </a:prstGeom>
+          <a:solidFill>
+            <a:srgbClr val="F5F7FA"/>
+          </a:solidFill>
+          <a:ln w="19050">
+            <a:solidFill>
+              <a:srgbClr val="2E7D32"/>
+            </a:solidFill>
+          </a:ln>
+        </p:spPr>
+        <p:style>
+          <a:lnRef idx="1">
+            <a:schemeClr val="accent1"/>
+          </a:lnRef>
+          <a:fillRef idx="3">
+            <a:schemeClr val="accent1"/>
+          </a:fillRef>
+          <a:effectRef idx="2">
+            <a:schemeClr val="accent1"/>
+          </a:effectRef>
+          <a:fontRef idx="minor">
+            <a:schemeClr val="lt1"/>
+          </a:fontRef>
+        </p:style>
+        <p:txBody>
+          <a:bodyPr rtlCol="0" anchor="ctr"/>
+          <a:lstStyle/>
+          <a:p>
+            <a:pPr algn="ctr"/>
+            <a:endParaRPr/>
+          </a:p>
+        </p:txBody>
+      </p:sp>
+      <p:sp>
+        <p:nvSpPr>
+          <p:cNvPr id="7" name="TextBox 6"/>
           <p:cNvSpPr txBox="1"/>
           <p:nvPr/>
         </p:nvSpPr>
         <p:spPr>
           <a:xfrm>
-            <a:off x="548640" y="1371600"/>
-            <a:ext cx="10972800" cy="3267561"/>
+            <a:off x="640080" y="1600200"/>
+            <a:ext cx="5212080" cy="411480"/>
+          </a:xfrm>
+          <a:prstGeom prst="rect">
+            <a:avLst/>
+          </a:prstGeom>
+          <a:noFill/>
+        </p:spPr>
+        <p:txBody>
+          <a:bodyPr wrap="none">
+            <a:spAutoFit/>
+          </a:bodyPr>
+          <a:lstStyle/>
+          <a:p>
+            <a:pPr algn="l"/>
+            <a:r>
+              <a:rPr sz="1800" b="1" i="0">
+                <a:solidFill>
+                  <a:srgbClr val="2E7D32"/>
+                </a:solidFill>
+                <a:latin typeface="Calibri"/>
+              </a:rPr>
+              <a:t>✓  Onde a IA foi usada</a:t>
+            </a:r>
+          </a:p>
+        </p:txBody>
+      </p:sp>
+      <p:sp>
+        <p:nvSpPr>
+          <p:cNvPr id="8" name="TextBox 7"/>
+          <p:cNvSpPr txBox="1"/>
+          <p:nvPr/>
+        </p:nvSpPr>
+        <p:spPr>
+          <a:xfrm>
+            <a:off x="640080" y="2103120"/>
+            <a:ext cx="5212080" cy="841256"/>
           </a:xfrm>
           <a:prstGeom prst="rect">
             <a:avLst/>
@@ -4651,616 +6567,439 @@
           <a:p>
             <a:pPr algn="l">
               <a:spcAft>
-                <a:spcPts val="800"/>
+                <a:spcPts val="400"/>
               </a:spcAft>
             </a:pPr>
             <a:r>
-              <a:rPr sz="1700" dirty="0">
-                <a:solidFill>
-                  <a:srgbClr val="333333"/>
-                </a:solidFill>
-              </a:rPr>
-              <a:t>• Ferramenta </a:t>
-            </a:r>
-            <a:r>
-              <a:rPr sz="1700" dirty="0" err="1">
-                <a:solidFill>
-                  <a:srgbClr val="333333"/>
-                </a:solidFill>
-              </a:rPr>
-              <a:t>utilizada</a:t>
-            </a:r>
-            <a:r>
-              <a:rPr sz="1700" dirty="0">
-                <a:solidFill>
-                  <a:srgbClr val="333333"/>
-                </a:solidFill>
-              </a:rPr>
-              <a:t>: </a:t>
-            </a:r>
-            <a:r>
-              <a:rPr sz="1700" dirty="0" err="1">
-                <a:solidFill>
-                  <a:srgbClr val="333333"/>
-                </a:solidFill>
-              </a:rPr>
-              <a:t>assistente</a:t>
-            </a:r>
-            <a:r>
-              <a:rPr sz="1700" dirty="0">
-                <a:solidFill>
-                  <a:srgbClr val="333333"/>
-                </a:solidFill>
-              </a:rPr>
-              <a:t> de IA </a:t>
-            </a:r>
-            <a:r>
-              <a:rPr sz="1700" dirty="0" err="1">
-                <a:solidFill>
-                  <a:srgbClr val="333333"/>
-                </a:solidFill>
-              </a:rPr>
-              <a:t>generativa</a:t>
-            </a:r>
-            <a:r>
-              <a:rPr sz="1700" dirty="0">
-                <a:solidFill>
-                  <a:srgbClr val="333333"/>
-                </a:solidFill>
-              </a:rPr>
-              <a:t>.</a:t>
+              <a:rPr sz="1400" dirty="0">
+                <a:solidFill>
+                  <a:srgbClr val="212529"/>
+                </a:solidFill>
+              </a:rPr>
+              <a:t>• </a:t>
+            </a:r>
+            <a:r>
+              <a:rPr sz="1400" dirty="0" err="1">
+                <a:solidFill>
+                  <a:srgbClr val="212529"/>
+                </a:solidFill>
+              </a:rPr>
+              <a:t>Apoio</a:t>
+            </a:r>
+            <a:r>
+              <a:rPr sz="1400" dirty="0">
+                <a:solidFill>
+                  <a:srgbClr val="212529"/>
+                </a:solidFill>
+              </a:rPr>
+              <a:t> </a:t>
+            </a:r>
+            <a:r>
+              <a:rPr sz="1400" dirty="0" err="1">
+                <a:solidFill>
+                  <a:srgbClr val="212529"/>
+                </a:solidFill>
+              </a:rPr>
+              <a:t>na</a:t>
+            </a:r>
+            <a:r>
+              <a:rPr sz="1400" dirty="0">
+                <a:solidFill>
+                  <a:srgbClr val="212529"/>
+                </a:solidFill>
+              </a:rPr>
+              <a:t> </a:t>
+            </a:r>
+            <a:r>
+              <a:rPr sz="1400" dirty="0" err="1">
+                <a:solidFill>
+                  <a:srgbClr val="212529"/>
+                </a:solidFill>
+              </a:rPr>
+              <a:t>redação</a:t>
+            </a:r>
+            <a:r>
+              <a:rPr sz="1400" dirty="0">
+                <a:solidFill>
+                  <a:srgbClr val="212529"/>
+                </a:solidFill>
+              </a:rPr>
+              <a:t> do </a:t>
+            </a:r>
+            <a:r>
+              <a:rPr sz="1400" dirty="0" err="1">
+                <a:solidFill>
+                  <a:srgbClr val="212529"/>
+                </a:solidFill>
+              </a:rPr>
+              <a:t>relatório</a:t>
+            </a:r>
+            <a:r>
+              <a:rPr sz="1400" dirty="0">
+                <a:solidFill>
+                  <a:srgbClr val="212529"/>
+                </a:solidFill>
+              </a:rPr>
+              <a:t> e </a:t>
+            </a:r>
+            <a:r>
+              <a:rPr sz="1400" dirty="0" err="1">
+                <a:solidFill>
+                  <a:srgbClr val="212529"/>
+                </a:solidFill>
+              </a:rPr>
+              <a:t>destes</a:t>
+            </a:r>
+            <a:r>
+              <a:rPr sz="1400" dirty="0">
+                <a:solidFill>
+                  <a:srgbClr val="212529"/>
+                </a:solidFill>
+              </a:rPr>
+              <a:t> slides</a:t>
             </a:r>
           </a:p>
           <a:p>
             <a:pPr algn="l">
               <a:spcAft>
-                <a:spcPts val="800"/>
+                <a:spcPts val="400"/>
               </a:spcAft>
             </a:pPr>
             <a:r>
-              <a:rPr sz="1700" dirty="0">
-                <a:solidFill>
-                  <a:srgbClr val="333333"/>
-                </a:solidFill>
-              </a:rPr>
-              <a:t>• Onde </a:t>
-            </a:r>
-            <a:r>
-              <a:rPr sz="1700" dirty="0" err="1">
-                <a:solidFill>
-                  <a:srgbClr val="333333"/>
-                </a:solidFill>
-              </a:rPr>
-              <a:t>foi</a:t>
-            </a:r>
-            <a:r>
-              <a:rPr sz="1700" dirty="0">
-                <a:solidFill>
-                  <a:srgbClr val="333333"/>
+              <a:rPr sz="1400" dirty="0">
+                <a:solidFill>
+                  <a:srgbClr val="212529"/>
+                </a:solidFill>
+              </a:rPr>
+              <a:t>• Sugestões de boas </a:t>
+            </a:r>
+            <a:r>
+              <a:rPr sz="1400" dirty="0" err="1">
+                <a:solidFill>
+                  <a:srgbClr val="212529"/>
+                </a:solidFill>
+              </a:rPr>
+              <a:t>práticas</a:t>
+            </a:r>
+            <a:r>
+              <a:rPr sz="1400" dirty="0">
+                <a:solidFill>
+                  <a:srgbClr val="212529"/>
                 </a:solidFill>
               </a:rPr>
               <a:t> </a:t>
             </a:r>
             <a:r>
-              <a:rPr sz="1700" dirty="0" err="1">
-                <a:solidFill>
-                  <a:srgbClr val="333333"/>
-                </a:solidFill>
-              </a:rPr>
-              <a:t>usada</a:t>
-            </a:r>
-            <a:r>
-              <a:rPr sz="1700" dirty="0">
-                <a:solidFill>
-                  <a:srgbClr val="333333"/>
-                </a:solidFill>
-              </a:rPr>
-              <a:t>:</a:t>
+              <a:rPr sz="1400" dirty="0" err="1">
+                <a:solidFill>
+                  <a:srgbClr val="212529"/>
+                </a:solidFill>
+              </a:rPr>
+              <a:t>em</a:t>
+            </a:r>
+            <a:r>
+              <a:rPr sz="1400" dirty="0">
+                <a:solidFill>
+                  <a:srgbClr val="212529"/>
+                </a:solidFill>
+              </a:rPr>
+              <a:t> SQL e </a:t>
+            </a:r>
+            <a:r>
+              <a:rPr sz="1400" dirty="0" err="1">
+                <a:solidFill>
+                  <a:srgbClr val="212529"/>
+                </a:solidFill>
+              </a:rPr>
+              <a:t>modelagem</a:t>
+            </a:r>
+            <a:r>
+              <a:rPr sz="1400" dirty="0">
+                <a:solidFill>
+                  <a:srgbClr val="212529"/>
+                </a:solidFill>
+              </a:rPr>
+              <a:t> ER/EER</a:t>
             </a:r>
           </a:p>
           <a:p>
             <a:pPr algn="l">
               <a:spcAft>
-                <a:spcPts val="800"/>
+                <a:spcPts val="400"/>
               </a:spcAft>
             </a:pPr>
             <a:r>
-              <a:rPr sz="1700" dirty="0">
-                <a:solidFill>
-                  <a:srgbClr val="333333"/>
-                </a:solidFill>
-              </a:rPr>
-              <a:t>•     · </a:t>
-            </a:r>
-            <a:r>
-              <a:rPr sz="1700" dirty="0" err="1">
-                <a:solidFill>
-                  <a:srgbClr val="333333"/>
-                </a:solidFill>
-              </a:rPr>
-              <a:t>apoio</a:t>
-            </a:r>
-            <a:r>
-              <a:rPr sz="1700" dirty="0">
-                <a:solidFill>
-                  <a:srgbClr val="333333"/>
+              <a:rPr sz="1400" dirty="0">
+                <a:solidFill>
+                  <a:srgbClr val="212529"/>
+                </a:solidFill>
+              </a:rPr>
+              <a:t>• </a:t>
+            </a:r>
+            <a:r>
+              <a:rPr sz="1400" dirty="0" err="1">
+                <a:solidFill>
+                  <a:srgbClr val="212529"/>
+                </a:solidFill>
+              </a:rPr>
+              <a:t>Revisão</a:t>
+            </a:r>
+            <a:r>
+              <a:rPr sz="1400" dirty="0">
+                <a:solidFill>
+                  <a:srgbClr val="212529"/>
                 </a:solidFill>
               </a:rPr>
               <a:t> </a:t>
             </a:r>
             <a:r>
-              <a:rPr sz="1700" dirty="0" err="1">
-                <a:solidFill>
-                  <a:srgbClr val="333333"/>
-                </a:solidFill>
-              </a:rPr>
-              <a:t>na</a:t>
-            </a:r>
-            <a:r>
-              <a:rPr sz="1700" dirty="0">
-                <a:solidFill>
-                  <a:srgbClr val="333333"/>
-                </a:solidFill>
-              </a:rPr>
-              <a:t> </a:t>
-            </a:r>
-            <a:r>
-              <a:rPr sz="1700" dirty="0" err="1">
-                <a:solidFill>
-                  <a:srgbClr val="333333"/>
-                </a:solidFill>
-              </a:rPr>
-              <a:t>redação</a:t>
-            </a:r>
-            <a:r>
-              <a:rPr sz="1700" dirty="0">
-                <a:solidFill>
-                  <a:srgbClr val="333333"/>
-                </a:solidFill>
-              </a:rPr>
-              <a:t> do </a:t>
-            </a:r>
-            <a:r>
-              <a:rPr sz="1700" dirty="0" err="1">
-                <a:solidFill>
-                  <a:srgbClr val="333333"/>
-                </a:solidFill>
-              </a:rPr>
-              <a:t>relatório</a:t>
-            </a:r>
-            <a:r>
-              <a:rPr sz="1700" dirty="0">
-                <a:solidFill>
-                  <a:srgbClr val="333333"/>
-                </a:solidFill>
-              </a:rPr>
-              <a:t> </a:t>
-            </a:r>
-            <a:r>
-              <a:rPr sz="1700" dirty="0" err="1">
-                <a:solidFill>
-                  <a:srgbClr val="333333"/>
-                </a:solidFill>
-              </a:rPr>
-              <a:t>técnico</a:t>
-            </a:r>
-            <a:r>
-              <a:rPr sz="1700" dirty="0">
-                <a:solidFill>
-                  <a:srgbClr val="333333"/>
-                </a:solidFill>
-              </a:rPr>
-              <a:t> e </a:t>
-            </a:r>
-            <a:r>
-              <a:rPr sz="1700" dirty="0" err="1">
-                <a:solidFill>
-                  <a:srgbClr val="333333"/>
-                </a:solidFill>
-              </a:rPr>
-              <a:t>destes</a:t>
-            </a:r>
-            <a:r>
-              <a:rPr sz="1700" dirty="0">
-                <a:solidFill>
-                  <a:srgbClr val="333333"/>
-                </a:solidFill>
-              </a:rPr>
-              <a:t> slides;</a:t>
-            </a:r>
-          </a:p>
+              <a:rPr sz="1400" dirty="0" err="1">
+                <a:solidFill>
+                  <a:srgbClr val="212529"/>
+                </a:solidFill>
+              </a:rPr>
+              <a:t>ortográfica</a:t>
+            </a:r>
+            <a:endParaRPr sz="1400" dirty="0">
+              <a:solidFill>
+                <a:srgbClr val="212529"/>
+              </a:solidFill>
+            </a:endParaRPr>
+          </a:p>
+        </p:txBody>
+      </p:sp>
+      <p:sp>
+        <p:nvSpPr>
+          <p:cNvPr id="9" name="Rounded Rectangle 8"/>
+          <p:cNvSpPr/>
+          <p:nvPr/>
+        </p:nvSpPr>
+        <p:spPr>
+          <a:xfrm>
+            <a:off x="6217920" y="1463040"/>
+            <a:ext cx="5486400" cy="4206240"/>
+          </a:xfrm>
+          <a:prstGeom prst="roundRect">
+            <a:avLst>
+              <a:gd name="adj" fmla="val 6000"/>
+            </a:avLst>
+          </a:prstGeom>
+          <a:solidFill>
+            <a:srgbClr val="F5F7FA"/>
+          </a:solidFill>
+          <a:ln w="19050">
+            <a:solidFill>
+              <a:srgbClr val="C0504D"/>
+            </a:solidFill>
+          </a:ln>
+        </p:spPr>
+        <p:style>
+          <a:lnRef idx="1">
+            <a:schemeClr val="accent1"/>
+          </a:lnRef>
+          <a:fillRef idx="3">
+            <a:schemeClr val="accent1"/>
+          </a:fillRef>
+          <a:effectRef idx="2">
+            <a:schemeClr val="accent1"/>
+          </a:effectRef>
+          <a:fontRef idx="minor">
+            <a:schemeClr val="lt1"/>
+          </a:fontRef>
+        </p:style>
+        <p:txBody>
+          <a:bodyPr rtlCol="0" anchor="ctr"/>
+          <a:lstStyle/>
+          <a:p>
+            <a:pPr algn="ctr"/>
+            <a:endParaRPr/>
+          </a:p>
+        </p:txBody>
+      </p:sp>
+      <p:sp>
+        <p:nvSpPr>
+          <p:cNvPr id="10" name="TextBox 9"/>
+          <p:cNvSpPr txBox="1"/>
+          <p:nvPr/>
+        </p:nvSpPr>
+        <p:spPr>
+          <a:xfrm>
+            <a:off x="6400800" y="1600200"/>
+            <a:ext cx="5120640" cy="411480"/>
+          </a:xfrm>
+          <a:prstGeom prst="rect">
+            <a:avLst/>
+          </a:prstGeom>
+          <a:noFill/>
+        </p:spPr>
+        <p:txBody>
+          <a:bodyPr wrap="none">
+            <a:spAutoFit/>
+          </a:bodyPr>
+          <a:lstStyle/>
+          <a:p>
+            <a:pPr algn="l"/>
+            <a:r>
+              <a:rPr sz="1800" b="1" i="0">
+                <a:solidFill>
+                  <a:srgbClr val="C0504D"/>
+                </a:solidFill>
+                <a:latin typeface="Calibri"/>
+              </a:rPr>
+              <a:t>✗  O que NÃO foi delegado</a:t>
+            </a:r>
+          </a:p>
+        </p:txBody>
+      </p:sp>
+      <p:sp>
+        <p:nvSpPr>
+          <p:cNvPr id="11" name="TextBox 10"/>
+          <p:cNvSpPr txBox="1"/>
+          <p:nvPr/>
+        </p:nvSpPr>
+        <p:spPr>
+          <a:xfrm>
+            <a:off x="6400800" y="2103120"/>
+            <a:ext cx="5120640" cy="3429000"/>
+          </a:xfrm>
+          <a:prstGeom prst="rect">
+            <a:avLst/>
+          </a:prstGeom>
+          <a:noFill/>
+        </p:spPr>
+        <p:txBody>
+          <a:bodyPr wrap="square">
+            <a:spAutoFit/>
+          </a:bodyPr>
+          <a:lstStyle/>
           <a:p>
             <a:pPr algn="l">
               <a:spcAft>
-                <a:spcPts val="800"/>
+                <a:spcPts val="400"/>
               </a:spcAft>
             </a:pPr>
             <a:r>
-              <a:rPr sz="1700" dirty="0">
-                <a:solidFill>
-                  <a:srgbClr val="333333"/>
-                </a:solidFill>
-              </a:rPr>
-              <a:t>•     · </a:t>
-            </a:r>
-            <a:r>
-              <a:rPr sz="1700" dirty="0" err="1">
-                <a:solidFill>
-                  <a:srgbClr val="333333"/>
-                </a:solidFill>
-              </a:rPr>
-              <a:t>sugestões</a:t>
-            </a:r>
-            <a:r>
-              <a:rPr sz="1700" dirty="0">
-                <a:solidFill>
-                  <a:srgbClr val="333333"/>
-                </a:solidFill>
-              </a:rPr>
-              <a:t> de boas </a:t>
-            </a:r>
-            <a:r>
-              <a:rPr sz="1700" dirty="0" err="1">
-                <a:solidFill>
-                  <a:srgbClr val="333333"/>
-                </a:solidFill>
-              </a:rPr>
-              <a:t>práticas</a:t>
-            </a:r>
-            <a:r>
-              <a:rPr sz="1700" dirty="0">
-                <a:solidFill>
-                  <a:srgbClr val="333333"/>
-                </a:solidFill>
-              </a:rPr>
-              <a:t> </a:t>
-            </a:r>
-            <a:r>
-              <a:rPr sz="1700" dirty="0" err="1">
-                <a:solidFill>
-                  <a:srgbClr val="333333"/>
-                </a:solidFill>
-              </a:rPr>
-              <a:t>em</a:t>
-            </a:r>
-            <a:r>
-              <a:rPr sz="1700" dirty="0">
-                <a:solidFill>
-                  <a:srgbClr val="333333"/>
-                </a:solidFill>
-              </a:rPr>
-              <a:t> SQL e </a:t>
-            </a:r>
-            <a:r>
-              <a:rPr sz="1700" dirty="0" err="1">
-                <a:solidFill>
-                  <a:srgbClr val="333333"/>
-                </a:solidFill>
-              </a:rPr>
-              <a:t>modelagem</a:t>
-            </a:r>
-            <a:r>
-              <a:rPr sz="1700" dirty="0">
-                <a:solidFill>
-                  <a:srgbClr val="333333"/>
-                </a:solidFill>
-              </a:rPr>
-              <a:t> ER/EER;</a:t>
+              <a:rPr sz="1400">
+                <a:solidFill>
+                  <a:srgbClr val="212529"/>
+                </a:solidFill>
+              </a:rPr>
+              <a:t>• Decisões de modelagem e normalização</a:t>
             </a:r>
           </a:p>
           <a:p>
             <a:pPr algn="l">
               <a:spcAft>
-                <a:spcPts val="800"/>
+                <a:spcPts val="400"/>
               </a:spcAft>
             </a:pPr>
             <a:r>
-              <a:rPr sz="1700" dirty="0">
-                <a:solidFill>
-                  <a:srgbClr val="333333"/>
-                </a:solidFill>
-              </a:rPr>
-              <a:t>•     · </a:t>
-            </a:r>
-            <a:r>
-              <a:rPr sz="1700" dirty="0" err="1">
-                <a:solidFill>
-                  <a:srgbClr val="333333"/>
-                </a:solidFill>
-              </a:rPr>
-              <a:t>revisão</a:t>
-            </a:r>
-            <a:r>
-              <a:rPr sz="1700" dirty="0">
-                <a:solidFill>
-                  <a:srgbClr val="333333"/>
-                </a:solidFill>
-              </a:rPr>
-              <a:t> </a:t>
-            </a:r>
-            <a:r>
-              <a:rPr sz="1700" dirty="0" err="1">
-                <a:solidFill>
-                  <a:srgbClr val="333333"/>
-                </a:solidFill>
-              </a:rPr>
-              <a:t>ortográfica</a:t>
-            </a:r>
-            <a:r>
-              <a:rPr sz="1700" dirty="0">
-                <a:solidFill>
-                  <a:srgbClr val="333333"/>
-                </a:solidFill>
-              </a:rPr>
-              <a:t>.</a:t>
+              <a:rPr sz="1400">
+                <a:solidFill>
+                  <a:srgbClr val="212529"/>
+                </a:solidFill>
+              </a:rPr>
+              <a:t>• Interpretação dos resultados e discussão crítica</a:t>
             </a:r>
           </a:p>
           <a:p>
             <a:pPr algn="l">
               <a:spcAft>
-                <a:spcPts val="800"/>
+                <a:spcPts val="400"/>
               </a:spcAft>
             </a:pPr>
             <a:r>
-              <a:rPr sz="1700" dirty="0">
-                <a:solidFill>
-                  <a:srgbClr val="333333"/>
-                </a:solidFill>
-              </a:rPr>
-              <a:t>• O </a:t>
-            </a:r>
-            <a:r>
-              <a:rPr sz="1700" dirty="0" err="1">
-                <a:solidFill>
-                  <a:srgbClr val="333333"/>
-                </a:solidFill>
-              </a:rPr>
-              <a:t>que</a:t>
-            </a:r>
-            <a:r>
-              <a:rPr sz="1700" dirty="0">
-                <a:solidFill>
-                  <a:srgbClr val="333333"/>
-                </a:solidFill>
-              </a:rPr>
-              <a:t> NÃO </a:t>
-            </a:r>
-            <a:r>
-              <a:rPr sz="1700" dirty="0" err="1">
-                <a:solidFill>
-                  <a:srgbClr val="333333"/>
-                </a:solidFill>
-              </a:rPr>
-              <a:t>foi</a:t>
-            </a:r>
-            <a:r>
-              <a:rPr sz="1700" dirty="0">
-                <a:solidFill>
-                  <a:srgbClr val="333333"/>
-                </a:solidFill>
-              </a:rPr>
-              <a:t> </a:t>
-            </a:r>
-            <a:r>
-              <a:rPr sz="1700" dirty="0" err="1">
-                <a:solidFill>
-                  <a:srgbClr val="333333"/>
-                </a:solidFill>
-              </a:rPr>
-              <a:t>delegado</a:t>
-            </a:r>
-            <a:r>
-              <a:rPr sz="1700" dirty="0">
-                <a:solidFill>
-                  <a:srgbClr val="333333"/>
-                </a:solidFill>
-              </a:rPr>
-              <a:t> à IA:</a:t>
+              <a:rPr sz="1400">
+                <a:solidFill>
+                  <a:srgbClr val="212529"/>
+                </a:solidFill>
+              </a:rPr>
+              <a:t>• Escolha do dataset e perguntas analíticas</a:t>
             </a:r>
           </a:p>
           <a:p>
             <a:pPr algn="l">
               <a:spcAft>
-                <a:spcPts val="800"/>
+                <a:spcPts val="400"/>
               </a:spcAft>
             </a:pPr>
             <a:r>
-              <a:rPr sz="1700" dirty="0">
-                <a:solidFill>
-                  <a:srgbClr val="333333"/>
-                </a:solidFill>
-              </a:rPr>
-              <a:t>•     · </a:t>
-            </a:r>
-            <a:r>
-              <a:rPr sz="1700" dirty="0" err="1">
-                <a:solidFill>
-                  <a:srgbClr val="333333"/>
-                </a:solidFill>
-              </a:rPr>
-              <a:t>decisões</a:t>
-            </a:r>
-            <a:r>
-              <a:rPr sz="1700" dirty="0">
-                <a:solidFill>
-                  <a:srgbClr val="333333"/>
-                </a:solidFill>
-              </a:rPr>
-              <a:t> de </a:t>
-            </a:r>
-            <a:r>
-              <a:rPr sz="1700" dirty="0" err="1">
-                <a:solidFill>
-                  <a:srgbClr val="333333"/>
-                </a:solidFill>
-              </a:rPr>
-              <a:t>modelagem</a:t>
-            </a:r>
-            <a:r>
-              <a:rPr sz="1700" dirty="0">
-                <a:solidFill>
-                  <a:srgbClr val="333333"/>
-                </a:solidFill>
-              </a:rPr>
-              <a:t> e </a:t>
-            </a:r>
-            <a:r>
-              <a:rPr sz="1700" dirty="0" err="1">
-                <a:solidFill>
-                  <a:srgbClr val="333333"/>
-                </a:solidFill>
-              </a:rPr>
-              <a:t>normalização</a:t>
-            </a:r>
-            <a:r>
-              <a:rPr sz="1700" dirty="0">
-                <a:solidFill>
-                  <a:srgbClr val="333333"/>
-                </a:solidFill>
-              </a:rPr>
-              <a:t>;</a:t>
-            </a:r>
-          </a:p>
-          <a:p>
-            <a:pPr algn="l">
-              <a:spcAft>
-                <a:spcPts val="800"/>
-              </a:spcAft>
-            </a:pPr>
-            <a:r>
-              <a:rPr sz="1700" dirty="0">
-                <a:solidFill>
-                  <a:srgbClr val="333333"/>
-                </a:solidFill>
-              </a:rPr>
-              <a:t>•     · </a:t>
-            </a:r>
-            <a:r>
-              <a:rPr sz="1700" dirty="0" err="1">
-                <a:solidFill>
-                  <a:srgbClr val="333333"/>
-                </a:solidFill>
-              </a:rPr>
-              <a:t>interpretação</a:t>
-            </a:r>
-            <a:r>
-              <a:rPr sz="1700" dirty="0">
-                <a:solidFill>
-                  <a:srgbClr val="333333"/>
-                </a:solidFill>
-              </a:rPr>
-              <a:t> dos </a:t>
-            </a:r>
-            <a:r>
-              <a:rPr sz="1700" dirty="0" err="1">
-                <a:solidFill>
-                  <a:srgbClr val="333333"/>
-                </a:solidFill>
-              </a:rPr>
-              <a:t>resultados</a:t>
-            </a:r>
-            <a:r>
-              <a:rPr sz="1700" dirty="0">
-                <a:solidFill>
-                  <a:srgbClr val="333333"/>
-                </a:solidFill>
-              </a:rPr>
-              <a:t> e </a:t>
-            </a:r>
-            <a:r>
-              <a:rPr sz="1700" dirty="0" err="1">
-                <a:solidFill>
-                  <a:srgbClr val="333333"/>
-                </a:solidFill>
-              </a:rPr>
-              <a:t>discussão</a:t>
-            </a:r>
-            <a:r>
-              <a:rPr sz="1700" dirty="0">
-                <a:solidFill>
-                  <a:srgbClr val="333333"/>
-                </a:solidFill>
-              </a:rPr>
-              <a:t> </a:t>
-            </a:r>
-            <a:r>
-              <a:rPr sz="1700" dirty="0" err="1">
-                <a:solidFill>
-                  <a:srgbClr val="333333"/>
-                </a:solidFill>
-              </a:rPr>
-              <a:t>crítica</a:t>
-            </a:r>
-            <a:r>
-              <a:rPr sz="1700" dirty="0">
-                <a:solidFill>
-                  <a:srgbClr val="333333"/>
-                </a:solidFill>
-              </a:rPr>
-              <a:t>.</a:t>
-            </a:r>
-          </a:p>
-          <a:p>
-            <a:pPr algn="l">
-              <a:spcAft>
-                <a:spcPts val="800"/>
-              </a:spcAft>
-            </a:pPr>
-            <a:r>
-              <a:rPr sz="1700" dirty="0">
-                <a:solidFill>
-                  <a:srgbClr val="333333"/>
-                </a:solidFill>
-              </a:rPr>
-              <a:t>• </a:t>
-            </a:r>
-            <a:r>
-              <a:rPr sz="1700" dirty="0" err="1">
-                <a:solidFill>
-                  <a:srgbClr val="333333"/>
-                </a:solidFill>
-              </a:rPr>
-              <a:t>Bibliotecas</a:t>
-            </a:r>
-            <a:r>
-              <a:rPr sz="1700" dirty="0">
-                <a:solidFill>
-                  <a:srgbClr val="333333"/>
-                </a:solidFill>
-              </a:rPr>
-              <a:t> </a:t>
-            </a:r>
-            <a:r>
-              <a:rPr sz="1700" dirty="0" err="1">
-                <a:solidFill>
-                  <a:srgbClr val="333333"/>
-                </a:solidFill>
-              </a:rPr>
-              <a:t>utilizadas</a:t>
-            </a:r>
-            <a:r>
-              <a:rPr sz="1700" dirty="0">
-                <a:solidFill>
-                  <a:srgbClr val="333333"/>
-                </a:solidFill>
-              </a:rPr>
-              <a:t>: pandas, matplotlib, </a:t>
-            </a:r>
-            <a:r>
-              <a:rPr sz="1700" dirty="0" err="1">
-                <a:solidFill>
-                  <a:srgbClr val="333333"/>
-                </a:solidFill>
-              </a:rPr>
-              <a:t>graphviz</a:t>
-            </a:r>
-            <a:r>
-              <a:rPr sz="1700" dirty="0">
-                <a:solidFill>
-                  <a:srgbClr val="333333"/>
-                </a:solidFill>
-              </a:rPr>
-              <a:t>, python-docx, python-pptx.</a:t>
+              <a:rPr sz="1400">
+                <a:solidFill>
+                  <a:srgbClr val="212529"/>
+                </a:solidFill>
+              </a:rPr>
+              <a:t>• Validação dos achados</a:t>
+            </a:r>
+          </a:p>
+        </p:txBody>
+      </p:sp>
+      <p:sp>
+        <p:nvSpPr>
+          <p:cNvPr id="12" name="TextBox 11"/>
+          <p:cNvSpPr txBox="1"/>
+          <p:nvPr/>
+        </p:nvSpPr>
+        <p:spPr>
+          <a:xfrm>
+            <a:off x="457200" y="5897880"/>
+            <a:ext cx="11247120" cy="457200"/>
+          </a:xfrm>
+          <a:prstGeom prst="rect">
+            <a:avLst/>
+          </a:prstGeom>
+          <a:noFill/>
+        </p:spPr>
+        <p:txBody>
+          <a:bodyPr wrap="none">
+            <a:spAutoFit/>
+          </a:bodyPr>
+          <a:lstStyle/>
+          <a:p>
+            <a:pPr algn="ctr"/>
+            <a:r>
+              <a:rPr sz="1100" b="0" i="1">
+                <a:solidFill>
+                  <a:srgbClr val="555B66"/>
+                </a:solidFill>
+                <a:latin typeface="Calibri"/>
+              </a:rPr>
+              <a:t>Ferramenta: assistente de IA generativa. Bibliotecas no README: pandas, matplotlib, graphviz, python-docx, python-pptx</a:t>
+            </a:r>
+          </a:p>
+        </p:txBody>
+      </p:sp>
+      <p:sp>
+        <p:nvSpPr>
+          <p:cNvPr id="13" name="TextBox 12"/>
+          <p:cNvSpPr txBox="1"/>
+          <p:nvPr/>
+        </p:nvSpPr>
+        <p:spPr>
+          <a:xfrm>
+            <a:off x="365760" y="6446520"/>
+            <a:ext cx="11430000" cy="320040"/>
+          </a:xfrm>
+          <a:prstGeom prst="rect">
+            <a:avLst/>
+          </a:prstGeom>
+          <a:noFill/>
+        </p:spPr>
+        <p:txBody>
+          <a:bodyPr wrap="none">
+            <a:spAutoFit/>
+          </a:bodyPr>
+          <a:lstStyle/>
+          <a:p>
+            <a:pPr algn="r"/>
+            <a:r>
+              <a:rPr sz="900" b="0" i="1">
+                <a:solidFill>
+                  <a:srgbClr val="1F3A5F"/>
+                </a:solidFill>
+                <a:latin typeface="Calibri"/>
+              </a:rPr>
+              <a:t>TP Banco de Dados · DCC/UFMG · 17/17</a:t>
             </a:r>
           </a:p>
         </p:txBody>
@@ -5299,7 +7038,7 @@
         <p:spPr>
           <a:xfrm>
             <a:off x="0" y="0"/>
-            <a:ext cx="12191695" cy="731520"/>
+            <a:ext cx="12191695" cy="777240"/>
           </a:xfrm>
           <a:prstGeom prst="rect">
             <a:avLst/>
@@ -5336,14 +7075,58 @@
       </p:sp>
       <p:sp>
         <p:nvSpPr>
-          <p:cNvPr id="3" name="TextBox 2"/>
+          <p:cNvPr id="3" name="Rectangle 2"/>
+          <p:cNvSpPr/>
+          <p:nvPr/>
+        </p:nvSpPr>
+        <p:spPr>
+          <a:xfrm>
+            <a:off x="0" y="777240"/>
+            <a:ext cx="12191695" cy="54864"/>
+          </a:xfrm>
+          <a:prstGeom prst="rect">
+            <a:avLst/>
+          </a:prstGeom>
+          <a:solidFill>
+            <a:srgbClr val="E8B40F"/>
+          </a:solidFill>
+          <a:ln>
+            <a:noFill/>
+          </a:ln>
+        </p:spPr>
+        <p:style>
+          <a:lnRef idx="1">
+            <a:schemeClr val="accent1"/>
+          </a:lnRef>
+          <a:fillRef idx="3">
+            <a:schemeClr val="accent1"/>
+          </a:fillRef>
+          <a:effectRef idx="2">
+            <a:schemeClr val="accent1"/>
+          </a:effectRef>
+          <a:fontRef idx="minor">
+            <a:schemeClr val="lt1"/>
+          </a:fontRef>
+        </p:style>
+        <p:txBody>
+          <a:bodyPr rtlCol="0" anchor="ctr"/>
+          <a:lstStyle/>
+          <a:p>
+            <a:pPr algn="ctr"/>
+            <a:endParaRPr/>
+          </a:p>
+        </p:txBody>
+      </p:sp>
+      <p:sp>
+        <p:nvSpPr>
+          <p:cNvPr id="4" name="TextBox 3"/>
           <p:cNvSpPr txBox="1"/>
           <p:nvPr/>
         </p:nvSpPr>
         <p:spPr>
           <a:xfrm>
             <a:off x="457200" y="91440"/>
-            <a:ext cx="10972800" cy="640080"/>
+            <a:ext cx="11247120" cy="640080"/>
           </a:xfrm>
           <a:prstGeom prst="rect">
             <a:avLst/>
@@ -5358,10 +7141,11 @@
           <a:p>
             <a:pPr algn="l"/>
             <a:r>
-              <a:rPr sz="2800" b="1">
+              <a:rPr sz="2800" b="1" i="0">
                 <a:solidFill>
                   <a:srgbClr val="FFFFFF"/>
                 </a:solidFill>
+                <a:latin typeface="Calibri"/>
               </a:rPr>
               <a:t>Agenda</a:t>
             </a:r>
@@ -5370,14 +7154,14 @@
       </p:sp>
       <p:sp>
         <p:nvSpPr>
-          <p:cNvPr id="4" name="TextBox 3"/>
+          <p:cNvPr id="5" name="TextBox 4"/>
           <p:cNvSpPr txBox="1"/>
           <p:nvPr/>
         </p:nvSpPr>
         <p:spPr>
           <a:xfrm>
-            <a:off x="457200" y="777240"/>
-            <a:ext cx="10972800" cy="365760"/>
+            <a:off x="457200" y="914400"/>
+            <a:ext cx="11247120" cy="457200"/>
           </a:xfrm>
           <a:prstGeom prst="rect">
             <a:avLst/>
@@ -5390,27 +7174,163 @@
           </a:bodyPr>
           <a:lstStyle/>
           <a:p>
-            <a:r>
-              <a:rPr sz="1400" i="1">
-                <a:solidFill>
-                  <a:srgbClr val="1F3A5F"/>
-                </a:solidFill>
-              </a:rPr>
-              <a:t>Como vamos conduzir os próximos ~14 minutos</a:t>
-            </a:r>
-          </a:p>
-        </p:txBody>
-      </p:sp>
-      <p:sp>
-        <p:nvSpPr>
-          <p:cNvPr id="5" name="TextBox 4"/>
+            <a:pPr algn="l"/>
+            <a:r>
+              <a:rPr sz="1500" b="0" i="1">
+                <a:solidFill>
+                  <a:srgbClr val="555B66"/>
+                </a:solidFill>
+                <a:latin typeface="Calibri"/>
+              </a:rPr>
+              <a:t>O caminho dos próximos ~14 minutos</a:t>
+            </a:r>
+          </a:p>
+        </p:txBody>
+      </p:sp>
+      <p:sp>
+        <p:nvSpPr>
+          <p:cNvPr id="6" name="Rounded Rectangle 5"/>
+          <p:cNvSpPr/>
+          <p:nvPr/>
+        </p:nvSpPr>
+        <p:spPr>
+          <a:xfrm>
+            <a:off x="457200" y="1463040"/>
+            <a:ext cx="3657600" cy="2240280"/>
+          </a:xfrm>
+          <a:prstGeom prst="roundRect">
+            <a:avLst>
+              <a:gd name="adj" fmla="val 6000"/>
+            </a:avLst>
+          </a:prstGeom>
+          <a:solidFill>
+            <a:srgbClr val="F5F7FA"/>
+          </a:solidFill>
+          <a:ln w="19050">
+            <a:solidFill>
+              <a:srgbClr val="2E86AB"/>
+            </a:solidFill>
+          </a:ln>
+        </p:spPr>
+        <p:style>
+          <a:lnRef idx="1">
+            <a:schemeClr val="accent1"/>
+          </a:lnRef>
+          <a:fillRef idx="3">
+            <a:schemeClr val="accent1"/>
+          </a:fillRef>
+          <a:effectRef idx="2">
+            <a:schemeClr val="accent1"/>
+          </a:effectRef>
+          <a:fontRef idx="minor">
+            <a:schemeClr val="lt1"/>
+          </a:fontRef>
+        </p:style>
+        <p:txBody>
+          <a:bodyPr rtlCol="0" anchor="ctr"/>
+          <a:lstStyle/>
+          <a:p>
+            <a:pPr algn="ctr"/>
+            <a:endParaRPr/>
+          </a:p>
+        </p:txBody>
+      </p:sp>
+      <p:sp>
+        <p:nvSpPr>
+          <p:cNvPr id="7" name="Oval 6"/>
+          <p:cNvSpPr/>
+          <p:nvPr/>
+        </p:nvSpPr>
+        <p:spPr>
+          <a:xfrm>
+            <a:off x="594360" y="1600200"/>
+            <a:ext cx="457200" cy="457200"/>
+          </a:xfrm>
+          <a:prstGeom prst="ellipse">
+            <a:avLst/>
+          </a:prstGeom>
+          <a:solidFill>
+            <a:srgbClr val="2E86AB"/>
+          </a:solidFill>
+          <a:ln>
+            <a:noFill/>
+          </a:ln>
+        </p:spPr>
+        <p:style>
+          <a:lnRef idx="1">
+            <a:schemeClr val="accent1"/>
+          </a:lnRef>
+          <a:fillRef idx="3">
+            <a:schemeClr val="accent1"/>
+          </a:fillRef>
+          <a:effectRef idx="2">
+            <a:schemeClr val="accent1"/>
+          </a:effectRef>
+          <a:fontRef idx="minor">
+            <a:schemeClr val="lt1"/>
+          </a:fontRef>
+        </p:style>
+        <p:txBody>
+          <a:bodyPr lIns="0" tIns="18288" rIns="0" bIns="0" rtlCol="0" anchor="ctr"/>
+          <a:lstStyle/>
+          <a:p>
+            <a:pPr algn="ctr"/>
+            <a:r>
+              <a:rPr sz="1600" b="1">
+                <a:solidFill>
+                  <a:srgbClr val="FFFFFF"/>
+                </a:solidFill>
+              </a:rPr>
+              <a:t>1</a:t>
+            </a:r>
+          </a:p>
+        </p:txBody>
+      </p:sp>
+      <p:sp>
+        <p:nvSpPr>
+          <p:cNvPr id="8" name="TextBox 7"/>
           <p:cNvSpPr txBox="1"/>
           <p:nvPr/>
         </p:nvSpPr>
         <p:spPr>
           <a:xfrm>
-            <a:off x="548640" y="1371600"/>
-            <a:ext cx="10972800" cy="5029200"/>
+            <a:off x="1097280" y="1600200"/>
+            <a:ext cx="2834640" cy="411480"/>
+          </a:xfrm>
+          <a:prstGeom prst="rect">
+            <a:avLst/>
+          </a:prstGeom>
+          <a:noFill/>
+        </p:spPr>
+        <p:txBody>
+          <a:bodyPr wrap="none">
+            <a:spAutoFit/>
+          </a:bodyPr>
+          <a:lstStyle/>
+          <a:p>
+            <a:pPr algn="l"/>
+            <a:r>
+              <a:rPr sz="1600" b="1" i="0">
+                <a:solidFill>
+                  <a:srgbClr val="2E86AB"/>
+                </a:solidFill>
+                <a:latin typeface="Calibri"/>
+              </a:rPr>
+              <a:t>Domínio escolhido</a:t>
+            </a:r>
+          </a:p>
+        </p:txBody>
+      </p:sp>
+      <p:sp>
+        <p:nvSpPr>
+          <p:cNvPr id="9" name="TextBox 8"/>
+          <p:cNvSpPr txBox="1"/>
+          <p:nvPr/>
+        </p:nvSpPr>
+        <p:spPr>
+          <a:xfrm>
+            <a:off x="640080" y="2103120"/>
+            <a:ext cx="3291840" cy="1463040"/>
           </a:xfrm>
           <a:prstGeom prst="rect">
             <a:avLst/>
@@ -5423,93 +7343,895 @@
           </a:bodyPr>
           <a:lstStyle/>
           <a:p>
-            <a:pPr algn="l">
-              <a:spcAft>
-                <a:spcPts val="800"/>
-              </a:spcAft>
-            </a:pPr>
-            <a:r>
-              <a:rPr sz="2000">
-                <a:solidFill>
-                  <a:srgbClr val="333333"/>
-                </a:solidFill>
-              </a:rPr>
-              <a:t>• Domínio escolhido e justificativa — CPGF</a:t>
-            </a:r>
-          </a:p>
-          <a:p>
-            <a:pPr algn="l">
-              <a:spcAft>
-                <a:spcPts val="800"/>
-              </a:spcAft>
-            </a:pPr>
-            <a:r>
-              <a:rPr sz="2000">
-                <a:solidFill>
-                  <a:srgbClr val="333333"/>
-                </a:solidFill>
-              </a:rPr>
-              <a:t>• Etapa 1 — Modelo Conceitual (ER/EER)</a:t>
-            </a:r>
-          </a:p>
-          <a:p>
-            <a:pPr algn="l">
-              <a:spcAft>
-                <a:spcPts val="800"/>
-              </a:spcAft>
-            </a:pPr>
-            <a:r>
-              <a:rPr sz="2000">
-                <a:solidFill>
-                  <a:srgbClr val="333333"/>
-                </a:solidFill>
-              </a:rPr>
-              <a:t>• Etapa 2 — Modelo Relacional + Normalização</a:t>
-            </a:r>
-          </a:p>
-          <a:p>
-            <a:pPr algn="l">
-              <a:spcAft>
-                <a:spcPts val="800"/>
-              </a:spcAft>
-            </a:pPr>
-            <a:r>
-              <a:rPr sz="2000">
-                <a:solidFill>
-                  <a:srgbClr val="333333"/>
-                </a:solidFill>
-              </a:rPr>
-              <a:t>• Etapa 3 — Implementação SQL + carga em PostgreSQL</a:t>
-            </a:r>
-          </a:p>
-          <a:p>
-            <a:pPr algn="l">
-              <a:spcAft>
-                <a:spcPts val="800"/>
-              </a:spcAft>
-            </a:pPr>
-            <a:r>
-              <a:rPr sz="2000">
-                <a:solidFill>
-                  <a:srgbClr val="333333"/>
-                </a:solidFill>
-              </a:rPr>
-              <a:t>• Etapa 4 — 5 perguntas analíticas e os insights encontrados</a:t>
-            </a:r>
-          </a:p>
-          <a:p>
-            <a:pPr algn="l">
-              <a:spcAft>
-                <a:spcPts val="800"/>
-              </a:spcAft>
-            </a:pPr>
-            <a:r>
-              <a:rPr sz="2000">
-                <a:solidFill>
-                  <a:srgbClr val="333333"/>
-                </a:solidFill>
-              </a:rPr>
-              <a:t>• Conclusão, limitações e próximos passos</a:t>
+            <a:pPr algn="l"/>
+            <a:r>
+              <a:rPr sz="1300" b="0" i="0">
+                <a:solidFill>
+                  <a:srgbClr val="212529"/>
+                </a:solidFill>
+                <a:latin typeface="Calibri"/>
+              </a:rPr>
+              <a:t>Por que o CPGF é um caso ideal</a:t>
+            </a:r>
+          </a:p>
+        </p:txBody>
+      </p:sp>
+      <p:sp>
+        <p:nvSpPr>
+          <p:cNvPr id="10" name="Rounded Rectangle 9"/>
+          <p:cNvSpPr/>
+          <p:nvPr/>
+        </p:nvSpPr>
+        <p:spPr>
+          <a:xfrm>
+            <a:off x="4297680" y="1463040"/>
+            <a:ext cx="3657600" cy="2240280"/>
+          </a:xfrm>
+          <a:prstGeom prst="roundRect">
+            <a:avLst>
+              <a:gd name="adj" fmla="val 6000"/>
+            </a:avLst>
+          </a:prstGeom>
+          <a:solidFill>
+            <a:srgbClr val="F5F7FA"/>
+          </a:solidFill>
+          <a:ln w="19050">
+            <a:solidFill>
+              <a:srgbClr val="1F3A5F"/>
+            </a:solidFill>
+          </a:ln>
+        </p:spPr>
+        <p:style>
+          <a:lnRef idx="1">
+            <a:schemeClr val="accent1"/>
+          </a:lnRef>
+          <a:fillRef idx="3">
+            <a:schemeClr val="accent1"/>
+          </a:fillRef>
+          <a:effectRef idx="2">
+            <a:schemeClr val="accent1"/>
+          </a:effectRef>
+          <a:fontRef idx="minor">
+            <a:schemeClr val="lt1"/>
+          </a:fontRef>
+        </p:style>
+        <p:txBody>
+          <a:bodyPr rtlCol="0" anchor="ctr"/>
+          <a:lstStyle/>
+          <a:p>
+            <a:pPr algn="ctr"/>
+            <a:endParaRPr/>
+          </a:p>
+        </p:txBody>
+      </p:sp>
+      <p:sp>
+        <p:nvSpPr>
+          <p:cNvPr id="11" name="Oval 10"/>
+          <p:cNvSpPr/>
+          <p:nvPr/>
+        </p:nvSpPr>
+        <p:spPr>
+          <a:xfrm>
+            <a:off x="4434840" y="1600200"/>
+            <a:ext cx="457200" cy="457200"/>
+          </a:xfrm>
+          <a:prstGeom prst="ellipse">
+            <a:avLst/>
+          </a:prstGeom>
+          <a:solidFill>
+            <a:srgbClr val="1F3A5F"/>
+          </a:solidFill>
+          <a:ln>
+            <a:noFill/>
+          </a:ln>
+        </p:spPr>
+        <p:style>
+          <a:lnRef idx="1">
+            <a:schemeClr val="accent1"/>
+          </a:lnRef>
+          <a:fillRef idx="3">
+            <a:schemeClr val="accent1"/>
+          </a:fillRef>
+          <a:effectRef idx="2">
+            <a:schemeClr val="accent1"/>
+          </a:effectRef>
+          <a:fontRef idx="minor">
+            <a:schemeClr val="lt1"/>
+          </a:fontRef>
+        </p:style>
+        <p:txBody>
+          <a:bodyPr lIns="0" tIns="18288" rIns="0" bIns="0" rtlCol="0" anchor="ctr"/>
+          <a:lstStyle/>
+          <a:p>
+            <a:pPr algn="ctr"/>
+            <a:r>
+              <a:rPr sz="1600" b="1">
+                <a:solidFill>
+                  <a:srgbClr val="FFFFFF"/>
+                </a:solidFill>
+              </a:rPr>
+              <a:t>2</a:t>
+            </a:r>
+          </a:p>
+        </p:txBody>
+      </p:sp>
+      <p:sp>
+        <p:nvSpPr>
+          <p:cNvPr id="12" name="TextBox 11"/>
+          <p:cNvSpPr txBox="1"/>
+          <p:nvPr/>
+        </p:nvSpPr>
+        <p:spPr>
+          <a:xfrm>
+            <a:off x="4937760" y="1600200"/>
+            <a:ext cx="2834640" cy="411480"/>
+          </a:xfrm>
+          <a:prstGeom prst="rect">
+            <a:avLst/>
+          </a:prstGeom>
+          <a:noFill/>
+        </p:spPr>
+        <p:txBody>
+          <a:bodyPr wrap="none">
+            <a:spAutoFit/>
+          </a:bodyPr>
+          <a:lstStyle/>
+          <a:p>
+            <a:pPr algn="l"/>
+            <a:r>
+              <a:rPr sz="1600" b="1" i="0">
+                <a:solidFill>
+                  <a:srgbClr val="1F3A5F"/>
+                </a:solidFill>
+                <a:latin typeface="Calibri"/>
+              </a:rPr>
+              <a:t>Modelo Conceitual</a:t>
+            </a:r>
+          </a:p>
+        </p:txBody>
+      </p:sp>
+      <p:sp>
+        <p:nvSpPr>
+          <p:cNvPr id="13" name="TextBox 12"/>
+          <p:cNvSpPr txBox="1"/>
+          <p:nvPr/>
+        </p:nvSpPr>
+        <p:spPr>
+          <a:xfrm>
+            <a:off x="4480560" y="2103120"/>
+            <a:ext cx="3291840" cy="1463040"/>
+          </a:xfrm>
+          <a:prstGeom prst="rect">
+            <a:avLst/>
+          </a:prstGeom>
+          <a:noFill/>
+        </p:spPr>
+        <p:txBody>
+          <a:bodyPr wrap="square">
+            <a:spAutoFit/>
+          </a:bodyPr>
+          <a:lstStyle/>
+          <a:p>
+            <a:pPr algn="l"/>
+            <a:r>
+              <a:rPr sz="1300" b="0" i="0">
+                <a:solidFill>
+                  <a:srgbClr val="212529"/>
+                </a:solidFill>
+                <a:latin typeface="Calibri"/>
+              </a:rPr>
+              <a:t>ER/EER · 7 entidades · restrições</a:t>
+            </a:r>
+          </a:p>
+        </p:txBody>
+      </p:sp>
+      <p:sp>
+        <p:nvSpPr>
+          <p:cNvPr id="14" name="Rounded Rectangle 13"/>
+          <p:cNvSpPr/>
+          <p:nvPr/>
+        </p:nvSpPr>
+        <p:spPr>
+          <a:xfrm>
+            <a:off x="8138160" y="1463040"/>
+            <a:ext cx="3657600" cy="2240280"/>
+          </a:xfrm>
+          <a:prstGeom prst="roundRect">
+            <a:avLst>
+              <a:gd name="adj" fmla="val 6000"/>
+            </a:avLst>
+          </a:prstGeom>
+          <a:solidFill>
+            <a:srgbClr val="F5F7FA"/>
+          </a:solidFill>
+          <a:ln w="19050">
+            <a:solidFill>
+              <a:srgbClr val="6A1B9A"/>
+            </a:solidFill>
+          </a:ln>
+        </p:spPr>
+        <p:style>
+          <a:lnRef idx="1">
+            <a:schemeClr val="accent1"/>
+          </a:lnRef>
+          <a:fillRef idx="3">
+            <a:schemeClr val="accent1"/>
+          </a:fillRef>
+          <a:effectRef idx="2">
+            <a:schemeClr val="accent1"/>
+          </a:effectRef>
+          <a:fontRef idx="minor">
+            <a:schemeClr val="lt1"/>
+          </a:fontRef>
+        </p:style>
+        <p:txBody>
+          <a:bodyPr rtlCol="0" anchor="ctr"/>
+          <a:lstStyle/>
+          <a:p>
+            <a:pPr algn="ctr"/>
+            <a:endParaRPr/>
+          </a:p>
+        </p:txBody>
+      </p:sp>
+      <p:sp>
+        <p:nvSpPr>
+          <p:cNvPr id="15" name="Oval 14"/>
+          <p:cNvSpPr/>
+          <p:nvPr/>
+        </p:nvSpPr>
+        <p:spPr>
+          <a:xfrm>
+            <a:off x="8275320" y="1600200"/>
+            <a:ext cx="457200" cy="457200"/>
+          </a:xfrm>
+          <a:prstGeom prst="ellipse">
+            <a:avLst/>
+          </a:prstGeom>
+          <a:solidFill>
+            <a:srgbClr val="6A1B9A"/>
+          </a:solidFill>
+          <a:ln>
+            <a:noFill/>
+          </a:ln>
+        </p:spPr>
+        <p:style>
+          <a:lnRef idx="1">
+            <a:schemeClr val="accent1"/>
+          </a:lnRef>
+          <a:fillRef idx="3">
+            <a:schemeClr val="accent1"/>
+          </a:fillRef>
+          <a:effectRef idx="2">
+            <a:schemeClr val="accent1"/>
+          </a:effectRef>
+          <a:fontRef idx="minor">
+            <a:schemeClr val="lt1"/>
+          </a:fontRef>
+        </p:style>
+        <p:txBody>
+          <a:bodyPr lIns="0" tIns="18288" rIns="0" bIns="0" rtlCol="0" anchor="ctr"/>
+          <a:lstStyle/>
+          <a:p>
+            <a:pPr algn="ctr"/>
+            <a:r>
+              <a:rPr sz="1600" b="1">
+                <a:solidFill>
+                  <a:srgbClr val="FFFFFF"/>
+                </a:solidFill>
+              </a:rPr>
+              <a:t>3</a:t>
+            </a:r>
+          </a:p>
+        </p:txBody>
+      </p:sp>
+      <p:sp>
+        <p:nvSpPr>
+          <p:cNvPr id="16" name="TextBox 15"/>
+          <p:cNvSpPr txBox="1"/>
+          <p:nvPr/>
+        </p:nvSpPr>
+        <p:spPr>
+          <a:xfrm>
+            <a:off x="8778240" y="1600200"/>
+            <a:ext cx="2834640" cy="411480"/>
+          </a:xfrm>
+          <a:prstGeom prst="rect">
+            <a:avLst/>
+          </a:prstGeom>
+          <a:noFill/>
+        </p:spPr>
+        <p:txBody>
+          <a:bodyPr wrap="none">
+            <a:spAutoFit/>
+          </a:bodyPr>
+          <a:lstStyle/>
+          <a:p>
+            <a:pPr algn="l"/>
+            <a:r>
+              <a:rPr sz="1600" b="1" i="0">
+                <a:solidFill>
+                  <a:srgbClr val="6A1B9A"/>
+                </a:solidFill>
+                <a:latin typeface="Calibri"/>
+              </a:rPr>
+              <a:t>Modelo Relacional</a:t>
+            </a:r>
+          </a:p>
+        </p:txBody>
+      </p:sp>
+      <p:sp>
+        <p:nvSpPr>
+          <p:cNvPr id="17" name="TextBox 16"/>
+          <p:cNvSpPr txBox="1"/>
+          <p:nvPr/>
+        </p:nvSpPr>
+        <p:spPr>
+          <a:xfrm>
+            <a:off x="8321040" y="2103120"/>
+            <a:ext cx="3291840" cy="1463040"/>
+          </a:xfrm>
+          <a:prstGeom prst="rect">
+            <a:avLst/>
+          </a:prstGeom>
+          <a:noFill/>
+        </p:spPr>
+        <p:txBody>
+          <a:bodyPr wrap="square">
+            <a:spAutoFit/>
+          </a:bodyPr>
+          <a:lstStyle/>
+          <a:p>
+            <a:pPr algn="l"/>
+            <a:r>
+              <a:rPr sz="1300" b="0" i="0">
+                <a:solidFill>
+                  <a:srgbClr val="212529"/>
+                </a:solidFill>
+                <a:latin typeface="Calibri"/>
+              </a:rPr>
+              <a:t>Mapeamento + Normalização BCNF</a:t>
+            </a:r>
+          </a:p>
+        </p:txBody>
+      </p:sp>
+      <p:sp>
+        <p:nvSpPr>
+          <p:cNvPr id="18" name="Rounded Rectangle 17"/>
+          <p:cNvSpPr/>
+          <p:nvPr/>
+        </p:nvSpPr>
+        <p:spPr>
+          <a:xfrm>
+            <a:off x="457200" y="3886200"/>
+            <a:ext cx="3657600" cy="2240280"/>
+          </a:xfrm>
+          <a:prstGeom prst="roundRect">
+            <a:avLst>
+              <a:gd name="adj" fmla="val 6000"/>
+            </a:avLst>
+          </a:prstGeom>
+          <a:solidFill>
+            <a:srgbClr val="F5F7FA"/>
+          </a:solidFill>
+          <a:ln w="19050">
+            <a:solidFill>
+              <a:srgbClr val="2E7D32"/>
+            </a:solidFill>
+          </a:ln>
+        </p:spPr>
+        <p:style>
+          <a:lnRef idx="1">
+            <a:schemeClr val="accent1"/>
+          </a:lnRef>
+          <a:fillRef idx="3">
+            <a:schemeClr val="accent1"/>
+          </a:fillRef>
+          <a:effectRef idx="2">
+            <a:schemeClr val="accent1"/>
+          </a:effectRef>
+          <a:fontRef idx="minor">
+            <a:schemeClr val="lt1"/>
+          </a:fontRef>
+        </p:style>
+        <p:txBody>
+          <a:bodyPr rtlCol="0" anchor="ctr"/>
+          <a:lstStyle/>
+          <a:p>
+            <a:pPr algn="ctr"/>
+            <a:endParaRPr/>
+          </a:p>
+        </p:txBody>
+      </p:sp>
+      <p:sp>
+        <p:nvSpPr>
+          <p:cNvPr id="19" name="Oval 18"/>
+          <p:cNvSpPr/>
+          <p:nvPr/>
+        </p:nvSpPr>
+        <p:spPr>
+          <a:xfrm>
+            <a:off x="594360" y="4023360"/>
+            <a:ext cx="457200" cy="457200"/>
+          </a:xfrm>
+          <a:prstGeom prst="ellipse">
+            <a:avLst/>
+          </a:prstGeom>
+          <a:solidFill>
+            <a:srgbClr val="2E7D32"/>
+          </a:solidFill>
+          <a:ln>
+            <a:noFill/>
+          </a:ln>
+        </p:spPr>
+        <p:style>
+          <a:lnRef idx="1">
+            <a:schemeClr val="accent1"/>
+          </a:lnRef>
+          <a:fillRef idx="3">
+            <a:schemeClr val="accent1"/>
+          </a:fillRef>
+          <a:effectRef idx="2">
+            <a:schemeClr val="accent1"/>
+          </a:effectRef>
+          <a:fontRef idx="minor">
+            <a:schemeClr val="lt1"/>
+          </a:fontRef>
+        </p:style>
+        <p:txBody>
+          <a:bodyPr lIns="0" tIns="18288" rIns="0" bIns="0" rtlCol="0" anchor="ctr"/>
+          <a:lstStyle/>
+          <a:p>
+            <a:pPr algn="ctr"/>
+            <a:r>
+              <a:rPr sz="1600" b="1">
+                <a:solidFill>
+                  <a:srgbClr val="FFFFFF"/>
+                </a:solidFill>
+              </a:rPr>
+              <a:t>4</a:t>
+            </a:r>
+          </a:p>
+        </p:txBody>
+      </p:sp>
+      <p:sp>
+        <p:nvSpPr>
+          <p:cNvPr id="20" name="TextBox 19"/>
+          <p:cNvSpPr txBox="1"/>
+          <p:nvPr/>
+        </p:nvSpPr>
+        <p:spPr>
+          <a:xfrm>
+            <a:off x="1097280" y="4023360"/>
+            <a:ext cx="2834640" cy="411480"/>
+          </a:xfrm>
+          <a:prstGeom prst="rect">
+            <a:avLst/>
+          </a:prstGeom>
+          <a:noFill/>
+        </p:spPr>
+        <p:txBody>
+          <a:bodyPr wrap="none">
+            <a:spAutoFit/>
+          </a:bodyPr>
+          <a:lstStyle/>
+          <a:p>
+            <a:pPr algn="l"/>
+            <a:r>
+              <a:rPr sz="1600" b="1" i="0">
+                <a:solidFill>
+                  <a:srgbClr val="2E7D32"/>
+                </a:solidFill>
+                <a:latin typeface="Calibri"/>
+              </a:rPr>
+              <a:t>Implementação SQL</a:t>
+            </a:r>
+          </a:p>
+        </p:txBody>
+      </p:sp>
+      <p:sp>
+        <p:nvSpPr>
+          <p:cNvPr id="21" name="TextBox 20"/>
+          <p:cNvSpPr txBox="1"/>
+          <p:nvPr/>
+        </p:nvSpPr>
+        <p:spPr>
+          <a:xfrm>
+            <a:off x="640080" y="4526280"/>
+            <a:ext cx="3291840" cy="1463040"/>
+          </a:xfrm>
+          <a:prstGeom prst="rect">
+            <a:avLst/>
+          </a:prstGeom>
+          <a:noFill/>
+        </p:spPr>
+        <p:txBody>
+          <a:bodyPr wrap="square">
+            <a:spAutoFit/>
+          </a:bodyPr>
+          <a:lstStyle/>
+          <a:p>
+            <a:pPr algn="l"/>
+            <a:r>
+              <a:rPr sz="1300" b="0" i="0">
+                <a:solidFill>
+                  <a:srgbClr val="212529"/>
+                </a:solidFill>
+                <a:latin typeface="Calibri"/>
+              </a:rPr>
+              <a:t>DDL + Carga em PostgreSQL</a:t>
+            </a:r>
+          </a:p>
+        </p:txBody>
+      </p:sp>
+      <p:sp>
+        <p:nvSpPr>
+          <p:cNvPr id="22" name="Rounded Rectangle 21"/>
+          <p:cNvSpPr/>
+          <p:nvPr/>
+        </p:nvSpPr>
+        <p:spPr>
+          <a:xfrm>
+            <a:off x="4297680" y="3886200"/>
+            <a:ext cx="3657600" cy="2240280"/>
+          </a:xfrm>
+          <a:prstGeom prst="roundRect">
+            <a:avLst>
+              <a:gd name="adj" fmla="val 6000"/>
+            </a:avLst>
+          </a:prstGeom>
+          <a:solidFill>
+            <a:srgbClr val="F5F7FA"/>
+          </a:solidFill>
+          <a:ln w="19050">
+            <a:solidFill>
+              <a:srgbClr val="C0504D"/>
+            </a:solidFill>
+          </a:ln>
+        </p:spPr>
+        <p:style>
+          <a:lnRef idx="1">
+            <a:schemeClr val="accent1"/>
+          </a:lnRef>
+          <a:fillRef idx="3">
+            <a:schemeClr val="accent1"/>
+          </a:fillRef>
+          <a:effectRef idx="2">
+            <a:schemeClr val="accent1"/>
+          </a:effectRef>
+          <a:fontRef idx="minor">
+            <a:schemeClr val="lt1"/>
+          </a:fontRef>
+        </p:style>
+        <p:txBody>
+          <a:bodyPr rtlCol="0" anchor="ctr"/>
+          <a:lstStyle/>
+          <a:p>
+            <a:pPr algn="ctr"/>
+            <a:endParaRPr/>
+          </a:p>
+        </p:txBody>
+      </p:sp>
+      <p:sp>
+        <p:nvSpPr>
+          <p:cNvPr id="23" name="Oval 22"/>
+          <p:cNvSpPr/>
+          <p:nvPr/>
+        </p:nvSpPr>
+        <p:spPr>
+          <a:xfrm>
+            <a:off x="4434840" y="4023360"/>
+            <a:ext cx="457200" cy="457200"/>
+          </a:xfrm>
+          <a:prstGeom prst="ellipse">
+            <a:avLst/>
+          </a:prstGeom>
+          <a:solidFill>
+            <a:srgbClr val="C0504D"/>
+          </a:solidFill>
+          <a:ln>
+            <a:noFill/>
+          </a:ln>
+        </p:spPr>
+        <p:style>
+          <a:lnRef idx="1">
+            <a:schemeClr val="accent1"/>
+          </a:lnRef>
+          <a:fillRef idx="3">
+            <a:schemeClr val="accent1"/>
+          </a:fillRef>
+          <a:effectRef idx="2">
+            <a:schemeClr val="accent1"/>
+          </a:effectRef>
+          <a:fontRef idx="minor">
+            <a:schemeClr val="lt1"/>
+          </a:fontRef>
+        </p:style>
+        <p:txBody>
+          <a:bodyPr lIns="0" tIns="18288" rIns="0" bIns="0" rtlCol="0" anchor="ctr"/>
+          <a:lstStyle/>
+          <a:p>
+            <a:pPr algn="ctr"/>
+            <a:r>
+              <a:rPr sz="1600" b="1">
+                <a:solidFill>
+                  <a:srgbClr val="FFFFFF"/>
+                </a:solidFill>
+              </a:rPr>
+              <a:t>5</a:t>
+            </a:r>
+          </a:p>
+        </p:txBody>
+      </p:sp>
+      <p:sp>
+        <p:nvSpPr>
+          <p:cNvPr id="24" name="TextBox 23"/>
+          <p:cNvSpPr txBox="1"/>
+          <p:nvPr/>
+        </p:nvSpPr>
+        <p:spPr>
+          <a:xfrm>
+            <a:off x="4937760" y="4023360"/>
+            <a:ext cx="2834640" cy="411480"/>
+          </a:xfrm>
+          <a:prstGeom prst="rect">
+            <a:avLst/>
+          </a:prstGeom>
+          <a:noFill/>
+        </p:spPr>
+        <p:txBody>
+          <a:bodyPr wrap="none">
+            <a:spAutoFit/>
+          </a:bodyPr>
+          <a:lstStyle/>
+          <a:p>
+            <a:pPr algn="l"/>
+            <a:r>
+              <a:rPr sz="1600" b="1" i="0">
+                <a:solidFill>
+                  <a:srgbClr val="C0504D"/>
+                </a:solidFill>
+                <a:latin typeface="Calibri"/>
+              </a:rPr>
+              <a:t>Consultas &amp; Insights</a:t>
+            </a:r>
+          </a:p>
+        </p:txBody>
+      </p:sp>
+      <p:sp>
+        <p:nvSpPr>
+          <p:cNvPr id="25" name="TextBox 24"/>
+          <p:cNvSpPr txBox="1"/>
+          <p:nvPr/>
+        </p:nvSpPr>
+        <p:spPr>
+          <a:xfrm>
+            <a:off x="4480560" y="4526280"/>
+            <a:ext cx="3291840" cy="1463040"/>
+          </a:xfrm>
+          <a:prstGeom prst="rect">
+            <a:avLst/>
+          </a:prstGeom>
+          <a:noFill/>
+        </p:spPr>
+        <p:txBody>
+          <a:bodyPr wrap="square">
+            <a:spAutoFit/>
+          </a:bodyPr>
+          <a:lstStyle/>
+          <a:p>
+            <a:pPr algn="l"/>
+            <a:r>
+              <a:rPr sz="1300" b="0" i="0">
+                <a:solidFill>
+                  <a:srgbClr val="212529"/>
+                </a:solidFill>
+                <a:latin typeface="Calibri"/>
+              </a:rPr>
+              <a:t>5 perguntas analíticas + bônus</a:t>
+            </a:r>
+          </a:p>
+        </p:txBody>
+      </p:sp>
+      <p:sp>
+        <p:nvSpPr>
+          <p:cNvPr id="26" name="Rounded Rectangle 25"/>
+          <p:cNvSpPr/>
+          <p:nvPr/>
+        </p:nvSpPr>
+        <p:spPr>
+          <a:xfrm>
+            <a:off x="8138160" y="3886200"/>
+            <a:ext cx="3657600" cy="2240280"/>
+          </a:xfrm>
+          <a:prstGeom prst="roundRect">
+            <a:avLst>
+              <a:gd name="adj" fmla="val 6000"/>
+            </a:avLst>
+          </a:prstGeom>
+          <a:solidFill>
+            <a:srgbClr val="F5F7FA"/>
+          </a:solidFill>
+          <a:ln w="19050">
+            <a:solidFill>
+              <a:srgbClr val="1F3A5F"/>
+            </a:solidFill>
+          </a:ln>
+        </p:spPr>
+        <p:style>
+          <a:lnRef idx="1">
+            <a:schemeClr val="accent1"/>
+          </a:lnRef>
+          <a:fillRef idx="3">
+            <a:schemeClr val="accent1"/>
+          </a:fillRef>
+          <a:effectRef idx="2">
+            <a:schemeClr val="accent1"/>
+          </a:effectRef>
+          <a:fontRef idx="minor">
+            <a:schemeClr val="lt1"/>
+          </a:fontRef>
+        </p:style>
+        <p:txBody>
+          <a:bodyPr rtlCol="0" anchor="ctr"/>
+          <a:lstStyle/>
+          <a:p>
+            <a:pPr algn="ctr"/>
+            <a:endParaRPr/>
+          </a:p>
+        </p:txBody>
+      </p:sp>
+      <p:sp>
+        <p:nvSpPr>
+          <p:cNvPr id="27" name="Oval 26"/>
+          <p:cNvSpPr/>
+          <p:nvPr/>
+        </p:nvSpPr>
+        <p:spPr>
+          <a:xfrm>
+            <a:off x="8275320" y="4023360"/>
+            <a:ext cx="457200" cy="457200"/>
+          </a:xfrm>
+          <a:prstGeom prst="ellipse">
+            <a:avLst/>
+          </a:prstGeom>
+          <a:solidFill>
+            <a:srgbClr val="1F3A5F"/>
+          </a:solidFill>
+          <a:ln>
+            <a:noFill/>
+          </a:ln>
+        </p:spPr>
+        <p:style>
+          <a:lnRef idx="1">
+            <a:schemeClr val="accent1"/>
+          </a:lnRef>
+          <a:fillRef idx="3">
+            <a:schemeClr val="accent1"/>
+          </a:fillRef>
+          <a:effectRef idx="2">
+            <a:schemeClr val="accent1"/>
+          </a:effectRef>
+          <a:fontRef idx="minor">
+            <a:schemeClr val="lt1"/>
+          </a:fontRef>
+        </p:style>
+        <p:txBody>
+          <a:bodyPr lIns="0" tIns="18288" rIns="0" bIns="0" rtlCol="0" anchor="ctr"/>
+          <a:lstStyle/>
+          <a:p>
+            <a:pPr algn="ctr"/>
+            <a:r>
+              <a:rPr sz="1600" b="1">
+                <a:solidFill>
+                  <a:srgbClr val="FFFFFF"/>
+                </a:solidFill>
+              </a:rPr>
+              <a:t>6</a:t>
+            </a:r>
+          </a:p>
+        </p:txBody>
+      </p:sp>
+      <p:sp>
+        <p:nvSpPr>
+          <p:cNvPr id="28" name="TextBox 27"/>
+          <p:cNvSpPr txBox="1"/>
+          <p:nvPr/>
+        </p:nvSpPr>
+        <p:spPr>
+          <a:xfrm>
+            <a:off x="8778240" y="4023360"/>
+            <a:ext cx="2834640" cy="411480"/>
+          </a:xfrm>
+          <a:prstGeom prst="rect">
+            <a:avLst/>
+          </a:prstGeom>
+          <a:noFill/>
+        </p:spPr>
+        <p:txBody>
+          <a:bodyPr wrap="none">
+            <a:spAutoFit/>
+          </a:bodyPr>
+          <a:lstStyle/>
+          <a:p>
+            <a:pPr algn="l"/>
+            <a:r>
+              <a:rPr sz="1600" b="1" i="0">
+                <a:solidFill>
+                  <a:srgbClr val="1F3A5F"/>
+                </a:solidFill>
+                <a:latin typeface="Calibri"/>
+              </a:rPr>
+              <a:t>Conclusão</a:t>
+            </a:r>
+          </a:p>
+        </p:txBody>
+      </p:sp>
+      <p:sp>
+        <p:nvSpPr>
+          <p:cNvPr id="29" name="TextBox 28"/>
+          <p:cNvSpPr txBox="1"/>
+          <p:nvPr/>
+        </p:nvSpPr>
+        <p:spPr>
+          <a:xfrm>
+            <a:off x="8321040" y="4526280"/>
+            <a:ext cx="3291840" cy="1463040"/>
+          </a:xfrm>
+          <a:prstGeom prst="rect">
+            <a:avLst/>
+          </a:prstGeom>
+          <a:noFill/>
+        </p:spPr>
+        <p:txBody>
+          <a:bodyPr wrap="square">
+            <a:spAutoFit/>
+          </a:bodyPr>
+          <a:lstStyle/>
+          <a:p>
+            <a:pPr algn="l"/>
+            <a:r>
+              <a:rPr sz="1300" b="0" i="0">
+                <a:solidFill>
+                  <a:srgbClr val="212529"/>
+                </a:solidFill>
+                <a:latin typeface="Calibri"/>
+              </a:rPr>
+              <a:t>Aprendizados e próximos passos</a:t>
+            </a:r>
+          </a:p>
+        </p:txBody>
+      </p:sp>
+      <p:sp>
+        <p:nvSpPr>
+          <p:cNvPr id="30" name="TextBox 29"/>
+          <p:cNvSpPr txBox="1"/>
+          <p:nvPr/>
+        </p:nvSpPr>
+        <p:spPr>
+          <a:xfrm>
+            <a:off x="365760" y="6446520"/>
+            <a:ext cx="11430000" cy="320040"/>
+          </a:xfrm>
+          <a:prstGeom prst="rect">
+            <a:avLst/>
+          </a:prstGeom>
+          <a:noFill/>
+        </p:spPr>
+        <p:txBody>
+          <a:bodyPr wrap="none">
+            <a:spAutoFit/>
+          </a:bodyPr>
+          <a:lstStyle/>
+          <a:p>
+            <a:pPr algn="r"/>
+            <a:r>
+              <a:rPr sz="900" b="0" i="1">
+                <a:solidFill>
+                  <a:srgbClr val="1F3A5F"/>
+                </a:solidFill>
+                <a:latin typeface="Calibri"/>
+              </a:rPr>
+              <a:t>TP Banco de Dados · DCC/UFMG · 2/17</a:t>
             </a:r>
           </a:p>
         </p:txBody>
@@ -5548,7 +8270,7 @@
         <p:spPr>
           <a:xfrm>
             <a:off x="0" y="0"/>
-            <a:ext cx="12191695" cy="731520"/>
+            <a:ext cx="12191695" cy="777240"/>
           </a:xfrm>
           <a:prstGeom prst="rect">
             <a:avLst/>
@@ -5585,14 +8307,58 @@
       </p:sp>
       <p:sp>
         <p:nvSpPr>
-          <p:cNvPr id="3" name="TextBox 2"/>
+          <p:cNvPr id="3" name="Rectangle 2"/>
+          <p:cNvSpPr/>
+          <p:nvPr/>
+        </p:nvSpPr>
+        <p:spPr>
+          <a:xfrm>
+            <a:off x="0" y="777240"/>
+            <a:ext cx="12191695" cy="54864"/>
+          </a:xfrm>
+          <a:prstGeom prst="rect">
+            <a:avLst/>
+          </a:prstGeom>
+          <a:solidFill>
+            <a:srgbClr val="E8B40F"/>
+          </a:solidFill>
+          <a:ln>
+            <a:noFill/>
+          </a:ln>
+        </p:spPr>
+        <p:style>
+          <a:lnRef idx="1">
+            <a:schemeClr val="accent1"/>
+          </a:lnRef>
+          <a:fillRef idx="3">
+            <a:schemeClr val="accent1"/>
+          </a:fillRef>
+          <a:effectRef idx="2">
+            <a:schemeClr val="accent1"/>
+          </a:effectRef>
+          <a:fontRef idx="minor">
+            <a:schemeClr val="lt1"/>
+          </a:fontRef>
+        </p:style>
+        <p:txBody>
+          <a:bodyPr rtlCol="0" anchor="ctr"/>
+          <a:lstStyle/>
+          <a:p>
+            <a:pPr algn="ctr"/>
+            <a:endParaRPr/>
+          </a:p>
+        </p:txBody>
+      </p:sp>
+      <p:sp>
+        <p:nvSpPr>
+          <p:cNvPr id="4" name="TextBox 3"/>
           <p:cNvSpPr txBox="1"/>
           <p:nvPr/>
         </p:nvSpPr>
         <p:spPr>
           <a:xfrm>
             <a:off x="457200" y="91440"/>
-            <a:ext cx="10972800" cy="640080"/>
+            <a:ext cx="11247120" cy="640080"/>
           </a:xfrm>
           <a:prstGeom prst="rect">
             <a:avLst/>
@@ -5607,26 +8373,27 @@
           <a:p>
             <a:pPr algn="l"/>
             <a:r>
-              <a:rPr sz="2800" b="1">
+              <a:rPr sz="2800" b="1" i="0">
                 <a:solidFill>
                   <a:srgbClr val="FFFFFF"/>
                 </a:solidFill>
-              </a:rPr>
-              <a:t>O que é o CPGF — por que essa base?</a:t>
-            </a:r>
-          </a:p>
-        </p:txBody>
-      </p:sp>
-      <p:sp>
-        <p:nvSpPr>
-          <p:cNvPr id="4" name="TextBox 3"/>
+                <a:latin typeface="Calibri"/>
+              </a:rPr>
+              <a:t>Por que o CPGF?</a:t>
+            </a:r>
+          </a:p>
+        </p:txBody>
+      </p:sp>
+      <p:sp>
+        <p:nvSpPr>
+          <p:cNvPr id="5" name="TextBox 4"/>
           <p:cNvSpPr txBox="1"/>
           <p:nvPr/>
         </p:nvSpPr>
         <p:spPr>
           <a:xfrm>
-            <a:off x="457200" y="777240"/>
-            <a:ext cx="10972800" cy="365760"/>
+            <a:off x="457200" y="914400"/>
+            <a:ext cx="11247120" cy="457200"/>
           </a:xfrm>
           <a:prstGeom prst="rect">
             <a:avLst/>
@@ -5639,27 +8406,112 @@
           </a:bodyPr>
           <a:lstStyle/>
           <a:p>
-            <a:r>
-              <a:rPr sz="1400" i="1">
+            <a:pPr algn="l"/>
+            <a:r>
+              <a:rPr sz="1500" b="0" i="1">
+                <a:solidFill>
+                  <a:srgbClr val="555B66"/>
+                </a:solidFill>
+                <a:latin typeface="Calibri"/>
+              </a:rPr>
+              <a:t>Cartão de Pagamento do Governo Federal · Portal da Transparência</a:t>
+            </a:r>
+          </a:p>
+        </p:txBody>
+      </p:sp>
+      <p:sp>
+        <p:nvSpPr>
+          <p:cNvPr id="6" name="Rounded Rectangle 5"/>
+          <p:cNvSpPr/>
+          <p:nvPr/>
+        </p:nvSpPr>
+        <p:spPr>
+          <a:xfrm>
+            <a:off x="457200" y="1463040"/>
+            <a:ext cx="5303520" cy="4572000"/>
+          </a:xfrm>
+          <a:prstGeom prst="roundRect">
+            <a:avLst>
+              <a:gd name="adj" fmla="val 6000"/>
+            </a:avLst>
+          </a:prstGeom>
+          <a:solidFill>
+            <a:srgbClr val="F5F7FA"/>
+          </a:solidFill>
+          <a:ln w="19050">
+            <a:solidFill>
+              <a:srgbClr val="1F3A5F"/>
+            </a:solidFill>
+          </a:ln>
+        </p:spPr>
+        <p:style>
+          <a:lnRef idx="1">
+            <a:schemeClr val="accent1"/>
+          </a:lnRef>
+          <a:fillRef idx="3">
+            <a:schemeClr val="accent1"/>
+          </a:fillRef>
+          <a:effectRef idx="2">
+            <a:schemeClr val="accent1"/>
+          </a:effectRef>
+          <a:fontRef idx="minor">
+            <a:schemeClr val="lt1"/>
+          </a:fontRef>
+        </p:style>
+        <p:txBody>
+          <a:bodyPr rtlCol="0" anchor="ctr"/>
+          <a:lstStyle/>
+          <a:p>
+            <a:pPr algn="ctr"/>
+            <a:endParaRPr/>
+          </a:p>
+        </p:txBody>
+      </p:sp>
+      <p:sp>
+        <p:nvSpPr>
+          <p:cNvPr id="7" name="TextBox 6"/>
+          <p:cNvSpPr txBox="1"/>
+          <p:nvPr/>
+        </p:nvSpPr>
+        <p:spPr>
+          <a:xfrm>
+            <a:off x="640080" y="1600200"/>
+            <a:ext cx="4937760" cy="411480"/>
+          </a:xfrm>
+          <a:prstGeom prst="rect">
+            <a:avLst/>
+          </a:prstGeom>
+          <a:noFill/>
+        </p:spPr>
+        <p:txBody>
+          <a:bodyPr wrap="none">
+            <a:spAutoFit/>
+          </a:bodyPr>
+          <a:lstStyle/>
+          <a:p>
+            <a:pPr algn="l"/>
+            <a:r>
+              <a:rPr sz="1800" b="1" i="0">
                 <a:solidFill>
                   <a:srgbClr val="1F3A5F"/>
                 </a:solidFill>
-              </a:rPr>
-              <a:t>Cartão de Pagamento do Governo Federal · Portal da Transparência</a:t>
-            </a:r>
-          </a:p>
-        </p:txBody>
-      </p:sp>
-      <p:sp>
-        <p:nvSpPr>
-          <p:cNvPr id="5" name="TextBox 4"/>
+                <a:latin typeface="Calibri"/>
+              </a:rPr>
+              <a:t>O que é</a:t>
+            </a:r>
+          </a:p>
+        </p:txBody>
+      </p:sp>
+      <p:sp>
+        <p:nvSpPr>
+          <p:cNvPr id="8" name="TextBox 7"/>
           <p:cNvSpPr txBox="1"/>
           <p:nvPr/>
         </p:nvSpPr>
         <p:spPr>
           <a:xfrm>
-            <a:off x="548640" y="1371600"/>
-            <a:ext cx="10972800" cy="5029200"/>
+            <a:off x="640080" y="2103120"/>
+            <a:ext cx="4937760" cy="3794760"/>
           </a:xfrm>
           <a:prstGeom prst="rect">
             <a:avLst/>
@@ -5674,76 +8526,568 @@
           <a:p>
             <a:pPr algn="l">
               <a:spcAft>
-                <a:spcPts val="800"/>
+                <a:spcPts val="400"/>
               </a:spcAft>
             </a:pPr>
             <a:r>
-              <a:rPr sz="2000">
-                <a:solidFill>
-                  <a:srgbClr val="333333"/>
-                </a:solidFill>
-              </a:rPr>
-              <a:t>• Cartão de crédito corporativo de Unidades Gestoras da Administração Pública Federal.</a:t>
+              <a:rPr sz="1400">
+                <a:solidFill>
+                  <a:srgbClr val="212529"/>
+                </a:solidFill>
+              </a:rPr>
+              <a:t>• Cartão de crédito corporativo de UGs federais</a:t>
             </a:r>
           </a:p>
           <a:p>
             <a:pPr algn="l">
               <a:spcAft>
-                <a:spcPts val="800"/>
+                <a:spcPts val="400"/>
               </a:spcAft>
             </a:pPr>
             <a:r>
-              <a:rPr sz="2000">
-                <a:solidFill>
-                  <a:srgbClr val="333333"/>
-                </a:solidFill>
-              </a:rPr>
-              <a:t>• Cada transação registra órgão, portador, favorecido, data, tipo e valor.</a:t>
+              <a:rPr sz="1400">
+                <a:solidFill>
+                  <a:srgbClr val="212529"/>
+                </a:solidFill>
+              </a:rPr>
+              <a:t>• Transação = órgão, portador, favorecido, data, tipo, valor</a:t>
             </a:r>
           </a:p>
           <a:p>
             <a:pPr algn="l">
               <a:spcAft>
-                <a:spcPts val="800"/>
+                <a:spcPts val="400"/>
               </a:spcAft>
             </a:pPr>
             <a:r>
-              <a:rPr sz="2000">
-                <a:solidFill>
-                  <a:srgbClr val="333333"/>
-                </a:solidFill>
-              </a:rPr>
-              <a:t>• Base pública (LAI), volume robusto — 50-100 mil transações por mês.</a:t>
+              <a:rPr sz="1400">
+                <a:solidFill>
+                  <a:srgbClr val="212529"/>
+                </a:solidFill>
+              </a:rPr>
+              <a:t>• Publicado mensalmente pelo Portal da Transparência (CGU)</a:t>
             </a:r>
           </a:p>
           <a:p>
             <a:pPr algn="l">
               <a:spcAft>
-                <a:spcPts val="800"/>
+                <a:spcPts val="400"/>
               </a:spcAft>
             </a:pPr>
             <a:r>
-              <a:rPr sz="2000">
-                <a:solidFill>
-                  <a:srgbClr val="333333"/>
-                </a:solidFill>
-              </a:rPr>
-              <a:t>• Riqueza estrutural natural: 4+ entidades, hierarquia em 3 níveis, especialização PF/PJ.</a:t>
-            </a:r>
-          </a:p>
-          <a:p>
-            <a:pPr algn="l">
-              <a:spcAft>
-                <a:spcPts val="800"/>
-              </a:spcAft>
-            </a:pPr>
-            <a:r>
-              <a:rPr sz="2000">
-                <a:solidFill>
-                  <a:srgbClr val="333333"/>
-                </a:solidFill>
-              </a:rPr>
-              <a:t>• Domínio de alto interesse social — controle de gastos públicos.</a:t>
+              <a:rPr sz="1400">
+                <a:solidFill>
+                  <a:srgbClr val="212529"/>
+                </a:solidFill>
+              </a:rPr>
+              <a:t>• Dado pessoal anonimizado conforme LGPD</a:t>
+            </a:r>
+          </a:p>
+        </p:txBody>
+      </p:sp>
+      <p:sp>
+        <p:nvSpPr>
+          <p:cNvPr id="9" name="Rounded Rectangle 8"/>
+          <p:cNvSpPr/>
+          <p:nvPr/>
+        </p:nvSpPr>
+        <p:spPr>
+          <a:xfrm>
+            <a:off x="6035040" y="1463040"/>
+            <a:ext cx="2834640" cy="2194560"/>
+          </a:xfrm>
+          <a:prstGeom prst="roundRect">
+            <a:avLst>
+              <a:gd name="adj" fmla="val 6000"/>
+            </a:avLst>
+          </a:prstGeom>
+          <a:solidFill>
+            <a:srgbClr val="F5F7FA"/>
+          </a:solidFill>
+          <a:ln w="19050">
+            <a:solidFill>
+              <a:srgbClr val="2E86AB"/>
+            </a:solidFill>
+          </a:ln>
+        </p:spPr>
+        <p:style>
+          <a:lnRef idx="1">
+            <a:schemeClr val="accent1"/>
+          </a:lnRef>
+          <a:fillRef idx="3">
+            <a:schemeClr val="accent1"/>
+          </a:fillRef>
+          <a:effectRef idx="2">
+            <a:schemeClr val="accent1"/>
+          </a:effectRef>
+          <a:fontRef idx="minor">
+            <a:schemeClr val="lt1"/>
+          </a:fontRef>
+        </p:style>
+        <p:txBody>
+          <a:bodyPr rtlCol="0" anchor="ctr"/>
+          <a:lstStyle/>
+          <a:p>
+            <a:pPr algn="ctr"/>
+            <a:endParaRPr/>
+          </a:p>
+        </p:txBody>
+      </p:sp>
+      <p:sp>
+        <p:nvSpPr>
+          <p:cNvPr id="10" name="TextBox 9"/>
+          <p:cNvSpPr txBox="1"/>
+          <p:nvPr/>
+        </p:nvSpPr>
+        <p:spPr>
+          <a:xfrm>
+            <a:off x="6217920" y="1600200"/>
+            <a:ext cx="2468880" cy="411480"/>
+          </a:xfrm>
+          <a:prstGeom prst="rect">
+            <a:avLst/>
+          </a:prstGeom>
+          <a:noFill/>
+        </p:spPr>
+        <p:txBody>
+          <a:bodyPr wrap="none">
+            <a:spAutoFit/>
+          </a:bodyPr>
+          <a:lstStyle/>
+          <a:p>
+            <a:pPr algn="l"/>
+            <a:r>
+              <a:rPr sz="1600" b="1" i="0">
+                <a:solidFill>
+                  <a:srgbClr val="2E86AB"/>
+                </a:solidFill>
+                <a:latin typeface="Calibri"/>
+              </a:rPr>
+              <a:t>Volume</a:t>
+            </a:r>
+          </a:p>
+        </p:txBody>
+      </p:sp>
+      <p:sp>
+        <p:nvSpPr>
+          <p:cNvPr id="11" name="TextBox 10"/>
+          <p:cNvSpPr txBox="1"/>
+          <p:nvPr/>
+        </p:nvSpPr>
+        <p:spPr>
+          <a:xfrm>
+            <a:off x="6217920" y="2103120"/>
+            <a:ext cx="2468880" cy="1417320"/>
+          </a:xfrm>
+          <a:prstGeom prst="rect">
+            <a:avLst/>
+          </a:prstGeom>
+          <a:noFill/>
+        </p:spPr>
+        <p:txBody>
+          <a:bodyPr wrap="square">
+            <a:spAutoFit/>
+          </a:bodyPr>
+          <a:lstStyle/>
+          <a:p>
+            <a:pPr algn="l"/>
+            <a:r>
+              <a:rPr sz="1300" b="0" i="0">
+                <a:solidFill>
+                  <a:srgbClr val="212529"/>
+                </a:solidFill>
+                <a:latin typeface="Calibri"/>
+              </a:rPr>
+              <a:t>50-100 mil transações/mês</a:t>
+            </a:r>
+          </a:p>
+        </p:txBody>
+      </p:sp>
+      <p:sp>
+        <p:nvSpPr>
+          <p:cNvPr id="12" name="Rounded Rectangle 11"/>
+          <p:cNvSpPr/>
+          <p:nvPr/>
+        </p:nvSpPr>
+        <p:spPr>
+          <a:xfrm>
+            <a:off x="9006840" y="1463040"/>
+            <a:ext cx="2834640" cy="2194560"/>
+          </a:xfrm>
+          <a:prstGeom prst="roundRect">
+            <a:avLst>
+              <a:gd name="adj" fmla="val 6000"/>
+            </a:avLst>
+          </a:prstGeom>
+          <a:solidFill>
+            <a:srgbClr val="F5F7FA"/>
+          </a:solidFill>
+          <a:ln w="19050">
+            <a:solidFill>
+              <a:srgbClr val="1F3A5F"/>
+            </a:solidFill>
+          </a:ln>
+        </p:spPr>
+        <p:style>
+          <a:lnRef idx="1">
+            <a:schemeClr val="accent1"/>
+          </a:lnRef>
+          <a:fillRef idx="3">
+            <a:schemeClr val="accent1"/>
+          </a:fillRef>
+          <a:effectRef idx="2">
+            <a:schemeClr val="accent1"/>
+          </a:effectRef>
+          <a:fontRef idx="minor">
+            <a:schemeClr val="lt1"/>
+          </a:fontRef>
+        </p:style>
+        <p:txBody>
+          <a:bodyPr rtlCol="0" anchor="ctr"/>
+          <a:lstStyle/>
+          <a:p>
+            <a:pPr algn="ctr"/>
+            <a:endParaRPr/>
+          </a:p>
+        </p:txBody>
+      </p:sp>
+      <p:sp>
+        <p:nvSpPr>
+          <p:cNvPr id="13" name="TextBox 12"/>
+          <p:cNvSpPr txBox="1"/>
+          <p:nvPr/>
+        </p:nvSpPr>
+        <p:spPr>
+          <a:xfrm>
+            <a:off x="9189720" y="1600200"/>
+            <a:ext cx="2468880" cy="411480"/>
+          </a:xfrm>
+          <a:prstGeom prst="rect">
+            <a:avLst/>
+          </a:prstGeom>
+          <a:noFill/>
+        </p:spPr>
+        <p:txBody>
+          <a:bodyPr wrap="none">
+            <a:spAutoFit/>
+          </a:bodyPr>
+          <a:lstStyle/>
+          <a:p>
+            <a:pPr algn="l"/>
+            <a:r>
+              <a:rPr sz="1600" b="1" i="0">
+                <a:solidFill>
+                  <a:srgbClr val="1F3A5F"/>
+                </a:solidFill>
+                <a:latin typeface="Calibri"/>
+              </a:rPr>
+              <a:t>Estrutura</a:t>
+            </a:r>
+          </a:p>
+        </p:txBody>
+      </p:sp>
+      <p:sp>
+        <p:nvSpPr>
+          <p:cNvPr id="14" name="TextBox 13"/>
+          <p:cNvSpPr txBox="1"/>
+          <p:nvPr/>
+        </p:nvSpPr>
+        <p:spPr>
+          <a:xfrm>
+            <a:off x="9189720" y="2103120"/>
+            <a:ext cx="2468880" cy="1417320"/>
+          </a:xfrm>
+          <a:prstGeom prst="rect">
+            <a:avLst/>
+          </a:prstGeom>
+          <a:noFill/>
+        </p:spPr>
+        <p:txBody>
+          <a:bodyPr wrap="square">
+            <a:spAutoFit/>
+          </a:bodyPr>
+          <a:lstStyle/>
+          <a:p>
+            <a:pPr algn="l"/>
+            <a:r>
+              <a:rPr sz="1300" b="0" i="0">
+                <a:solidFill>
+                  <a:srgbClr val="212529"/>
+                </a:solidFill>
+                <a:latin typeface="Calibri"/>
+              </a:rPr>
+              <a:t>4+ entidades (hierarquia + EER)</a:t>
+            </a:r>
+          </a:p>
+        </p:txBody>
+      </p:sp>
+      <p:sp>
+        <p:nvSpPr>
+          <p:cNvPr id="15" name="Rounded Rectangle 14"/>
+          <p:cNvSpPr/>
+          <p:nvPr/>
+        </p:nvSpPr>
+        <p:spPr>
+          <a:xfrm>
+            <a:off x="6035040" y="3840480"/>
+            <a:ext cx="2834640" cy="2194560"/>
+          </a:xfrm>
+          <a:prstGeom prst="roundRect">
+            <a:avLst>
+              <a:gd name="adj" fmla="val 6000"/>
+            </a:avLst>
+          </a:prstGeom>
+          <a:solidFill>
+            <a:srgbClr val="F5F7FA"/>
+          </a:solidFill>
+          <a:ln w="19050">
+            <a:solidFill>
+              <a:srgbClr val="2E7D32"/>
+            </a:solidFill>
+          </a:ln>
+        </p:spPr>
+        <p:style>
+          <a:lnRef idx="1">
+            <a:schemeClr val="accent1"/>
+          </a:lnRef>
+          <a:fillRef idx="3">
+            <a:schemeClr val="accent1"/>
+          </a:fillRef>
+          <a:effectRef idx="2">
+            <a:schemeClr val="accent1"/>
+          </a:effectRef>
+          <a:fontRef idx="minor">
+            <a:schemeClr val="lt1"/>
+          </a:fontRef>
+        </p:style>
+        <p:txBody>
+          <a:bodyPr rtlCol="0" anchor="ctr"/>
+          <a:lstStyle/>
+          <a:p>
+            <a:pPr algn="ctr"/>
+            <a:endParaRPr/>
+          </a:p>
+        </p:txBody>
+      </p:sp>
+      <p:sp>
+        <p:nvSpPr>
+          <p:cNvPr id="16" name="TextBox 15"/>
+          <p:cNvSpPr txBox="1"/>
+          <p:nvPr/>
+        </p:nvSpPr>
+        <p:spPr>
+          <a:xfrm>
+            <a:off x="6217920" y="3977640"/>
+            <a:ext cx="2468880" cy="411480"/>
+          </a:xfrm>
+          <a:prstGeom prst="rect">
+            <a:avLst/>
+          </a:prstGeom>
+          <a:noFill/>
+        </p:spPr>
+        <p:txBody>
+          <a:bodyPr wrap="none">
+            <a:spAutoFit/>
+          </a:bodyPr>
+          <a:lstStyle/>
+          <a:p>
+            <a:pPr algn="l"/>
+            <a:r>
+              <a:rPr sz="1600" b="1" i="0">
+                <a:solidFill>
+                  <a:srgbClr val="2E7D32"/>
+                </a:solidFill>
+                <a:latin typeface="Calibri"/>
+              </a:rPr>
+              <a:t>Abertura</a:t>
+            </a:r>
+          </a:p>
+        </p:txBody>
+      </p:sp>
+      <p:sp>
+        <p:nvSpPr>
+          <p:cNvPr id="17" name="TextBox 16"/>
+          <p:cNvSpPr txBox="1"/>
+          <p:nvPr/>
+        </p:nvSpPr>
+        <p:spPr>
+          <a:xfrm>
+            <a:off x="6217920" y="4480560"/>
+            <a:ext cx="2468880" cy="1417320"/>
+          </a:xfrm>
+          <a:prstGeom prst="rect">
+            <a:avLst/>
+          </a:prstGeom>
+          <a:noFill/>
+        </p:spPr>
+        <p:txBody>
+          <a:bodyPr wrap="square">
+            <a:spAutoFit/>
+          </a:bodyPr>
+          <a:lstStyle/>
+          <a:p>
+            <a:pPr algn="l"/>
+            <a:r>
+              <a:rPr sz="1300" b="0" i="0">
+                <a:solidFill>
+                  <a:srgbClr val="212529"/>
+                </a:solidFill>
+                <a:latin typeface="Calibri"/>
+              </a:rPr>
+              <a:t>Acesso público via LAI</a:t>
+            </a:r>
+          </a:p>
+        </p:txBody>
+      </p:sp>
+      <p:sp>
+        <p:nvSpPr>
+          <p:cNvPr id="18" name="Rounded Rectangle 17"/>
+          <p:cNvSpPr/>
+          <p:nvPr/>
+        </p:nvSpPr>
+        <p:spPr>
+          <a:xfrm>
+            <a:off x="9006840" y="3840480"/>
+            <a:ext cx="2834640" cy="2194560"/>
+          </a:xfrm>
+          <a:prstGeom prst="roundRect">
+            <a:avLst>
+              <a:gd name="adj" fmla="val 6000"/>
+            </a:avLst>
+          </a:prstGeom>
+          <a:solidFill>
+            <a:srgbClr val="F5F7FA"/>
+          </a:solidFill>
+          <a:ln w="19050">
+            <a:solidFill>
+              <a:srgbClr val="C0504D"/>
+            </a:solidFill>
+          </a:ln>
+        </p:spPr>
+        <p:style>
+          <a:lnRef idx="1">
+            <a:schemeClr val="accent1"/>
+          </a:lnRef>
+          <a:fillRef idx="3">
+            <a:schemeClr val="accent1"/>
+          </a:fillRef>
+          <a:effectRef idx="2">
+            <a:schemeClr val="accent1"/>
+          </a:effectRef>
+          <a:fontRef idx="minor">
+            <a:schemeClr val="lt1"/>
+          </a:fontRef>
+        </p:style>
+        <p:txBody>
+          <a:bodyPr rtlCol="0" anchor="ctr"/>
+          <a:lstStyle/>
+          <a:p>
+            <a:pPr algn="ctr"/>
+            <a:endParaRPr/>
+          </a:p>
+        </p:txBody>
+      </p:sp>
+      <p:sp>
+        <p:nvSpPr>
+          <p:cNvPr id="19" name="TextBox 18"/>
+          <p:cNvSpPr txBox="1"/>
+          <p:nvPr/>
+        </p:nvSpPr>
+        <p:spPr>
+          <a:xfrm>
+            <a:off x="9189720" y="3977640"/>
+            <a:ext cx="2468880" cy="411480"/>
+          </a:xfrm>
+          <a:prstGeom prst="rect">
+            <a:avLst/>
+          </a:prstGeom>
+          <a:noFill/>
+        </p:spPr>
+        <p:txBody>
+          <a:bodyPr wrap="none">
+            <a:spAutoFit/>
+          </a:bodyPr>
+          <a:lstStyle/>
+          <a:p>
+            <a:pPr algn="l"/>
+            <a:r>
+              <a:rPr sz="1600" b="1" i="0">
+                <a:solidFill>
+                  <a:srgbClr val="C0504D"/>
+                </a:solidFill>
+                <a:latin typeface="Calibri"/>
+              </a:rPr>
+              <a:t>Relevância</a:t>
+            </a:r>
+          </a:p>
+        </p:txBody>
+      </p:sp>
+      <p:sp>
+        <p:nvSpPr>
+          <p:cNvPr id="20" name="TextBox 19"/>
+          <p:cNvSpPr txBox="1"/>
+          <p:nvPr/>
+        </p:nvSpPr>
+        <p:spPr>
+          <a:xfrm>
+            <a:off x="9189720" y="4480560"/>
+            <a:ext cx="2468880" cy="1417320"/>
+          </a:xfrm>
+          <a:prstGeom prst="rect">
+            <a:avLst/>
+          </a:prstGeom>
+          <a:noFill/>
+        </p:spPr>
+        <p:txBody>
+          <a:bodyPr wrap="square">
+            <a:spAutoFit/>
+          </a:bodyPr>
+          <a:lstStyle/>
+          <a:p>
+            <a:pPr algn="l"/>
+            <a:r>
+              <a:rPr sz="1300" b="0" i="0">
+                <a:solidFill>
+                  <a:srgbClr val="212529"/>
+                </a:solidFill>
+                <a:latin typeface="Calibri"/>
+              </a:rPr>
+              <a:t>Controle social do gasto público</a:t>
+            </a:r>
+          </a:p>
+        </p:txBody>
+      </p:sp>
+      <p:sp>
+        <p:nvSpPr>
+          <p:cNvPr id="21" name="TextBox 20"/>
+          <p:cNvSpPr txBox="1"/>
+          <p:nvPr/>
+        </p:nvSpPr>
+        <p:spPr>
+          <a:xfrm>
+            <a:off x="365760" y="6446520"/>
+            <a:ext cx="11430000" cy="320040"/>
+          </a:xfrm>
+          <a:prstGeom prst="rect">
+            <a:avLst/>
+          </a:prstGeom>
+          <a:noFill/>
+        </p:spPr>
+        <p:txBody>
+          <a:bodyPr wrap="none">
+            <a:spAutoFit/>
+          </a:bodyPr>
+          <a:lstStyle/>
+          <a:p>
+            <a:pPr algn="r"/>
+            <a:r>
+              <a:rPr sz="900" b="0" i="1">
+                <a:solidFill>
+                  <a:srgbClr val="1F3A5F"/>
+                </a:solidFill>
+                <a:latin typeface="Calibri"/>
+              </a:rPr>
+              <a:t>TP Banco de Dados · DCC/UFMG · 3/17</a:t>
             </a:r>
           </a:p>
         </p:txBody>
@@ -5782,7 +9126,7 @@
         <p:spPr>
           <a:xfrm>
             <a:off x="0" y="0"/>
-            <a:ext cx="12191695" cy="731520"/>
+            <a:ext cx="12191695" cy="777240"/>
           </a:xfrm>
           <a:prstGeom prst="rect">
             <a:avLst/>
@@ -5819,14 +9163,58 @@
       </p:sp>
       <p:sp>
         <p:nvSpPr>
-          <p:cNvPr id="3" name="TextBox 2"/>
+          <p:cNvPr id="3" name="Rectangle 2"/>
+          <p:cNvSpPr/>
+          <p:nvPr/>
+        </p:nvSpPr>
+        <p:spPr>
+          <a:xfrm>
+            <a:off x="0" y="777240"/>
+            <a:ext cx="12191695" cy="54864"/>
+          </a:xfrm>
+          <a:prstGeom prst="rect">
+            <a:avLst/>
+          </a:prstGeom>
+          <a:solidFill>
+            <a:srgbClr val="E8B40F"/>
+          </a:solidFill>
+          <a:ln>
+            <a:noFill/>
+          </a:ln>
+        </p:spPr>
+        <p:style>
+          <a:lnRef idx="1">
+            <a:schemeClr val="accent1"/>
+          </a:lnRef>
+          <a:fillRef idx="3">
+            <a:schemeClr val="accent1"/>
+          </a:fillRef>
+          <a:effectRef idx="2">
+            <a:schemeClr val="accent1"/>
+          </a:effectRef>
+          <a:fontRef idx="minor">
+            <a:schemeClr val="lt1"/>
+          </a:fontRef>
+        </p:style>
+        <p:txBody>
+          <a:bodyPr rtlCol="0" anchor="ctr"/>
+          <a:lstStyle/>
+          <a:p>
+            <a:pPr algn="ctr"/>
+            <a:endParaRPr/>
+          </a:p>
+        </p:txBody>
+      </p:sp>
+      <p:sp>
+        <p:nvSpPr>
+          <p:cNvPr id="4" name="TextBox 3"/>
           <p:cNvSpPr txBox="1"/>
           <p:nvPr/>
         </p:nvSpPr>
         <p:spPr>
           <a:xfrm>
             <a:off x="457200" y="91440"/>
-            <a:ext cx="10972800" cy="640080"/>
+            <a:ext cx="11247120" cy="640080"/>
           </a:xfrm>
           <a:prstGeom prst="rect">
             <a:avLst/>
@@ -5841,10 +9229,11 @@
           <a:p>
             <a:pPr algn="l"/>
             <a:r>
-              <a:rPr sz="2800" b="1">
+              <a:rPr sz="2800" b="1" i="0">
                 <a:solidFill>
                   <a:srgbClr val="FFFFFF"/>
                 </a:solidFill>
+                <a:latin typeface="Calibri"/>
               </a:rPr>
               <a:t>Etapa 1 — Modelo Conceitual (ER/EER)</a:t>
             </a:r>
@@ -5853,14 +9242,14 @@
       </p:sp>
       <p:sp>
         <p:nvSpPr>
-          <p:cNvPr id="4" name="TextBox 3"/>
+          <p:cNvPr id="5" name="TextBox 4"/>
           <p:cNvSpPr txBox="1"/>
           <p:nvPr/>
         </p:nvSpPr>
         <p:spPr>
           <a:xfrm>
-            <a:off x="457200" y="777240"/>
-            <a:ext cx="10972800" cy="365760"/>
+            <a:off x="457200" y="914400"/>
+            <a:ext cx="11247120" cy="457200"/>
           </a:xfrm>
           <a:prstGeom prst="rect">
             <a:avLst/>
@@ -5873,20 +9262,22 @@
           </a:bodyPr>
           <a:lstStyle/>
           <a:p>
-            <a:r>
-              <a:rPr sz="1400" i="1">
-                <a:solidFill>
-                  <a:srgbClr val="1F3A5F"/>
-                </a:solidFill>
-              </a:rPr>
-              <a:t>7 entidades, notação ER clássica + extensão EER (especialização)</a:t>
+            <a:pPr algn="l"/>
+            <a:r>
+              <a:rPr sz="1500" b="0" i="1">
+                <a:solidFill>
+                  <a:srgbClr val="555B66"/>
+                </a:solidFill>
+                <a:latin typeface="Calibri"/>
+              </a:rPr>
+              <a:t>7 entidades · notação ER clássica + extensão EER (especialização disjunta total)</a:t>
             </a:r>
           </a:p>
         </p:txBody>
       </p:sp>
       <p:pic>
         <p:nvPicPr>
-          <p:cNvPr id="5" name="Picture 4" descr="diagrama_er.png"/>
+          <p:cNvPr id="6" name="Picture 5" descr="diagrama_er.png"/>
           <p:cNvPicPr>
             <a:picLocks noChangeAspect="1"/>
           </p:cNvPicPr>
@@ -5900,14 +9291,49 @@
         </p:blipFill>
         <p:spPr>
           <a:xfrm>
-            <a:off x="-1" y="1903016"/>
-            <a:ext cx="12191695" cy="3402549"/>
+            <a:off x="23602" y="2214372"/>
+            <a:ext cx="12144490" cy="3389375"/>
           </a:xfrm>
           <a:prstGeom prst="rect">
             <a:avLst/>
           </a:prstGeom>
         </p:spPr>
       </p:pic>
+      <p:sp>
+        <p:nvSpPr>
+          <p:cNvPr id="7" name="TextBox 6"/>
+          <p:cNvSpPr txBox="1"/>
+          <p:nvPr/>
+        </p:nvSpPr>
+        <p:spPr>
+          <a:xfrm>
+            <a:off x="365760" y="6446520"/>
+            <a:ext cx="11430000" cy="320040"/>
+          </a:xfrm>
+          <a:prstGeom prst="rect">
+            <a:avLst/>
+          </a:prstGeom>
+          <a:noFill/>
+        </p:spPr>
+        <p:txBody>
+          <a:bodyPr wrap="none">
+            <a:spAutoFit/>
+          </a:bodyPr>
+          <a:lstStyle/>
+          <a:p>
+            <a:pPr algn="r"/>
+            <a:r>
+              <a:rPr sz="900" b="0" i="1">
+                <a:solidFill>
+                  <a:srgbClr val="1F3A5F"/>
+                </a:solidFill>
+                <a:latin typeface="Calibri"/>
+              </a:rPr>
+              <a:t>TP Banco de Dados · DCC/UFMG · 4/17</a:t>
+            </a:r>
+          </a:p>
+        </p:txBody>
+      </p:sp>
     </p:spTree>
   </p:cSld>
   <p:clrMapOvr>
@@ -5942,7 +9368,7 @@
         <p:spPr>
           <a:xfrm>
             <a:off x="0" y="0"/>
-            <a:ext cx="12191695" cy="731520"/>
+            <a:ext cx="12191695" cy="777240"/>
           </a:xfrm>
           <a:prstGeom prst="rect">
             <a:avLst/>
@@ -5979,14 +9405,58 @@
       </p:sp>
       <p:sp>
         <p:nvSpPr>
-          <p:cNvPr id="3" name="TextBox 2"/>
+          <p:cNvPr id="3" name="Rectangle 2"/>
+          <p:cNvSpPr/>
+          <p:nvPr/>
+        </p:nvSpPr>
+        <p:spPr>
+          <a:xfrm>
+            <a:off x="0" y="777240"/>
+            <a:ext cx="12191695" cy="54864"/>
+          </a:xfrm>
+          <a:prstGeom prst="rect">
+            <a:avLst/>
+          </a:prstGeom>
+          <a:solidFill>
+            <a:srgbClr val="E8B40F"/>
+          </a:solidFill>
+          <a:ln>
+            <a:noFill/>
+          </a:ln>
+        </p:spPr>
+        <p:style>
+          <a:lnRef idx="1">
+            <a:schemeClr val="accent1"/>
+          </a:lnRef>
+          <a:fillRef idx="3">
+            <a:schemeClr val="accent1"/>
+          </a:fillRef>
+          <a:effectRef idx="2">
+            <a:schemeClr val="accent1"/>
+          </a:effectRef>
+          <a:fontRef idx="minor">
+            <a:schemeClr val="lt1"/>
+          </a:fontRef>
+        </p:style>
+        <p:txBody>
+          <a:bodyPr rtlCol="0" anchor="ctr"/>
+          <a:lstStyle/>
+          <a:p>
+            <a:pPr algn="ctr"/>
+            <a:endParaRPr/>
+          </a:p>
+        </p:txBody>
+      </p:sp>
+      <p:sp>
+        <p:nvSpPr>
+          <p:cNvPr id="4" name="TextBox 3"/>
           <p:cNvSpPr txBox="1"/>
           <p:nvPr/>
         </p:nvSpPr>
         <p:spPr>
           <a:xfrm>
             <a:off x="457200" y="91440"/>
-            <a:ext cx="10972800" cy="640080"/>
+            <a:ext cx="11247120" cy="640080"/>
           </a:xfrm>
           <a:prstGeom prst="rect">
             <a:avLst/>
@@ -6001,26 +9471,145 @@
           <a:p>
             <a:pPr algn="l"/>
             <a:r>
-              <a:rPr sz="2800" b="1">
+              <a:rPr sz="2800" b="1" i="0">
                 <a:solidFill>
                   <a:srgbClr val="FFFFFF"/>
                 </a:solidFill>
-              </a:rPr>
-              <a:t>Etapa 1 — Restrições de integridade do domínio</a:t>
-            </a:r>
-          </a:p>
-        </p:txBody>
-      </p:sp>
-      <p:sp>
-        <p:nvSpPr>
-          <p:cNvPr id="4" name="TextBox 3"/>
+                <a:latin typeface="Calibri"/>
+              </a:rPr>
+              <a:t>Restrições de Integridade</a:t>
+            </a:r>
+          </a:p>
+        </p:txBody>
+      </p:sp>
+      <p:sp>
+        <p:nvSpPr>
+          <p:cNvPr id="5" name="TextBox 4"/>
           <p:cNvSpPr txBox="1"/>
           <p:nvPr/>
         </p:nvSpPr>
         <p:spPr>
           <a:xfrm>
-            <a:off x="548640" y="1371600"/>
-            <a:ext cx="10972800" cy="5029200"/>
+            <a:off x="457200" y="914400"/>
+            <a:ext cx="11247120" cy="457200"/>
+          </a:xfrm>
+          <a:prstGeom prst="rect">
+            <a:avLst/>
+          </a:prstGeom>
+          <a:noFill/>
+        </p:spPr>
+        <p:txBody>
+          <a:bodyPr wrap="none">
+            <a:spAutoFit/>
+          </a:bodyPr>
+          <a:lstStyle/>
+          <a:p>
+            <a:pPr algn="l"/>
+            <a:r>
+              <a:rPr sz="1500" b="0" i="1">
+                <a:solidFill>
+                  <a:srgbClr val="555B66"/>
+                </a:solidFill>
+                <a:latin typeface="Calibri"/>
+              </a:rPr>
+              <a:t>Nove restrições do domínio · embarcadas no schema PostgreSQL</a:t>
+            </a:r>
+          </a:p>
+        </p:txBody>
+      </p:sp>
+      <p:sp>
+        <p:nvSpPr>
+          <p:cNvPr id="6" name="Rounded Rectangle 5"/>
+          <p:cNvSpPr/>
+          <p:nvPr/>
+        </p:nvSpPr>
+        <p:spPr>
+          <a:xfrm>
+            <a:off x="457200" y="1463040"/>
+            <a:ext cx="3703320" cy="4572000"/>
+          </a:xfrm>
+          <a:prstGeom prst="roundRect">
+            <a:avLst>
+              <a:gd name="adj" fmla="val 6000"/>
+            </a:avLst>
+          </a:prstGeom>
+          <a:solidFill>
+            <a:srgbClr val="F5F7FA"/>
+          </a:solidFill>
+          <a:ln w="19050">
+            <a:solidFill>
+              <a:srgbClr val="C0504D"/>
+            </a:solidFill>
+          </a:ln>
+        </p:spPr>
+        <p:style>
+          <a:lnRef idx="1">
+            <a:schemeClr val="accent1"/>
+          </a:lnRef>
+          <a:fillRef idx="3">
+            <a:schemeClr val="accent1"/>
+          </a:fillRef>
+          <a:effectRef idx="2">
+            <a:schemeClr val="accent1"/>
+          </a:effectRef>
+          <a:fontRef idx="minor">
+            <a:schemeClr val="lt1"/>
+          </a:fontRef>
+        </p:style>
+        <p:txBody>
+          <a:bodyPr rtlCol="0" anchor="ctr"/>
+          <a:lstStyle/>
+          <a:p>
+            <a:pPr algn="ctr"/>
+            <a:endParaRPr/>
+          </a:p>
+        </p:txBody>
+      </p:sp>
+      <p:sp>
+        <p:nvSpPr>
+          <p:cNvPr id="7" name="TextBox 6"/>
+          <p:cNvSpPr txBox="1"/>
+          <p:nvPr/>
+        </p:nvSpPr>
+        <p:spPr>
+          <a:xfrm>
+            <a:off x="640080" y="1600200"/>
+            <a:ext cx="3337560" cy="411480"/>
+          </a:xfrm>
+          <a:prstGeom prst="rect">
+            <a:avLst/>
+          </a:prstGeom>
+          <a:noFill/>
+        </p:spPr>
+        <p:txBody>
+          <a:bodyPr wrap="none">
+            <a:spAutoFit/>
+          </a:bodyPr>
+          <a:lstStyle/>
+          <a:p>
+            <a:pPr algn="l"/>
+            <a:r>
+              <a:rPr sz="1800" b="1" i="0">
+                <a:solidFill>
+                  <a:srgbClr val="C0504D"/>
+                </a:solidFill>
+                <a:latin typeface="Calibri"/>
+              </a:rPr>
+              <a:t>Valores</a:t>
+            </a:r>
+          </a:p>
+        </p:txBody>
+      </p:sp>
+      <p:sp>
+        <p:nvSpPr>
+          <p:cNvPr id="8" name="TextBox 7"/>
+          <p:cNvSpPr txBox="1"/>
+          <p:nvPr/>
+        </p:nvSpPr>
+        <p:spPr>
+          <a:xfrm>
+            <a:off x="640080" y="2103120"/>
+            <a:ext cx="3337560" cy="3794760"/>
           </a:xfrm>
           <a:prstGeom prst="rect">
             <a:avLst/>
@@ -6035,106 +9624,383 @@
           <a:p>
             <a:pPr algn="l">
               <a:spcAft>
-                <a:spcPts val="800"/>
+                <a:spcPts val="400"/>
               </a:spcAft>
             </a:pPr>
             <a:r>
-              <a:rPr sz="1800">
-                <a:solidFill>
-                  <a:srgbClr val="333333"/>
-                </a:solidFill>
-              </a:rPr>
-              <a:t>• R1. valor ≠ 0; reversões/estornos têm valor negativo (R2).</a:t>
+              <a:rPr sz="1400">
+                <a:solidFill>
+                  <a:srgbClr val="212529"/>
+                </a:solidFill>
+              </a:rPr>
+              <a:t>• R1  valor ≠ 0</a:t>
             </a:r>
           </a:p>
           <a:p>
             <a:pPr algn="l">
               <a:spcAft>
-                <a:spcPts val="800"/>
+                <a:spcPts val="400"/>
               </a:spcAft>
             </a:pPr>
             <a:r>
-              <a:rPr sz="1800">
-                <a:solidFill>
-                  <a:srgbClr val="333333"/>
-                </a:solidFill>
-              </a:rPr>
-              <a:t>• R3. data_transacao válida e próxima do mês-ano do extrato.</a:t>
-            </a:r>
-          </a:p>
+              <a:rPr sz="1400">
+                <a:solidFill>
+                  <a:srgbClr val="212529"/>
+                </a:solidFill>
+              </a:rPr>
+              <a:t>• R2  valor &gt; 0 (negativo só em reversões)</a:t>
+            </a:r>
+          </a:p>
+        </p:txBody>
+      </p:sp>
+      <p:sp>
+        <p:nvSpPr>
+          <p:cNvPr id="9" name="Rounded Rectangle 8"/>
+          <p:cNvSpPr/>
+          <p:nvPr/>
+        </p:nvSpPr>
+        <p:spPr>
+          <a:xfrm>
+            <a:off x="4343400" y="1463040"/>
+            <a:ext cx="3703320" cy="4572000"/>
+          </a:xfrm>
+          <a:prstGeom prst="roundRect">
+            <a:avLst>
+              <a:gd name="adj" fmla="val 6000"/>
+            </a:avLst>
+          </a:prstGeom>
+          <a:solidFill>
+            <a:srgbClr val="F5F7FA"/>
+          </a:solidFill>
+          <a:ln w="19050">
+            <a:solidFill>
+              <a:srgbClr val="2E86AB"/>
+            </a:solidFill>
+          </a:ln>
+        </p:spPr>
+        <p:style>
+          <a:lnRef idx="1">
+            <a:schemeClr val="accent1"/>
+          </a:lnRef>
+          <a:fillRef idx="3">
+            <a:schemeClr val="accent1"/>
+          </a:fillRef>
+          <a:effectRef idx="2">
+            <a:schemeClr val="accent1"/>
+          </a:effectRef>
+          <a:fontRef idx="minor">
+            <a:schemeClr val="lt1"/>
+          </a:fontRef>
+        </p:style>
+        <p:txBody>
+          <a:bodyPr rtlCol="0" anchor="ctr"/>
+          <a:lstStyle/>
+          <a:p>
+            <a:pPr algn="ctr"/>
+            <a:endParaRPr/>
+          </a:p>
+        </p:txBody>
+      </p:sp>
+      <p:sp>
+        <p:nvSpPr>
+          <p:cNvPr id="10" name="TextBox 9"/>
+          <p:cNvSpPr txBox="1"/>
+          <p:nvPr/>
+        </p:nvSpPr>
+        <p:spPr>
+          <a:xfrm>
+            <a:off x="4526280" y="1600200"/>
+            <a:ext cx="3337560" cy="411480"/>
+          </a:xfrm>
+          <a:prstGeom prst="rect">
+            <a:avLst/>
+          </a:prstGeom>
+          <a:noFill/>
+        </p:spPr>
+        <p:txBody>
+          <a:bodyPr wrap="none">
+            <a:spAutoFit/>
+          </a:bodyPr>
+          <a:lstStyle/>
+          <a:p>
+            <a:pPr algn="l"/>
+            <a:r>
+              <a:rPr sz="1800" b="1" i="0">
+                <a:solidFill>
+                  <a:srgbClr val="2E86AB"/>
+                </a:solidFill>
+                <a:latin typeface="Calibri"/>
+              </a:rPr>
+              <a:t>Datas &amp; Formato</a:t>
+            </a:r>
+          </a:p>
+        </p:txBody>
+      </p:sp>
+      <p:sp>
+        <p:nvSpPr>
+          <p:cNvPr id="11" name="TextBox 10"/>
+          <p:cNvSpPr txBox="1"/>
+          <p:nvPr/>
+        </p:nvSpPr>
+        <p:spPr>
+          <a:xfrm>
+            <a:off x="4526280" y="2103120"/>
+            <a:ext cx="3337560" cy="3794760"/>
+          </a:xfrm>
+          <a:prstGeom prst="rect">
+            <a:avLst/>
+          </a:prstGeom>
+          <a:noFill/>
+        </p:spPr>
+        <p:txBody>
+          <a:bodyPr wrap="square">
+            <a:spAutoFit/>
+          </a:bodyPr>
+          <a:lstStyle/>
           <a:p>
             <a:pPr algn="l">
               <a:spcAft>
-                <a:spcPts val="800"/>
+                <a:spcPts val="400"/>
               </a:spcAft>
             </a:pPr>
             <a:r>
-              <a:rPr sz="1800">
-                <a:solidFill>
-                  <a:srgbClr val="333333"/>
-                </a:solidFill>
-              </a:rPr>
-              <a:t>• R4. mes_extrato ∈ {1..12}; ano_extrato ∈ [2003, atual].</a:t>
+              <a:rPr sz="1400">
+                <a:solidFill>
+                  <a:srgbClr val="212529"/>
+                </a:solidFill>
+              </a:rPr>
+              <a:t>• R3  data próxima do mês-ano do extrato</a:t>
             </a:r>
           </a:p>
           <a:p>
             <a:pPr algn="l">
               <a:spcAft>
-                <a:spcPts val="800"/>
+                <a:spcPts val="400"/>
               </a:spcAft>
             </a:pPr>
             <a:r>
-              <a:rPr sz="1800">
-                <a:solidFill>
-                  <a:srgbClr val="333333"/>
-                </a:solidFill>
-              </a:rPr>
-              <a:t>• R5. cpf_portador na máscara anonimizada ***.NNN.NNN-**.</a:t>
+              <a:rPr sz="1400">
+                <a:solidFill>
+                  <a:srgbClr val="212529"/>
+                </a:solidFill>
+              </a:rPr>
+              <a:t>• R4  mês ∈ {1..12}; ano ≥ 2003</a:t>
             </a:r>
           </a:p>
           <a:p>
             <a:pPr algn="l">
               <a:spcAft>
-                <a:spcPts val="800"/>
+                <a:spcPts val="400"/>
               </a:spcAft>
             </a:pPr>
             <a:r>
-              <a:rPr sz="1800">
-                <a:solidFill>
-                  <a:srgbClr val="333333"/>
-                </a:solidFill>
-              </a:rPr>
-              <a:t>• R6. cpf_cnpj_favorecido: 11 dígitos = PF, 14 = PJ.</a:t>
-            </a:r>
-          </a:p>
+              <a:rPr sz="1400">
+                <a:solidFill>
+                  <a:srgbClr val="212529"/>
+                </a:solidFill>
+              </a:rPr>
+              <a:t>• R5  CPF do portador na máscara ***.NNN.NNN-**</a:t>
+            </a:r>
+          </a:p>
+        </p:txBody>
+      </p:sp>
+      <p:sp>
+        <p:nvSpPr>
+          <p:cNvPr id="12" name="Rounded Rectangle 11"/>
+          <p:cNvSpPr/>
+          <p:nvPr/>
+        </p:nvSpPr>
+        <p:spPr>
+          <a:xfrm>
+            <a:off x="8229600" y="1463040"/>
+            <a:ext cx="3703320" cy="4572000"/>
+          </a:xfrm>
+          <a:prstGeom prst="roundRect">
+            <a:avLst>
+              <a:gd name="adj" fmla="val 6000"/>
+            </a:avLst>
+          </a:prstGeom>
+          <a:solidFill>
+            <a:srgbClr val="F5F7FA"/>
+          </a:solidFill>
+          <a:ln w="19050">
+            <a:solidFill>
+              <a:srgbClr val="2E7D32"/>
+            </a:solidFill>
+          </a:ln>
+        </p:spPr>
+        <p:style>
+          <a:lnRef idx="1">
+            <a:schemeClr val="accent1"/>
+          </a:lnRef>
+          <a:fillRef idx="3">
+            <a:schemeClr val="accent1"/>
+          </a:fillRef>
+          <a:effectRef idx="2">
+            <a:schemeClr val="accent1"/>
+          </a:effectRef>
+          <a:fontRef idx="minor">
+            <a:schemeClr val="lt1"/>
+          </a:fontRef>
+        </p:style>
+        <p:txBody>
+          <a:bodyPr rtlCol="0" anchor="ctr"/>
+          <a:lstStyle/>
+          <a:p>
+            <a:pPr algn="ctr"/>
+            <a:endParaRPr/>
+          </a:p>
+        </p:txBody>
+      </p:sp>
+      <p:sp>
+        <p:nvSpPr>
+          <p:cNvPr id="13" name="TextBox 12"/>
+          <p:cNvSpPr txBox="1"/>
+          <p:nvPr/>
+        </p:nvSpPr>
+        <p:spPr>
+          <a:xfrm>
+            <a:off x="8412480" y="1600200"/>
+            <a:ext cx="3337560" cy="411480"/>
+          </a:xfrm>
+          <a:prstGeom prst="rect">
+            <a:avLst/>
+          </a:prstGeom>
+          <a:noFill/>
+        </p:spPr>
+        <p:txBody>
+          <a:bodyPr wrap="none">
+            <a:spAutoFit/>
+          </a:bodyPr>
+          <a:lstStyle/>
+          <a:p>
+            <a:pPr algn="l"/>
+            <a:r>
+              <a:rPr sz="1800" b="1" i="0">
+                <a:solidFill>
+                  <a:srgbClr val="2E7D32"/>
+                </a:solidFill>
+                <a:latin typeface="Calibri"/>
+              </a:rPr>
+              <a:t>Identificação</a:t>
+            </a:r>
+          </a:p>
+        </p:txBody>
+      </p:sp>
+      <p:sp>
+        <p:nvSpPr>
+          <p:cNvPr id="14" name="TextBox 13"/>
+          <p:cNvSpPr txBox="1"/>
+          <p:nvPr/>
+        </p:nvSpPr>
+        <p:spPr>
+          <a:xfrm>
+            <a:off x="8412480" y="2103120"/>
+            <a:ext cx="3337560" cy="3794760"/>
+          </a:xfrm>
+          <a:prstGeom prst="rect">
+            <a:avLst/>
+          </a:prstGeom>
+          <a:noFill/>
+        </p:spPr>
+        <p:txBody>
+          <a:bodyPr wrap="square">
+            <a:spAutoFit/>
+          </a:bodyPr>
+          <a:lstStyle/>
           <a:p>
             <a:pPr algn="l">
               <a:spcAft>
-                <a:spcPts val="800"/>
+                <a:spcPts val="400"/>
               </a:spcAft>
             </a:pPr>
             <a:r>
-              <a:rPr sz="1800">
-                <a:solidFill>
-                  <a:srgbClr val="333333"/>
-                </a:solidFill>
-              </a:rPr>
-              <a:t>• R7-R8. Integridade referencial entre os 4 níveis da hierarquia.</a:t>
+              <a:rPr sz="1400">
+                <a:solidFill>
+                  <a:srgbClr val="212529"/>
+                </a:solidFill>
+              </a:rPr>
+              <a:t>• R6  11 dígitos = PF; 14 = PJ; outros = NI</a:t>
             </a:r>
           </a:p>
           <a:p>
             <a:pPr algn="l">
               <a:spcAft>
-                <a:spcPts val="800"/>
+                <a:spcPts val="400"/>
               </a:spcAft>
             </a:pPr>
             <a:r>
-              <a:rPr sz="1800">
-                <a:solidFill>
-                  <a:srgbClr val="333333"/>
-                </a:solidFill>
-              </a:rPr>
-              <a:t>• R9. Discriminador de especialização EER: tipo ∈ {PF, PJ, NI}.</a:t>
+              <a:rPr sz="1400">
+                <a:solidFill>
+                  <a:srgbClr val="212529"/>
+                </a:solidFill>
+              </a:rPr>
+              <a:t>• R7  integridade referencial (4 FKs em TRANSACAO)</a:t>
+            </a:r>
+          </a:p>
+          <a:p>
+            <a:pPr algn="l">
+              <a:spcAft>
+                <a:spcPts val="400"/>
+              </a:spcAft>
+            </a:pPr>
+            <a:r>
+              <a:rPr sz="1400">
+                <a:solidFill>
+                  <a:srgbClr val="212529"/>
+                </a:solidFill>
+              </a:rPr>
+              <a:t>• R8  hierarquia UG → Subordinado → Superior</a:t>
+            </a:r>
+          </a:p>
+          <a:p>
+            <a:pPr algn="l">
+              <a:spcAft>
+                <a:spcPts val="400"/>
+              </a:spcAft>
+            </a:pPr>
+            <a:r>
+              <a:rPr sz="1400">
+                <a:solidFill>
+                  <a:srgbClr val="212529"/>
+                </a:solidFill>
+              </a:rPr>
+              <a:t>• R9  discriminador EER ∈ {PF, PJ, NI}</a:t>
+            </a:r>
+          </a:p>
+        </p:txBody>
+      </p:sp>
+      <p:sp>
+        <p:nvSpPr>
+          <p:cNvPr id="15" name="TextBox 14"/>
+          <p:cNvSpPr txBox="1"/>
+          <p:nvPr/>
+        </p:nvSpPr>
+        <p:spPr>
+          <a:xfrm>
+            <a:off x="365760" y="6446520"/>
+            <a:ext cx="11430000" cy="320040"/>
+          </a:xfrm>
+          <a:prstGeom prst="rect">
+            <a:avLst/>
+          </a:prstGeom>
+          <a:noFill/>
+        </p:spPr>
+        <p:txBody>
+          <a:bodyPr wrap="none">
+            <a:spAutoFit/>
+          </a:bodyPr>
+          <a:lstStyle/>
+          <a:p>
+            <a:pPr algn="r"/>
+            <a:r>
+              <a:rPr sz="900" b="0" i="1">
+                <a:solidFill>
+                  <a:srgbClr val="1F3A5F"/>
+                </a:solidFill>
+                <a:latin typeface="Calibri"/>
+              </a:rPr>
+              <a:t>TP Banco de Dados · DCC/UFMG · 5/17</a:t>
             </a:r>
           </a:p>
         </p:txBody>
@@ -6173,7 +10039,7 @@
         <p:spPr>
           <a:xfrm>
             <a:off x="0" y="0"/>
-            <a:ext cx="12191695" cy="731520"/>
+            <a:ext cx="12191695" cy="777240"/>
           </a:xfrm>
           <a:prstGeom prst="rect">
             <a:avLst/>
@@ -6210,14 +10076,58 @@
       </p:sp>
       <p:sp>
         <p:nvSpPr>
-          <p:cNvPr id="3" name="TextBox 2"/>
+          <p:cNvPr id="3" name="Rectangle 2"/>
+          <p:cNvSpPr/>
+          <p:nvPr/>
+        </p:nvSpPr>
+        <p:spPr>
+          <a:xfrm>
+            <a:off x="0" y="777240"/>
+            <a:ext cx="12191695" cy="54864"/>
+          </a:xfrm>
+          <a:prstGeom prst="rect">
+            <a:avLst/>
+          </a:prstGeom>
+          <a:solidFill>
+            <a:srgbClr val="E8B40F"/>
+          </a:solidFill>
+          <a:ln>
+            <a:noFill/>
+          </a:ln>
+        </p:spPr>
+        <p:style>
+          <a:lnRef idx="1">
+            <a:schemeClr val="accent1"/>
+          </a:lnRef>
+          <a:fillRef idx="3">
+            <a:schemeClr val="accent1"/>
+          </a:fillRef>
+          <a:effectRef idx="2">
+            <a:schemeClr val="accent1"/>
+          </a:effectRef>
+          <a:fontRef idx="minor">
+            <a:schemeClr val="lt1"/>
+          </a:fontRef>
+        </p:style>
+        <p:txBody>
+          <a:bodyPr rtlCol="0" anchor="ctr"/>
+          <a:lstStyle/>
+          <a:p>
+            <a:pPr algn="ctr"/>
+            <a:endParaRPr/>
+          </a:p>
+        </p:txBody>
+      </p:sp>
+      <p:sp>
+        <p:nvSpPr>
+          <p:cNvPr id="4" name="TextBox 3"/>
           <p:cNvSpPr txBox="1"/>
           <p:nvPr/>
         </p:nvSpPr>
         <p:spPr>
           <a:xfrm>
             <a:off x="457200" y="91440"/>
-            <a:ext cx="10972800" cy="640080"/>
+            <a:ext cx="11247120" cy="640080"/>
           </a:xfrm>
           <a:prstGeom prst="rect">
             <a:avLst/>
@@ -6232,26 +10142,27 @@
           <a:p>
             <a:pPr algn="l"/>
             <a:r>
-              <a:rPr sz="2800" b="1">
+              <a:rPr sz="2800" b="1" i="0">
                 <a:solidFill>
                   <a:srgbClr val="FFFFFF"/>
                 </a:solidFill>
-              </a:rPr>
-              <a:t>Etapa 2 — Esquema relacional</a:t>
-            </a:r>
-          </a:p>
-        </p:txBody>
-      </p:sp>
-      <p:sp>
-        <p:nvSpPr>
-          <p:cNvPr id="4" name="TextBox 3"/>
+                <a:latin typeface="Calibri"/>
+              </a:rPr>
+              <a:t>Etapa 2 — Esquema Relacional</a:t>
+            </a:r>
+          </a:p>
+        </p:txBody>
+      </p:sp>
+      <p:sp>
+        <p:nvSpPr>
+          <p:cNvPr id="5" name="TextBox 4"/>
           <p:cNvSpPr txBox="1"/>
           <p:nvPr/>
         </p:nvSpPr>
         <p:spPr>
           <a:xfrm>
-            <a:off x="457200" y="777240"/>
-            <a:ext cx="10972800" cy="365760"/>
+            <a:off x="457200" y="914400"/>
+            <a:ext cx="11247120" cy="457200"/>
           </a:xfrm>
           <a:prstGeom prst="rect">
             <a:avLst/>
@@ -6264,11 +10175,13 @@
           </a:bodyPr>
           <a:lstStyle/>
           <a:p>
-            <a:r>
-              <a:rPr sz="1400" i="1">
-                <a:solidFill>
-                  <a:srgbClr val="1F3A5F"/>
-                </a:solidFill>
+            <a:pPr algn="l"/>
+            <a:r>
+              <a:rPr sz="1500" b="0" i="1">
+                <a:solidFill>
+                  <a:srgbClr val="555B66"/>
+                </a:solidFill>
+                <a:latin typeface="Calibri"/>
               </a:rPr>
               <a:t>9 relações com PK/FK explícitas em PostgreSQL</a:t>
             </a:r>
@@ -6277,7 +10190,7 @@
       </p:sp>
       <p:pic>
         <p:nvPicPr>
-          <p:cNvPr id="5" name="Picture 4" descr="diagrama_relacional.png"/>
+          <p:cNvPr id="6" name="Picture 5" descr="diagrama_relacional.png"/>
           <p:cNvPicPr>
             <a:picLocks noChangeAspect="1"/>
           </p:cNvPicPr>
@@ -6291,14 +10204,49 @@
         </p:blipFill>
         <p:spPr>
           <a:xfrm>
-            <a:off x="0" y="1478280"/>
-            <a:ext cx="12076431" cy="4922519"/>
+            <a:off x="38937" y="1554480"/>
+            <a:ext cx="12113821" cy="4937760"/>
           </a:xfrm>
           <a:prstGeom prst="rect">
             <a:avLst/>
           </a:prstGeom>
         </p:spPr>
       </p:pic>
+      <p:sp>
+        <p:nvSpPr>
+          <p:cNvPr id="7" name="TextBox 6"/>
+          <p:cNvSpPr txBox="1"/>
+          <p:nvPr/>
+        </p:nvSpPr>
+        <p:spPr>
+          <a:xfrm>
+            <a:off x="365760" y="6446520"/>
+            <a:ext cx="11430000" cy="320040"/>
+          </a:xfrm>
+          <a:prstGeom prst="rect">
+            <a:avLst/>
+          </a:prstGeom>
+          <a:noFill/>
+        </p:spPr>
+        <p:txBody>
+          <a:bodyPr wrap="none">
+            <a:spAutoFit/>
+          </a:bodyPr>
+          <a:lstStyle/>
+          <a:p>
+            <a:pPr algn="r"/>
+            <a:r>
+              <a:rPr sz="900" b="0" i="1">
+                <a:solidFill>
+                  <a:srgbClr val="1F3A5F"/>
+                </a:solidFill>
+                <a:latin typeface="Calibri"/>
+              </a:rPr>
+              <a:t>TP Banco de Dados · DCC/UFMG · 6/17</a:t>
+            </a:r>
+          </a:p>
+        </p:txBody>
+      </p:sp>
     </p:spTree>
   </p:cSld>
   <p:clrMapOvr>
@@ -6333,7 +10281,7 @@
         <p:spPr>
           <a:xfrm>
             <a:off x="0" y="0"/>
-            <a:ext cx="12191695" cy="731520"/>
+            <a:ext cx="12191695" cy="777240"/>
           </a:xfrm>
           <a:prstGeom prst="rect">
             <a:avLst/>
@@ -6370,14 +10318,58 @@
       </p:sp>
       <p:sp>
         <p:nvSpPr>
-          <p:cNvPr id="3" name="TextBox 2"/>
+          <p:cNvPr id="3" name="Rectangle 2"/>
+          <p:cNvSpPr/>
+          <p:nvPr/>
+        </p:nvSpPr>
+        <p:spPr>
+          <a:xfrm>
+            <a:off x="0" y="777240"/>
+            <a:ext cx="12191695" cy="54864"/>
+          </a:xfrm>
+          <a:prstGeom prst="rect">
+            <a:avLst/>
+          </a:prstGeom>
+          <a:solidFill>
+            <a:srgbClr val="E8B40F"/>
+          </a:solidFill>
+          <a:ln>
+            <a:noFill/>
+          </a:ln>
+        </p:spPr>
+        <p:style>
+          <a:lnRef idx="1">
+            <a:schemeClr val="accent1"/>
+          </a:lnRef>
+          <a:fillRef idx="3">
+            <a:schemeClr val="accent1"/>
+          </a:fillRef>
+          <a:effectRef idx="2">
+            <a:schemeClr val="accent1"/>
+          </a:effectRef>
+          <a:fontRef idx="minor">
+            <a:schemeClr val="lt1"/>
+          </a:fontRef>
+        </p:style>
+        <p:txBody>
+          <a:bodyPr rtlCol="0" anchor="ctr"/>
+          <a:lstStyle/>
+          <a:p>
+            <a:pPr algn="ctr"/>
+            <a:endParaRPr/>
+          </a:p>
+        </p:txBody>
+      </p:sp>
+      <p:sp>
+        <p:nvSpPr>
+          <p:cNvPr id="4" name="TextBox 3"/>
           <p:cNvSpPr txBox="1"/>
           <p:nvPr/>
         </p:nvSpPr>
         <p:spPr>
           <a:xfrm>
             <a:off x="457200" y="91440"/>
-            <a:ext cx="10972800" cy="640080"/>
+            <a:ext cx="11247120" cy="640080"/>
           </a:xfrm>
           <a:prstGeom prst="rect">
             <a:avLst/>
@@ -6392,26 +10384,27 @@
           <a:p>
             <a:pPr algn="l"/>
             <a:r>
-              <a:rPr sz="2800" b="1">
+              <a:rPr sz="2800" b="1" i="0">
                 <a:solidFill>
                   <a:srgbClr val="FFFFFF"/>
                 </a:solidFill>
-              </a:rPr>
-              <a:t>Etapa 2 — Normalização até BCNF</a:t>
-            </a:r>
-          </a:p>
-        </p:txBody>
-      </p:sp>
-      <p:sp>
-        <p:nvSpPr>
-          <p:cNvPr id="4" name="TextBox 3"/>
+                <a:latin typeface="Calibri"/>
+              </a:rPr>
+              <a:t>Normalização até BCNF</a:t>
+            </a:r>
+          </a:p>
+        </p:txBody>
+      </p:sp>
+      <p:sp>
+        <p:nvSpPr>
+          <p:cNvPr id="5" name="TextBox 4"/>
           <p:cNvSpPr txBox="1"/>
           <p:nvPr/>
         </p:nvSpPr>
         <p:spPr>
           <a:xfrm>
-            <a:off x="457200" y="777240"/>
-            <a:ext cx="10972800" cy="365760"/>
+            <a:off x="457200" y="914400"/>
+            <a:ext cx="11247120" cy="457200"/>
           </a:xfrm>
           <a:prstGeom prst="rect">
             <a:avLst/>
@@ -6424,27 +10417,112 @@
           </a:bodyPr>
           <a:lstStyle/>
           <a:p>
-            <a:r>
-              <a:rPr sz="1400" i="1">
-                <a:solidFill>
-                  <a:srgbClr val="1F3A5F"/>
-                </a:solidFill>
-              </a:rPr>
-              <a:t>Por quê: o CSV bruto viola 3FN com várias DFs transitivas</a:t>
-            </a:r>
-          </a:p>
-        </p:txBody>
-      </p:sp>
-      <p:sp>
-        <p:nvSpPr>
-          <p:cNvPr id="5" name="TextBox 4"/>
+            <a:pPr algn="l"/>
+            <a:r>
+              <a:rPr sz="1500" b="0" i="1">
+                <a:solidFill>
+                  <a:srgbClr val="555B66"/>
+                </a:solidFill>
+                <a:latin typeface="Calibri"/>
+              </a:rPr>
+              <a:t>Por que decompor o CSV bruto</a:t>
+            </a:r>
+          </a:p>
+        </p:txBody>
+      </p:sp>
+      <p:sp>
+        <p:nvSpPr>
+          <p:cNvPr id="6" name="Rounded Rectangle 5"/>
+          <p:cNvSpPr/>
+          <p:nvPr/>
+        </p:nvSpPr>
+        <p:spPr>
+          <a:xfrm>
+            <a:off x="457200" y="1463040"/>
+            <a:ext cx="3474720" cy="3931920"/>
+          </a:xfrm>
+          <a:prstGeom prst="roundRect">
+            <a:avLst>
+              <a:gd name="adj" fmla="val 6000"/>
+            </a:avLst>
+          </a:prstGeom>
+          <a:solidFill>
+            <a:srgbClr val="F5F7FA"/>
+          </a:solidFill>
+          <a:ln w="19050">
+            <a:solidFill>
+              <a:srgbClr val="C0504D"/>
+            </a:solidFill>
+          </a:ln>
+        </p:spPr>
+        <p:style>
+          <a:lnRef idx="1">
+            <a:schemeClr val="accent1"/>
+          </a:lnRef>
+          <a:fillRef idx="3">
+            <a:schemeClr val="accent1"/>
+          </a:fillRef>
+          <a:effectRef idx="2">
+            <a:schemeClr val="accent1"/>
+          </a:effectRef>
+          <a:fontRef idx="minor">
+            <a:schemeClr val="lt1"/>
+          </a:fontRef>
+        </p:style>
+        <p:txBody>
+          <a:bodyPr rtlCol="0" anchor="ctr"/>
+          <a:lstStyle/>
+          <a:p>
+            <a:pPr algn="ctr"/>
+            <a:endParaRPr/>
+          </a:p>
+        </p:txBody>
+      </p:sp>
+      <p:sp>
+        <p:nvSpPr>
+          <p:cNvPr id="7" name="TextBox 6"/>
           <p:cNvSpPr txBox="1"/>
           <p:nvPr/>
         </p:nvSpPr>
         <p:spPr>
           <a:xfrm>
-            <a:off x="548640" y="1371600"/>
-            <a:ext cx="10972800" cy="5029200"/>
+            <a:off x="640080" y="1600200"/>
+            <a:ext cx="3108960" cy="411480"/>
+          </a:xfrm>
+          <a:prstGeom prst="rect">
+            <a:avLst/>
+          </a:prstGeom>
+          <a:noFill/>
+        </p:spPr>
+        <p:txBody>
+          <a:bodyPr wrap="none">
+            <a:spAutoFit/>
+          </a:bodyPr>
+          <a:lstStyle/>
+          <a:p>
+            <a:pPr algn="l"/>
+            <a:r>
+              <a:rPr sz="1700" b="1" i="0">
+                <a:solidFill>
+                  <a:srgbClr val="C0504D"/>
+                </a:solidFill>
+                <a:latin typeface="Calibri"/>
+              </a:rPr>
+              <a:t>CSV bruto</a:t>
+            </a:r>
+          </a:p>
+        </p:txBody>
+      </p:sp>
+      <p:sp>
+        <p:nvSpPr>
+          <p:cNvPr id="8" name="TextBox 7"/>
+          <p:cNvSpPr txBox="1"/>
+          <p:nvPr/>
+        </p:nvSpPr>
+        <p:spPr>
+          <a:xfrm>
+            <a:off x="640080" y="2103120"/>
+            <a:ext cx="3108960" cy="3154680"/>
           </a:xfrm>
           <a:prstGeom prst="rect">
             <a:avLst/>
@@ -6459,106 +10537,506 @@
           <a:p>
             <a:pPr algn="l">
               <a:spcAft>
-                <a:spcPts val="800"/>
+                <a:spcPts val="400"/>
               </a:spcAft>
             </a:pPr>
             <a:r>
-              <a:rPr sz="1800">
-                <a:solidFill>
-                  <a:srgbClr val="333333"/>
-                </a:solidFill>
-              </a:rPr>
-              <a:t>• CSV bruto = tabela plana de 15 colunas — viola 3FN.</a:t>
+              <a:rPr sz="1300">
+                <a:solidFill>
+                  <a:srgbClr val="212529"/>
+                </a:solidFill>
+              </a:rPr>
+              <a:t>• Tabela plana de 15 colunas</a:t>
             </a:r>
           </a:p>
           <a:p>
             <a:pPr algn="l">
               <a:spcAft>
-                <a:spcPts val="800"/>
+                <a:spcPts val="400"/>
               </a:spcAft>
             </a:pPr>
             <a:r>
-              <a:rPr sz="1800">
-                <a:solidFill>
-                  <a:srgbClr val="333333"/>
-                </a:solidFill>
-              </a:rPr>
-              <a:t>• DFs transitivas como codigo_orgao_superior → nome_orgao_superior geravam:</a:t>
+              <a:rPr sz="1300">
+                <a:solidFill>
+                  <a:srgbClr val="212529"/>
+                </a:solidFill>
+              </a:rPr>
+              <a:t>• DFs transitivas internas</a:t>
             </a:r>
           </a:p>
           <a:p>
             <a:pPr algn="l">
               <a:spcAft>
-                <a:spcPts val="800"/>
+                <a:spcPts val="400"/>
               </a:spcAft>
             </a:pPr>
             <a:r>
-              <a:rPr sz="1800">
-                <a:solidFill>
-                  <a:srgbClr val="333333"/>
-                </a:solidFill>
-              </a:rPr>
-              <a:t>•     · anomalias de atualização (renomear ministério = atualizar milhões de linhas)</a:t>
-            </a:r>
-          </a:p>
+              <a:rPr sz="1300">
+                <a:solidFill>
+                  <a:srgbClr val="212529"/>
+                </a:solidFill>
+              </a:rPr>
+              <a:t>• Viola 3FN</a:t>
+            </a:r>
+          </a:p>
+        </p:txBody>
+      </p:sp>
+      <p:sp>
+        <p:nvSpPr>
+          <p:cNvPr id="9" name="Right Arrow 8"/>
+          <p:cNvSpPr/>
+          <p:nvPr/>
+        </p:nvSpPr>
+        <p:spPr>
+          <a:xfrm>
+            <a:off x="3977640" y="3200400"/>
+            <a:ext cx="274320" cy="457200"/>
+          </a:xfrm>
+          <a:prstGeom prst="rightArrow">
+            <a:avLst/>
+          </a:prstGeom>
+          <a:solidFill>
+            <a:srgbClr val="555B66"/>
+          </a:solidFill>
+          <a:ln>
+            <a:noFill/>
+          </a:ln>
+        </p:spPr>
+        <p:style>
+          <a:lnRef idx="1">
+            <a:schemeClr val="accent1"/>
+          </a:lnRef>
+          <a:fillRef idx="3">
+            <a:schemeClr val="accent1"/>
+          </a:fillRef>
+          <a:effectRef idx="2">
+            <a:schemeClr val="accent1"/>
+          </a:effectRef>
+          <a:fontRef idx="minor">
+            <a:schemeClr val="lt1"/>
+          </a:fontRef>
+        </p:style>
+        <p:txBody>
+          <a:bodyPr rtlCol="0" anchor="ctr"/>
+          <a:lstStyle/>
+          <a:p>
+            <a:pPr algn="ctr"/>
+            <a:endParaRPr/>
+          </a:p>
+        </p:txBody>
+      </p:sp>
+      <p:sp>
+        <p:nvSpPr>
+          <p:cNvPr id="10" name="Rounded Rectangle 9"/>
+          <p:cNvSpPr/>
+          <p:nvPr/>
+        </p:nvSpPr>
+        <p:spPr>
+          <a:xfrm>
+            <a:off x="4297680" y="1463040"/>
+            <a:ext cx="3474720" cy="3931920"/>
+          </a:xfrm>
+          <a:prstGeom prst="roundRect">
+            <a:avLst>
+              <a:gd name="adj" fmla="val 6000"/>
+            </a:avLst>
+          </a:prstGeom>
+          <a:solidFill>
+            <a:srgbClr val="F5F7FA"/>
+          </a:solidFill>
+          <a:ln w="19050">
+            <a:solidFill>
+              <a:srgbClr val="1F3A5F"/>
+            </a:solidFill>
+          </a:ln>
+        </p:spPr>
+        <p:style>
+          <a:lnRef idx="1">
+            <a:schemeClr val="accent1"/>
+          </a:lnRef>
+          <a:fillRef idx="3">
+            <a:schemeClr val="accent1"/>
+          </a:fillRef>
+          <a:effectRef idx="2">
+            <a:schemeClr val="accent1"/>
+          </a:effectRef>
+          <a:fontRef idx="minor">
+            <a:schemeClr val="lt1"/>
+          </a:fontRef>
+        </p:style>
+        <p:txBody>
+          <a:bodyPr rtlCol="0" anchor="ctr"/>
+          <a:lstStyle/>
+          <a:p>
+            <a:pPr algn="ctr"/>
+            <a:endParaRPr/>
+          </a:p>
+        </p:txBody>
+      </p:sp>
+      <p:sp>
+        <p:nvSpPr>
+          <p:cNvPr id="11" name="TextBox 10"/>
+          <p:cNvSpPr txBox="1"/>
+          <p:nvPr/>
+        </p:nvSpPr>
+        <p:spPr>
+          <a:xfrm>
+            <a:off x="4480560" y="1600200"/>
+            <a:ext cx="3108960" cy="411480"/>
+          </a:xfrm>
+          <a:prstGeom prst="rect">
+            <a:avLst/>
+          </a:prstGeom>
+          <a:noFill/>
+        </p:spPr>
+        <p:txBody>
+          <a:bodyPr wrap="none">
+            <a:spAutoFit/>
+          </a:bodyPr>
+          <a:lstStyle/>
+          <a:p>
+            <a:pPr algn="l"/>
+            <a:r>
+              <a:rPr sz="1700" b="1" i="0">
+                <a:solidFill>
+                  <a:srgbClr val="1F3A5F"/>
+                </a:solidFill>
+                <a:latin typeface="Calibri"/>
+              </a:rPr>
+              <a:t>Anomalias geradas</a:t>
+            </a:r>
+          </a:p>
+        </p:txBody>
+      </p:sp>
+      <p:sp>
+        <p:nvSpPr>
+          <p:cNvPr id="12" name="TextBox 11"/>
+          <p:cNvSpPr txBox="1"/>
+          <p:nvPr/>
+        </p:nvSpPr>
+        <p:spPr>
+          <a:xfrm>
+            <a:off x="4480560" y="2103120"/>
+            <a:ext cx="3108960" cy="3154680"/>
+          </a:xfrm>
+          <a:prstGeom prst="rect">
+            <a:avLst/>
+          </a:prstGeom>
+          <a:noFill/>
+        </p:spPr>
+        <p:txBody>
+          <a:bodyPr wrap="square">
+            <a:spAutoFit/>
+          </a:bodyPr>
+          <a:lstStyle/>
           <a:p>
             <a:pPr algn="l">
               <a:spcAft>
-                <a:spcPts val="800"/>
+                <a:spcPts val="400"/>
               </a:spcAft>
             </a:pPr>
             <a:r>
-              <a:rPr sz="1800">
-                <a:solidFill>
-                  <a:srgbClr val="333333"/>
-                </a:solidFill>
-              </a:rPr>
-              <a:t>•     · anomalias de inserção (criar UG sem ter transação)</a:t>
+              <a:rPr sz="1300">
+                <a:solidFill>
+                  <a:srgbClr val="212529"/>
+                </a:solidFill>
+              </a:rPr>
+              <a:t>• Update: renomear ministério = milhões de updates</a:t>
             </a:r>
           </a:p>
           <a:p>
             <a:pPr algn="l">
               <a:spcAft>
-                <a:spcPts val="800"/>
+                <a:spcPts val="400"/>
               </a:spcAft>
             </a:pPr>
             <a:r>
-              <a:rPr sz="1800">
-                <a:solidFill>
-                  <a:srgbClr val="333333"/>
-                </a:solidFill>
-              </a:rPr>
-              <a:t>•     · redundância massiva (nome de ministério repetido N vezes)</a:t>
+              <a:rPr sz="1300">
+                <a:solidFill>
+                  <a:srgbClr val="212529"/>
+                </a:solidFill>
+              </a:rPr>
+              <a:t>• Insert: nova UG depende de transação</a:t>
             </a:r>
           </a:p>
           <a:p>
             <a:pPr algn="l">
               <a:spcAft>
-                <a:spcPts val="800"/>
+                <a:spcPts val="400"/>
               </a:spcAft>
             </a:pPr>
             <a:r>
-              <a:rPr sz="1800">
-                <a:solidFill>
-                  <a:srgbClr val="333333"/>
-                </a:solidFill>
-              </a:rPr>
-              <a:t>• Decomposição: cada DF transitiva virou tabela própria.</a:t>
-            </a:r>
-          </a:p>
+              <a:rPr sz="1300">
+                <a:solidFill>
+                  <a:srgbClr val="212529"/>
+                </a:solidFill>
+              </a:rPr>
+              <a:t>• Redundância massiva</a:t>
+            </a:r>
+          </a:p>
+        </p:txBody>
+      </p:sp>
+      <p:sp>
+        <p:nvSpPr>
+          <p:cNvPr id="13" name="Right Arrow 12"/>
+          <p:cNvSpPr/>
+          <p:nvPr/>
+        </p:nvSpPr>
+        <p:spPr>
+          <a:xfrm>
+            <a:off x="7818120" y="3200400"/>
+            <a:ext cx="274320" cy="457200"/>
+          </a:xfrm>
+          <a:prstGeom prst="rightArrow">
+            <a:avLst/>
+          </a:prstGeom>
+          <a:solidFill>
+            <a:srgbClr val="555B66"/>
+          </a:solidFill>
+          <a:ln>
+            <a:noFill/>
+          </a:ln>
+        </p:spPr>
+        <p:style>
+          <a:lnRef idx="1">
+            <a:schemeClr val="accent1"/>
+          </a:lnRef>
+          <a:fillRef idx="3">
+            <a:schemeClr val="accent1"/>
+          </a:fillRef>
+          <a:effectRef idx="2">
+            <a:schemeClr val="accent1"/>
+          </a:effectRef>
+          <a:fontRef idx="minor">
+            <a:schemeClr val="lt1"/>
+          </a:fontRef>
+        </p:style>
+        <p:txBody>
+          <a:bodyPr rtlCol="0" anchor="ctr"/>
+          <a:lstStyle/>
+          <a:p>
+            <a:pPr algn="ctr"/>
+            <a:endParaRPr/>
+          </a:p>
+        </p:txBody>
+      </p:sp>
+      <p:sp>
+        <p:nvSpPr>
+          <p:cNvPr id="14" name="Rounded Rectangle 13"/>
+          <p:cNvSpPr/>
+          <p:nvPr/>
+        </p:nvSpPr>
+        <p:spPr>
+          <a:xfrm>
+            <a:off x="8138160" y="1463040"/>
+            <a:ext cx="3474720" cy="3931920"/>
+          </a:xfrm>
+          <a:prstGeom prst="roundRect">
+            <a:avLst>
+              <a:gd name="adj" fmla="val 6000"/>
+            </a:avLst>
+          </a:prstGeom>
+          <a:solidFill>
+            <a:srgbClr val="F5F7FA"/>
+          </a:solidFill>
+          <a:ln w="19050">
+            <a:solidFill>
+              <a:srgbClr val="2E7D32"/>
+            </a:solidFill>
+          </a:ln>
+        </p:spPr>
+        <p:style>
+          <a:lnRef idx="1">
+            <a:schemeClr val="accent1"/>
+          </a:lnRef>
+          <a:fillRef idx="3">
+            <a:schemeClr val="accent1"/>
+          </a:fillRef>
+          <a:effectRef idx="2">
+            <a:schemeClr val="accent1"/>
+          </a:effectRef>
+          <a:fontRef idx="minor">
+            <a:schemeClr val="lt1"/>
+          </a:fontRef>
+        </p:style>
+        <p:txBody>
+          <a:bodyPr rtlCol="0" anchor="ctr"/>
+          <a:lstStyle/>
+          <a:p>
+            <a:pPr algn="ctr"/>
+            <a:endParaRPr/>
+          </a:p>
+        </p:txBody>
+      </p:sp>
+      <p:sp>
+        <p:nvSpPr>
+          <p:cNvPr id="15" name="TextBox 14"/>
+          <p:cNvSpPr txBox="1"/>
+          <p:nvPr/>
+        </p:nvSpPr>
+        <p:spPr>
+          <a:xfrm>
+            <a:off x="8321040" y="1600200"/>
+            <a:ext cx="3108960" cy="411480"/>
+          </a:xfrm>
+          <a:prstGeom prst="rect">
+            <a:avLst/>
+          </a:prstGeom>
+          <a:noFill/>
+        </p:spPr>
+        <p:txBody>
+          <a:bodyPr wrap="none">
+            <a:spAutoFit/>
+          </a:bodyPr>
+          <a:lstStyle/>
+          <a:p>
+            <a:pPr algn="l"/>
+            <a:r>
+              <a:rPr sz="1700" b="1" i="0">
+                <a:solidFill>
+                  <a:srgbClr val="2E7D32"/>
+                </a:solidFill>
+                <a:latin typeface="Calibri"/>
+              </a:rPr>
+              <a:t>9 relações em BCNF</a:t>
+            </a:r>
+          </a:p>
+        </p:txBody>
+      </p:sp>
+      <p:sp>
+        <p:nvSpPr>
+          <p:cNvPr id="16" name="TextBox 15"/>
+          <p:cNvSpPr txBox="1"/>
+          <p:nvPr/>
+        </p:nvSpPr>
+        <p:spPr>
+          <a:xfrm>
+            <a:off x="8321040" y="2103120"/>
+            <a:ext cx="3108960" cy="3154680"/>
+          </a:xfrm>
+          <a:prstGeom prst="rect">
+            <a:avLst/>
+          </a:prstGeom>
+          <a:noFill/>
+        </p:spPr>
+        <p:txBody>
+          <a:bodyPr wrap="square">
+            <a:spAutoFit/>
+          </a:bodyPr>
+          <a:lstStyle/>
           <a:p>
             <a:pPr algn="l">
               <a:spcAft>
-                <a:spcPts val="800"/>
+                <a:spcPts val="400"/>
               </a:spcAft>
             </a:pPr>
             <a:r>
-              <a:rPr sz="1800">
-                <a:solidFill>
-                  <a:srgbClr val="333333"/>
-                </a:solidFill>
-              </a:rPr>
-              <a:t>• Resultado: 9 relações em BCNF (e portanto 3FN). JOIN natural reconstrói o CSV.</a:t>
+              <a:rPr sz="1300">
+                <a:solidFill>
+                  <a:srgbClr val="212529"/>
+                </a:solidFill>
+              </a:rPr>
+              <a:t>• Cada DF transitiva → tabela própria</a:t>
+            </a:r>
+          </a:p>
+          <a:p>
+            <a:pPr algn="l">
+              <a:spcAft>
+                <a:spcPts val="400"/>
+              </a:spcAft>
+            </a:pPr>
+            <a:r>
+              <a:rPr sz="1300">
+                <a:solidFill>
+                  <a:srgbClr val="212529"/>
+                </a:solidFill>
+              </a:rPr>
+              <a:t>• JOIN natural reconstrói o CSV</a:t>
+            </a:r>
+          </a:p>
+          <a:p>
+            <a:pPr algn="l">
+              <a:spcAft>
+                <a:spcPts val="400"/>
+              </a:spcAft>
+            </a:pPr>
+            <a:r>
+              <a:rPr sz="1300">
+                <a:solidFill>
+                  <a:srgbClr val="212529"/>
+                </a:solidFill>
+              </a:rPr>
+              <a:t>• Sem dependência não-chave → não-chave</a:t>
+            </a:r>
+          </a:p>
+        </p:txBody>
+      </p:sp>
+      <p:sp>
+        <p:nvSpPr>
+          <p:cNvPr id="17" name="TextBox 16"/>
+          <p:cNvSpPr txBox="1"/>
+          <p:nvPr/>
+        </p:nvSpPr>
+        <p:spPr>
+          <a:xfrm>
+            <a:off x="457200" y="5669280"/>
+            <a:ext cx="11247120" cy="457200"/>
+          </a:xfrm>
+          <a:prstGeom prst="rect">
+            <a:avLst/>
+          </a:prstGeom>
+          <a:noFill/>
+        </p:spPr>
+        <p:txBody>
+          <a:bodyPr wrap="none">
+            <a:spAutoFit/>
+          </a:bodyPr>
+          <a:lstStyle/>
+          <a:p>
+            <a:pPr algn="ctr"/>
+            <a:r>
+              <a:rPr sz="1400" b="0" i="1">
+                <a:solidFill>
+                  <a:srgbClr val="555B66"/>
+                </a:solidFill>
+                <a:latin typeface="Calibri"/>
+              </a:rPr>
+              <a:t>Decisão de NÃO desnormalizar: consistência &gt; microsegundos no contexto de LAI</a:t>
+            </a:r>
+          </a:p>
+        </p:txBody>
+      </p:sp>
+      <p:sp>
+        <p:nvSpPr>
+          <p:cNvPr id="18" name="TextBox 17"/>
+          <p:cNvSpPr txBox="1"/>
+          <p:nvPr/>
+        </p:nvSpPr>
+        <p:spPr>
+          <a:xfrm>
+            <a:off x="365760" y="6446520"/>
+            <a:ext cx="11430000" cy="320040"/>
+          </a:xfrm>
+          <a:prstGeom prst="rect">
+            <a:avLst/>
+          </a:prstGeom>
+          <a:noFill/>
+        </p:spPr>
+        <p:txBody>
+          <a:bodyPr wrap="none">
+            <a:spAutoFit/>
+          </a:bodyPr>
+          <a:lstStyle/>
+          <a:p>
+            <a:pPr algn="r"/>
+            <a:r>
+              <a:rPr sz="900" b="0" i="1">
+                <a:solidFill>
+                  <a:srgbClr val="1F3A5F"/>
+                </a:solidFill>
+                <a:latin typeface="Calibri"/>
+              </a:rPr>
+              <a:t>TP Banco de Dados · DCC/UFMG · 7/17</a:t>
             </a:r>
           </a:p>
         </p:txBody>
@@ -6597,7 +11075,7 @@
         <p:spPr>
           <a:xfrm>
             <a:off x="0" y="0"/>
-            <a:ext cx="12191695" cy="731520"/>
+            <a:ext cx="12191695" cy="777240"/>
           </a:xfrm>
           <a:prstGeom prst="rect">
             <a:avLst/>
@@ -6634,14 +11112,58 @@
       </p:sp>
       <p:sp>
         <p:nvSpPr>
-          <p:cNvPr id="3" name="TextBox 2"/>
+          <p:cNvPr id="3" name="Rectangle 2"/>
+          <p:cNvSpPr/>
+          <p:nvPr/>
+        </p:nvSpPr>
+        <p:spPr>
+          <a:xfrm>
+            <a:off x="0" y="777240"/>
+            <a:ext cx="12191695" cy="54864"/>
+          </a:xfrm>
+          <a:prstGeom prst="rect">
+            <a:avLst/>
+          </a:prstGeom>
+          <a:solidFill>
+            <a:srgbClr val="E8B40F"/>
+          </a:solidFill>
+          <a:ln>
+            <a:noFill/>
+          </a:ln>
+        </p:spPr>
+        <p:style>
+          <a:lnRef idx="1">
+            <a:schemeClr val="accent1"/>
+          </a:lnRef>
+          <a:fillRef idx="3">
+            <a:schemeClr val="accent1"/>
+          </a:fillRef>
+          <a:effectRef idx="2">
+            <a:schemeClr val="accent1"/>
+          </a:effectRef>
+          <a:fontRef idx="minor">
+            <a:schemeClr val="lt1"/>
+          </a:fontRef>
+        </p:style>
+        <p:txBody>
+          <a:bodyPr rtlCol="0" anchor="ctr"/>
+          <a:lstStyle/>
+          <a:p>
+            <a:pPr algn="ctr"/>
+            <a:endParaRPr/>
+          </a:p>
+        </p:txBody>
+      </p:sp>
+      <p:sp>
+        <p:nvSpPr>
+          <p:cNvPr id="4" name="TextBox 3"/>
           <p:cNvSpPr txBox="1"/>
           <p:nvPr/>
         </p:nvSpPr>
         <p:spPr>
           <a:xfrm>
             <a:off x="457200" y="91440"/>
-            <a:ext cx="10972800" cy="640080"/>
+            <a:ext cx="11247120" cy="640080"/>
           </a:xfrm>
           <a:prstGeom prst="rect">
             <a:avLst/>
@@ -6656,10 +11178,11 @@
           <a:p>
             <a:pPr algn="l"/>
             <a:r>
-              <a:rPr sz="2800" b="1">
+              <a:rPr sz="2800" b="1" i="0">
                 <a:solidFill>
                   <a:srgbClr val="FFFFFF"/>
                 </a:solidFill>
+                <a:latin typeface="Calibri"/>
               </a:rPr>
               <a:t>Etapa 3 — Implementação em PostgreSQL</a:t>
             </a:r>
@@ -6668,14 +11191,712 @@
       </p:sp>
       <p:sp>
         <p:nvSpPr>
-          <p:cNvPr id="4" name="TextBox 3"/>
+          <p:cNvPr id="5" name="TextBox 4"/>
           <p:cNvSpPr txBox="1"/>
           <p:nvPr/>
         </p:nvSpPr>
         <p:spPr>
           <a:xfrm>
-            <a:off x="548640" y="1371600"/>
-            <a:ext cx="10972800" cy="5029200"/>
+            <a:off x="457200" y="914400"/>
+            <a:ext cx="11247120" cy="457200"/>
+          </a:xfrm>
+          <a:prstGeom prst="rect">
+            <a:avLst/>
+          </a:prstGeom>
+          <a:noFill/>
+        </p:spPr>
+        <p:txBody>
+          <a:bodyPr wrap="none">
+            <a:spAutoFit/>
+          </a:bodyPr>
+          <a:lstStyle/>
+          <a:p>
+            <a:pPr algn="l"/>
+            <a:r>
+              <a:rPr sz="1500" b="0" i="1">
+                <a:solidFill>
+                  <a:srgbClr val="555B66"/>
+                </a:solidFill>
+                <a:latin typeface="Calibri"/>
+              </a:rPr>
+              <a:t>DDL + pipeline ETL + limpeza · totalmente reprodutível</a:t>
+            </a:r>
+          </a:p>
+        </p:txBody>
+      </p:sp>
+      <p:sp>
+        <p:nvSpPr>
+          <p:cNvPr id="6" name="Rounded Rectangle 5"/>
+          <p:cNvSpPr/>
+          <p:nvPr/>
+        </p:nvSpPr>
+        <p:spPr>
+          <a:xfrm>
+            <a:off x="504291" y="1463040"/>
+            <a:ext cx="2148840" cy="1188720"/>
+          </a:xfrm>
+          <a:prstGeom prst="roundRect">
+            <a:avLst>
+              <a:gd name="adj" fmla="val 6000"/>
+            </a:avLst>
+          </a:prstGeom>
+          <a:solidFill>
+            <a:srgbClr val="1F3A5F"/>
+          </a:solidFill>
+          <a:ln>
+            <a:noFill/>
+          </a:ln>
+        </p:spPr>
+        <p:style>
+          <a:lnRef idx="1">
+            <a:schemeClr val="accent1"/>
+          </a:lnRef>
+          <a:fillRef idx="3">
+            <a:schemeClr val="accent1"/>
+          </a:fillRef>
+          <a:effectRef idx="2">
+            <a:schemeClr val="accent1"/>
+          </a:effectRef>
+          <a:fontRef idx="minor">
+            <a:schemeClr val="lt1"/>
+          </a:fontRef>
+        </p:style>
+        <p:txBody>
+          <a:bodyPr rtlCol="0" anchor="ctr"/>
+          <a:lstStyle/>
+          <a:p>
+            <a:pPr algn="ctr"/>
+            <a:endParaRPr/>
+          </a:p>
+        </p:txBody>
+      </p:sp>
+      <p:sp>
+        <p:nvSpPr>
+          <p:cNvPr id="7" name="TextBox 6"/>
+          <p:cNvSpPr txBox="1"/>
+          <p:nvPr/>
+        </p:nvSpPr>
+        <p:spPr>
+          <a:xfrm>
+            <a:off x="504291" y="1600200"/>
+            <a:ext cx="2148840" cy="653796"/>
+          </a:xfrm>
+          <a:prstGeom prst="rect">
+            <a:avLst/>
+          </a:prstGeom>
+          <a:noFill/>
+        </p:spPr>
+        <p:txBody>
+          <a:bodyPr wrap="none">
+            <a:spAutoFit/>
+          </a:bodyPr>
+          <a:lstStyle/>
+          <a:p>
+            <a:pPr algn="ctr"/>
+            <a:r>
+              <a:rPr sz="4000" b="1" i="0">
+                <a:solidFill>
+                  <a:srgbClr val="FFFFFF"/>
+                </a:solidFill>
+                <a:latin typeface="Calibri"/>
+              </a:rPr>
+              <a:t>9</a:t>
+            </a:r>
+          </a:p>
+        </p:txBody>
+      </p:sp>
+      <p:sp>
+        <p:nvSpPr>
+          <p:cNvPr id="8" name="TextBox 7"/>
+          <p:cNvSpPr txBox="1"/>
+          <p:nvPr/>
+        </p:nvSpPr>
+        <p:spPr>
+          <a:xfrm>
+            <a:off x="504291" y="2176272"/>
+            <a:ext cx="2148840" cy="416052"/>
+          </a:xfrm>
+          <a:prstGeom prst="rect">
+            <a:avLst/>
+          </a:prstGeom>
+          <a:noFill/>
+        </p:spPr>
+        <p:txBody>
+          <a:bodyPr wrap="none">
+            <a:spAutoFit/>
+          </a:bodyPr>
+          <a:lstStyle/>
+          <a:p>
+            <a:pPr algn="ctr"/>
+            <a:r>
+              <a:rPr sz="1200" b="0" i="0">
+                <a:solidFill>
+                  <a:srgbClr val="FFFFFF"/>
+                </a:solidFill>
+                <a:latin typeface="Calibri"/>
+              </a:rPr>
+              <a:t>tabelas</a:t>
+            </a:r>
+          </a:p>
+        </p:txBody>
+      </p:sp>
+      <p:sp>
+        <p:nvSpPr>
+          <p:cNvPr id="9" name="Rounded Rectangle 8"/>
+          <p:cNvSpPr/>
+          <p:nvPr/>
+        </p:nvSpPr>
+        <p:spPr>
+          <a:xfrm>
+            <a:off x="2762859" y="1463040"/>
+            <a:ext cx="2148840" cy="1188720"/>
+          </a:xfrm>
+          <a:prstGeom prst="roundRect">
+            <a:avLst>
+              <a:gd name="adj" fmla="val 6000"/>
+            </a:avLst>
+          </a:prstGeom>
+          <a:solidFill>
+            <a:srgbClr val="2E86AB"/>
+          </a:solidFill>
+          <a:ln>
+            <a:noFill/>
+          </a:ln>
+        </p:spPr>
+        <p:style>
+          <a:lnRef idx="1">
+            <a:schemeClr val="accent1"/>
+          </a:lnRef>
+          <a:fillRef idx="3">
+            <a:schemeClr val="accent1"/>
+          </a:fillRef>
+          <a:effectRef idx="2">
+            <a:schemeClr val="accent1"/>
+          </a:effectRef>
+          <a:fontRef idx="minor">
+            <a:schemeClr val="lt1"/>
+          </a:fontRef>
+        </p:style>
+        <p:txBody>
+          <a:bodyPr rtlCol="0" anchor="ctr"/>
+          <a:lstStyle/>
+          <a:p>
+            <a:pPr algn="ctr"/>
+            <a:endParaRPr/>
+          </a:p>
+        </p:txBody>
+      </p:sp>
+      <p:sp>
+        <p:nvSpPr>
+          <p:cNvPr id="10" name="TextBox 9"/>
+          <p:cNvSpPr txBox="1"/>
+          <p:nvPr/>
+        </p:nvSpPr>
+        <p:spPr>
+          <a:xfrm>
+            <a:off x="2762859" y="1600200"/>
+            <a:ext cx="2148840" cy="653796"/>
+          </a:xfrm>
+          <a:prstGeom prst="rect">
+            <a:avLst/>
+          </a:prstGeom>
+          <a:noFill/>
+        </p:spPr>
+        <p:txBody>
+          <a:bodyPr wrap="none">
+            <a:spAutoFit/>
+          </a:bodyPr>
+          <a:lstStyle/>
+          <a:p>
+            <a:pPr algn="ctr"/>
+            <a:r>
+              <a:rPr sz="4000" b="1" i="0">
+                <a:solidFill>
+                  <a:srgbClr val="FFFFFF"/>
+                </a:solidFill>
+                <a:latin typeface="Calibri"/>
+              </a:rPr>
+              <a:t>9</a:t>
+            </a:r>
+          </a:p>
+        </p:txBody>
+      </p:sp>
+      <p:sp>
+        <p:nvSpPr>
+          <p:cNvPr id="11" name="TextBox 10"/>
+          <p:cNvSpPr txBox="1"/>
+          <p:nvPr/>
+        </p:nvSpPr>
+        <p:spPr>
+          <a:xfrm>
+            <a:off x="2762859" y="2176272"/>
+            <a:ext cx="2148840" cy="416052"/>
+          </a:xfrm>
+          <a:prstGeom prst="rect">
+            <a:avLst/>
+          </a:prstGeom>
+          <a:noFill/>
+        </p:spPr>
+        <p:txBody>
+          <a:bodyPr wrap="none">
+            <a:spAutoFit/>
+          </a:bodyPr>
+          <a:lstStyle/>
+          <a:p>
+            <a:pPr algn="ctr"/>
+            <a:r>
+              <a:rPr sz="1200" b="0" i="0">
+                <a:solidFill>
+                  <a:srgbClr val="FFFFFF"/>
+                </a:solidFill>
+                <a:latin typeface="Calibri"/>
+              </a:rPr>
+              <a:t>restrições R1-R9</a:t>
+            </a:r>
+          </a:p>
+        </p:txBody>
+      </p:sp>
+      <p:sp>
+        <p:nvSpPr>
+          <p:cNvPr id="12" name="Rounded Rectangle 11"/>
+          <p:cNvSpPr/>
+          <p:nvPr/>
+        </p:nvSpPr>
+        <p:spPr>
+          <a:xfrm>
+            <a:off x="5021427" y="1463040"/>
+            <a:ext cx="2148840" cy="1188720"/>
+          </a:xfrm>
+          <a:prstGeom prst="roundRect">
+            <a:avLst>
+              <a:gd name="adj" fmla="val 6000"/>
+            </a:avLst>
+          </a:prstGeom>
+          <a:solidFill>
+            <a:srgbClr val="6A1B9A"/>
+          </a:solidFill>
+          <a:ln>
+            <a:noFill/>
+          </a:ln>
+        </p:spPr>
+        <p:style>
+          <a:lnRef idx="1">
+            <a:schemeClr val="accent1"/>
+          </a:lnRef>
+          <a:fillRef idx="3">
+            <a:schemeClr val="accent1"/>
+          </a:fillRef>
+          <a:effectRef idx="2">
+            <a:schemeClr val="accent1"/>
+          </a:effectRef>
+          <a:fontRef idx="minor">
+            <a:schemeClr val="lt1"/>
+          </a:fontRef>
+        </p:style>
+        <p:txBody>
+          <a:bodyPr rtlCol="0" anchor="ctr"/>
+          <a:lstStyle/>
+          <a:p>
+            <a:pPr algn="ctr"/>
+            <a:endParaRPr/>
+          </a:p>
+        </p:txBody>
+      </p:sp>
+      <p:sp>
+        <p:nvSpPr>
+          <p:cNvPr id="13" name="TextBox 12"/>
+          <p:cNvSpPr txBox="1"/>
+          <p:nvPr/>
+        </p:nvSpPr>
+        <p:spPr>
+          <a:xfrm>
+            <a:off x="5021427" y="1600200"/>
+            <a:ext cx="2148840" cy="653796"/>
+          </a:xfrm>
+          <a:prstGeom prst="rect">
+            <a:avLst/>
+          </a:prstGeom>
+          <a:noFill/>
+        </p:spPr>
+        <p:txBody>
+          <a:bodyPr wrap="none">
+            <a:spAutoFit/>
+          </a:bodyPr>
+          <a:lstStyle/>
+          <a:p>
+            <a:pPr algn="ctr"/>
+            <a:r>
+              <a:rPr sz="4000" b="1" i="0">
+                <a:solidFill>
+                  <a:srgbClr val="FFFFFF"/>
+                </a:solidFill>
+                <a:latin typeface="Calibri"/>
+              </a:rPr>
+              <a:t>6</a:t>
+            </a:r>
+          </a:p>
+        </p:txBody>
+      </p:sp>
+      <p:sp>
+        <p:nvSpPr>
+          <p:cNvPr id="14" name="TextBox 13"/>
+          <p:cNvSpPr txBox="1"/>
+          <p:nvPr/>
+        </p:nvSpPr>
+        <p:spPr>
+          <a:xfrm>
+            <a:off x="5021427" y="2176272"/>
+            <a:ext cx="2148840" cy="416052"/>
+          </a:xfrm>
+          <a:prstGeom prst="rect">
+            <a:avLst/>
+          </a:prstGeom>
+          <a:noFill/>
+        </p:spPr>
+        <p:txBody>
+          <a:bodyPr wrap="none">
+            <a:spAutoFit/>
+          </a:bodyPr>
+          <a:lstStyle/>
+          <a:p>
+            <a:pPr algn="ctr"/>
+            <a:r>
+              <a:rPr sz="1200" b="0" i="0">
+                <a:solidFill>
+                  <a:srgbClr val="FFFFFF"/>
+                </a:solidFill>
+                <a:latin typeface="Calibri"/>
+              </a:rPr>
+              <a:t>índices auxiliares</a:t>
+            </a:r>
+          </a:p>
+        </p:txBody>
+      </p:sp>
+      <p:sp>
+        <p:nvSpPr>
+          <p:cNvPr id="15" name="Rounded Rectangle 14"/>
+          <p:cNvSpPr/>
+          <p:nvPr/>
+        </p:nvSpPr>
+        <p:spPr>
+          <a:xfrm>
+            <a:off x="7279995" y="1463040"/>
+            <a:ext cx="2148840" cy="1188720"/>
+          </a:xfrm>
+          <a:prstGeom prst="roundRect">
+            <a:avLst>
+              <a:gd name="adj" fmla="val 6000"/>
+            </a:avLst>
+          </a:prstGeom>
+          <a:solidFill>
+            <a:srgbClr val="2E7D32"/>
+          </a:solidFill>
+          <a:ln>
+            <a:noFill/>
+          </a:ln>
+        </p:spPr>
+        <p:style>
+          <a:lnRef idx="1">
+            <a:schemeClr val="accent1"/>
+          </a:lnRef>
+          <a:fillRef idx="3">
+            <a:schemeClr val="accent1"/>
+          </a:fillRef>
+          <a:effectRef idx="2">
+            <a:schemeClr val="accent1"/>
+          </a:effectRef>
+          <a:fontRef idx="minor">
+            <a:schemeClr val="lt1"/>
+          </a:fontRef>
+        </p:style>
+        <p:txBody>
+          <a:bodyPr rtlCol="0" anchor="ctr"/>
+          <a:lstStyle/>
+          <a:p>
+            <a:pPr algn="ctr"/>
+            <a:endParaRPr/>
+          </a:p>
+        </p:txBody>
+      </p:sp>
+      <p:sp>
+        <p:nvSpPr>
+          <p:cNvPr id="16" name="TextBox 15"/>
+          <p:cNvSpPr txBox="1"/>
+          <p:nvPr/>
+        </p:nvSpPr>
+        <p:spPr>
+          <a:xfrm>
+            <a:off x="7279995" y="1600200"/>
+            <a:ext cx="2148840" cy="653796"/>
+          </a:xfrm>
+          <a:prstGeom prst="rect">
+            <a:avLst/>
+          </a:prstGeom>
+          <a:noFill/>
+        </p:spPr>
+        <p:txBody>
+          <a:bodyPr wrap="none">
+            <a:spAutoFit/>
+          </a:bodyPr>
+          <a:lstStyle/>
+          <a:p>
+            <a:pPr algn="ctr"/>
+            <a:r>
+              <a:rPr sz="4000" b="1" i="0">
+                <a:solidFill>
+                  <a:srgbClr val="FFFFFF"/>
+                </a:solidFill>
+                <a:latin typeface="Calibri"/>
+              </a:rPr>
+              <a:t>9.898</a:t>
+            </a:r>
+          </a:p>
+        </p:txBody>
+      </p:sp>
+      <p:sp>
+        <p:nvSpPr>
+          <p:cNvPr id="17" name="TextBox 16"/>
+          <p:cNvSpPr txBox="1"/>
+          <p:nvPr/>
+        </p:nvSpPr>
+        <p:spPr>
+          <a:xfrm>
+            <a:off x="7279995" y="2176272"/>
+            <a:ext cx="2148840" cy="416052"/>
+          </a:xfrm>
+          <a:prstGeom prst="rect">
+            <a:avLst/>
+          </a:prstGeom>
+          <a:noFill/>
+        </p:spPr>
+        <p:txBody>
+          <a:bodyPr wrap="none">
+            <a:spAutoFit/>
+          </a:bodyPr>
+          <a:lstStyle/>
+          <a:p>
+            <a:pPr algn="ctr"/>
+            <a:r>
+              <a:rPr sz="1200" b="0" i="0">
+                <a:solidFill>
+                  <a:srgbClr val="FFFFFF"/>
+                </a:solidFill>
+                <a:latin typeface="Calibri"/>
+              </a:rPr>
+              <a:t>linhas carregadas</a:t>
+            </a:r>
+          </a:p>
+        </p:txBody>
+      </p:sp>
+      <p:sp>
+        <p:nvSpPr>
+          <p:cNvPr id="18" name="Rounded Rectangle 17"/>
+          <p:cNvSpPr/>
+          <p:nvPr/>
+        </p:nvSpPr>
+        <p:spPr>
+          <a:xfrm>
+            <a:off x="9538563" y="1463040"/>
+            <a:ext cx="2148840" cy="1188720"/>
+          </a:xfrm>
+          <a:prstGeom prst="roundRect">
+            <a:avLst>
+              <a:gd name="adj" fmla="val 6000"/>
+            </a:avLst>
+          </a:prstGeom>
+          <a:solidFill>
+            <a:srgbClr val="C0504D"/>
+          </a:solidFill>
+          <a:ln>
+            <a:noFill/>
+          </a:ln>
+        </p:spPr>
+        <p:style>
+          <a:lnRef idx="1">
+            <a:schemeClr val="accent1"/>
+          </a:lnRef>
+          <a:fillRef idx="3">
+            <a:schemeClr val="accent1"/>
+          </a:fillRef>
+          <a:effectRef idx="2">
+            <a:schemeClr val="accent1"/>
+          </a:effectRef>
+          <a:fontRef idx="minor">
+            <a:schemeClr val="lt1"/>
+          </a:fontRef>
+        </p:style>
+        <p:txBody>
+          <a:bodyPr rtlCol="0" anchor="ctr"/>
+          <a:lstStyle/>
+          <a:p>
+            <a:pPr algn="ctr"/>
+            <a:endParaRPr/>
+          </a:p>
+        </p:txBody>
+      </p:sp>
+      <p:sp>
+        <p:nvSpPr>
+          <p:cNvPr id="19" name="TextBox 18"/>
+          <p:cNvSpPr txBox="1"/>
+          <p:nvPr/>
+        </p:nvSpPr>
+        <p:spPr>
+          <a:xfrm>
+            <a:off x="9538563" y="1600200"/>
+            <a:ext cx="2148840" cy="653796"/>
+          </a:xfrm>
+          <a:prstGeom prst="rect">
+            <a:avLst/>
+          </a:prstGeom>
+          <a:noFill/>
+        </p:spPr>
+        <p:txBody>
+          <a:bodyPr wrap="none">
+            <a:spAutoFit/>
+          </a:bodyPr>
+          <a:lstStyle/>
+          <a:p>
+            <a:pPr algn="ctr"/>
+            <a:r>
+              <a:rPr sz="4000" b="1" i="0">
+                <a:solidFill>
+                  <a:srgbClr val="FFFFFF"/>
+                </a:solidFill>
+                <a:latin typeface="Calibri"/>
+              </a:rPr>
+              <a:t>101</a:t>
+            </a:r>
+          </a:p>
+        </p:txBody>
+      </p:sp>
+      <p:sp>
+        <p:nvSpPr>
+          <p:cNvPr id="20" name="TextBox 19"/>
+          <p:cNvSpPr txBox="1"/>
+          <p:nvPr/>
+        </p:nvSpPr>
+        <p:spPr>
+          <a:xfrm>
+            <a:off x="9538563" y="2176272"/>
+            <a:ext cx="2148840" cy="416052"/>
+          </a:xfrm>
+          <a:prstGeom prst="rect">
+            <a:avLst/>
+          </a:prstGeom>
+          <a:noFill/>
+        </p:spPr>
+        <p:txBody>
+          <a:bodyPr wrap="none">
+            <a:spAutoFit/>
+          </a:bodyPr>
+          <a:lstStyle/>
+          <a:p>
+            <a:pPr algn="ctr"/>
+            <a:r>
+              <a:rPr sz="1200" b="0" i="0">
+                <a:solidFill>
+                  <a:srgbClr val="FFFFFF"/>
+                </a:solidFill>
+                <a:latin typeface="Calibri"/>
+              </a:rPr>
+              <a:t>descartes auditados</a:t>
+            </a:r>
+          </a:p>
+        </p:txBody>
+      </p:sp>
+      <p:sp>
+        <p:nvSpPr>
+          <p:cNvPr id="21" name="Rounded Rectangle 20"/>
+          <p:cNvSpPr/>
+          <p:nvPr/>
+        </p:nvSpPr>
+        <p:spPr>
+          <a:xfrm>
+            <a:off x="457200" y="3017520"/>
+            <a:ext cx="5577840" cy="2926080"/>
+          </a:xfrm>
+          <a:prstGeom prst="roundRect">
+            <a:avLst>
+              <a:gd name="adj" fmla="val 6000"/>
+            </a:avLst>
+          </a:prstGeom>
+          <a:solidFill>
+            <a:srgbClr val="F5F7FA"/>
+          </a:solidFill>
+          <a:ln w="19050">
+            <a:solidFill>
+              <a:srgbClr val="1F3A5F"/>
+            </a:solidFill>
+          </a:ln>
+        </p:spPr>
+        <p:style>
+          <a:lnRef idx="1">
+            <a:schemeClr val="accent1"/>
+          </a:lnRef>
+          <a:fillRef idx="3">
+            <a:schemeClr val="accent1"/>
+          </a:fillRef>
+          <a:effectRef idx="2">
+            <a:schemeClr val="accent1"/>
+          </a:effectRef>
+          <a:fontRef idx="minor">
+            <a:schemeClr val="lt1"/>
+          </a:fontRef>
+        </p:style>
+        <p:txBody>
+          <a:bodyPr rtlCol="0" anchor="ctr"/>
+          <a:lstStyle/>
+          <a:p>
+            <a:pPr algn="ctr"/>
+            <a:endParaRPr/>
+          </a:p>
+        </p:txBody>
+      </p:sp>
+      <p:sp>
+        <p:nvSpPr>
+          <p:cNvPr id="22" name="TextBox 21"/>
+          <p:cNvSpPr txBox="1"/>
+          <p:nvPr/>
+        </p:nvSpPr>
+        <p:spPr>
+          <a:xfrm>
+            <a:off x="640080" y="3154680"/>
+            <a:ext cx="5212080" cy="411480"/>
+          </a:xfrm>
+          <a:prstGeom prst="rect">
+            <a:avLst/>
+          </a:prstGeom>
+          <a:noFill/>
+        </p:spPr>
+        <p:txBody>
+          <a:bodyPr wrap="none">
+            <a:spAutoFit/>
+          </a:bodyPr>
+          <a:lstStyle/>
+          <a:p>
+            <a:pPr algn="l"/>
+            <a:r>
+              <a:rPr sz="1700" b="1" i="0">
+                <a:solidFill>
+                  <a:srgbClr val="1F3A5F"/>
+                </a:solidFill>
+                <a:latin typeface="Calibri"/>
+              </a:rPr>
+              <a:t>sql/01_ddl.sql</a:t>
+            </a:r>
+          </a:p>
+        </p:txBody>
+      </p:sp>
+      <p:sp>
+        <p:nvSpPr>
+          <p:cNvPr id="23" name="TextBox 22"/>
+          <p:cNvSpPr txBox="1"/>
+          <p:nvPr/>
+        </p:nvSpPr>
+        <p:spPr>
+          <a:xfrm>
+            <a:off x="640080" y="3657600"/>
+            <a:ext cx="5212080" cy="2148840"/>
           </a:xfrm>
           <a:prstGeom prst="rect">
             <a:avLst/>
@@ -6690,106 +11911,262 @@
           <a:p>
             <a:pPr algn="l">
               <a:spcAft>
-                <a:spcPts val="800"/>
+                <a:spcPts val="400"/>
               </a:spcAft>
             </a:pPr>
             <a:r>
-              <a:rPr sz="1800">
-                <a:solidFill>
-                  <a:srgbClr val="333333"/>
-                </a:solidFill>
-              </a:rPr>
-              <a:t>• sql/01_ddl.sql — CREATE TABLE com PKs, FKs, CHECKs e índices.</a:t>
+              <a:rPr sz="1300">
+                <a:solidFill>
+                  <a:srgbClr val="212529"/>
+                </a:solidFill>
+              </a:rPr>
+              <a:t>• CREATE TABLE das 9 relações</a:t>
             </a:r>
           </a:p>
           <a:p>
             <a:pPr algn="l">
               <a:spcAft>
-                <a:spcPts val="800"/>
+                <a:spcPts val="400"/>
               </a:spcAft>
             </a:pPr>
             <a:r>
-              <a:rPr sz="1800">
-                <a:solidFill>
-                  <a:srgbClr val="333333"/>
-                </a:solidFill>
-              </a:rPr>
-              <a:t>• Restrições de domínio embarcadas no schema (CHECK valor &lt;&gt; 0, mês 1..12...).</a:t>
+              <a:rPr sz="1300">
+                <a:solidFill>
+                  <a:srgbClr val="212529"/>
+                </a:solidFill>
+              </a:rPr>
+              <a:t>• PKs, FKs com ON UPDATE CASCADE / ON DELETE RESTRICT</a:t>
             </a:r>
           </a:p>
           <a:p>
             <a:pPr algn="l">
               <a:spcAft>
-                <a:spcPts val="800"/>
+                <a:spcPts val="400"/>
               </a:spcAft>
             </a:pPr>
             <a:r>
-              <a:rPr sz="1800">
-                <a:solidFill>
-                  <a:srgbClr val="333333"/>
-                </a:solidFill>
-              </a:rPr>
-              <a:t>• scripts/carregar_dados.py — pipeline Python que lê CSV (LATIN1, sep=;),</a:t>
+              <a:rPr sz="1300">
+                <a:solidFill>
+                  <a:srgbClr val="212529"/>
+                </a:solidFill>
+              </a:rPr>
+              <a:t>• CHECK constraints embarcadas (R1, R3, R4...)</a:t>
             </a:r>
           </a:p>
           <a:p>
             <a:pPr algn="l">
               <a:spcAft>
-                <a:spcPts val="800"/>
+                <a:spcPts val="400"/>
               </a:spcAft>
             </a:pPr>
             <a:r>
-              <a:rPr sz="1800">
-                <a:solidFill>
-                  <a:srgbClr val="333333"/>
-                </a:solidFill>
-              </a:rPr>
-              <a:t>•     tipa, limpa e popula em ordem topológica. Suporta PostgreSQL e SQLite.</a:t>
-            </a:r>
-          </a:p>
+              <a:rPr sz="1300">
+                <a:solidFill>
+                  <a:srgbClr val="212529"/>
+                </a:solidFill>
+              </a:rPr>
+              <a:t>• Índices em data, UG, portador, favorecido, tipo, ano-mês</a:t>
+            </a:r>
+          </a:p>
+        </p:txBody>
+      </p:sp>
+      <p:sp>
+        <p:nvSpPr>
+          <p:cNvPr id="24" name="Rounded Rectangle 23"/>
+          <p:cNvSpPr/>
+          <p:nvPr/>
+        </p:nvSpPr>
+        <p:spPr>
+          <a:xfrm>
+            <a:off x="6217920" y="3017520"/>
+            <a:ext cx="5486400" cy="2926080"/>
+          </a:xfrm>
+          <a:prstGeom prst="roundRect">
+            <a:avLst>
+              <a:gd name="adj" fmla="val 6000"/>
+            </a:avLst>
+          </a:prstGeom>
+          <a:solidFill>
+            <a:srgbClr val="F5F7FA"/>
+          </a:solidFill>
+          <a:ln w="19050">
+            <a:solidFill>
+              <a:srgbClr val="2E7D32"/>
+            </a:solidFill>
+          </a:ln>
+        </p:spPr>
+        <p:style>
+          <a:lnRef idx="1">
+            <a:schemeClr val="accent1"/>
+          </a:lnRef>
+          <a:fillRef idx="3">
+            <a:schemeClr val="accent1"/>
+          </a:fillRef>
+          <a:effectRef idx="2">
+            <a:schemeClr val="accent1"/>
+          </a:effectRef>
+          <a:fontRef idx="minor">
+            <a:schemeClr val="lt1"/>
+          </a:fontRef>
+        </p:style>
+        <p:txBody>
+          <a:bodyPr rtlCol="0" anchor="ctr"/>
+          <a:lstStyle/>
+          <a:p>
+            <a:pPr algn="ctr"/>
+            <a:endParaRPr/>
+          </a:p>
+        </p:txBody>
+      </p:sp>
+      <p:sp>
+        <p:nvSpPr>
+          <p:cNvPr id="25" name="TextBox 24"/>
+          <p:cNvSpPr txBox="1"/>
+          <p:nvPr/>
+        </p:nvSpPr>
+        <p:spPr>
+          <a:xfrm>
+            <a:off x="6400800" y="3154680"/>
+            <a:ext cx="5120640" cy="411480"/>
+          </a:xfrm>
+          <a:prstGeom prst="rect">
+            <a:avLst/>
+          </a:prstGeom>
+          <a:noFill/>
+        </p:spPr>
+        <p:txBody>
+          <a:bodyPr wrap="none">
+            <a:spAutoFit/>
+          </a:bodyPr>
+          <a:lstStyle/>
+          <a:p>
+            <a:pPr algn="l"/>
+            <a:r>
+              <a:rPr sz="1700" b="1" i="0">
+                <a:solidFill>
+                  <a:srgbClr val="2E7D32"/>
+                </a:solidFill>
+                <a:latin typeface="Calibri"/>
+              </a:rPr>
+              <a:t>scripts/carregar_dados.py</a:t>
+            </a:r>
+          </a:p>
+        </p:txBody>
+      </p:sp>
+      <p:sp>
+        <p:nvSpPr>
+          <p:cNvPr id="26" name="TextBox 25"/>
+          <p:cNvSpPr txBox="1"/>
+          <p:nvPr/>
+        </p:nvSpPr>
+        <p:spPr>
+          <a:xfrm>
+            <a:off x="6400800" y="3657600"/>
+            <a:ext cx="5120640" cy="2148840"/>
+          </a:xfrm>
+          <a:prstGeom prst="rect">
+            <a:avLst/>
+          </a:prstGeom>
+          <a:noFill/>
+        </p:spPr>
+        <p:txBody>
+          <a:bodyPr wrap="square">
+            <a:spAutoFit/>
+          </a:bodyPr>
+          <a:lstStyle/>
           <a:p>
             <a:pPr algn="l">
               <a:spcAft>
-                <a:spcPts val="800"/>
+                <a:spcPts val="400"/>
               </a:spcAft>
             </a:pPr>
             <a:r>
-              <a:rPr sz="1800">
-                <a:solidFill>
-                  <a:srgbClr val="333333"/>
-                </a:solidFill>
-              </a:rPr>
-              <a:t>• Limpeza documentada: chaves nulas, valor 0, mês inválido, duplicatas.</a:t>
+              <a:rPr sz="1300">
+                <a:solidFill>
+                  <a:srgbClr val="212529"/>
+                </a:solidFill>
+              </a:rPr>
+              <a:t>• Lê CSV em LATIN1, separador ;</a:t>
             </a:r>
           </a:p>
           <a:p>
             <a:pPr algn="l">
               <a:spcAft>
-                <a:spcPts val="800"/>
+                <a:spcPts val="400"/>
               </a:spcAft>
             </a:pPr>
             <a:r>
-              <a:rPr sz="1800">
-                <a:solidFill>
-                  <a:srgbClr val="333333"/>
-                </a:solidFill>
-              </a:rPr>
-              <a:t>• Sobre amostra de 10 mil linhas: 9.898 carregadas (101 descartes auditados).</a:t>
+              <a:rPr sz="1300">
+                <a:solidFill>
+                  <a:srgbClr val="212529"/>
+                </a:solidFill>
+              </a:rPr>
+              <a:t>• Tipa, valida, desduplica, descarta linhas problemáticas</a:t>
             </a:r>
           </a:p>
           <a:p>
             <a:pPr algn="l">
               <a:spcAft>
-                <a:spcPts val="800"/>
+                <a:spcPts val="400"/>
               </a:spcAft>
             </a:pPr>
             <a:r>
-              <a:rPr sz="1800">
-                <a:solidFill>
-                  <a:srgbClr val="333333"/>
-                </a:solidFill>
-              </a:rPr>
-              <a:t>• Tudo idempotente — re-executar não polui dados.</a:t>
+              <a:rPr sz="1300">
+                <a:solidFill>
+                  <a:srgbClr val="212529"/>
+                </a:solidFill>
+              </a:rPr>
+              <a:t>• Popula 9 tabelas em ordem topológica</a:t>
+            </a:r>
+          </a:p>
+          <a:p>
+            <a:pPr algn="l">
+              <a:spcAft>
+                <a:spcPts val="400"/>
+              </a:spcAft>
+            </a:pPr>
+            <a:r>
+              <a:rPr sz="1300">
+                <a:solidFill>
+                  <a:srgbClr val="212529"/>
+                </a:solidFill>
+              </a:rPr>
+              <a:t>• Idempotente · suporta PostgreSQL e SQLite</a:t>
+            </a:r>
+          </a:p>
+        </p:txBody>
+      </p:sp>
+      <p:sp>
+        <p:nvSpPr>
+          <p:cNvPr id="27" name="TextBox 26"/>
+          <p:cNvSpPr txBox="1"/>
+          <p:nvPr/>
+        </p:nvSpPr>
+        <p:spPr>
+          <a:xfrm>
+            <a:off x="365760" y="6446520"/>
+            <a:ext cx="11430000" cy="320040"/>
+          </a:xfrm>
+          <a:prstGeom prst="rect">
+            <a:avLst/>
+          </a:prstGeom>
+          <a:noFill/>
+        </p:spPr>
+        <p:txBody>
+          <a:bodyPr wrap="none">
+            <a:spAutoFit/>
+          </a:bodyPr>
+          <a:lstStyle/>
+          <a:p>
+            <a:pPr algn="r"/>
+            <a:r>
+              <a:rPr sz="900" b="0" i="1">
+                <a:solidFill>
+                  <a:srgbClr val="1F3A5F"/>
+                </a:solidFill>
+                <a:latin typeface="Calibri"/>
+              </a:rPr>
+              <a:t>TP Banco de Dados · DCC/UFMG · 8/17</a:t>
             </a:r>
           </a:p>
         </p:txBody>
@@ -6828,7 +12205,7 @@
         <p:spPr>
           <a:xfrm>
             <a:off x="0" y="0"/>
-            <a:ext cx="12191695" cy="731520"/>
+            <a:ext cx="12191695" cy="777240"/>
           </a:xfrm>
           <a:prstGeom prst="rect">
             <a:avLst/>
@@ -6865,14 +12242,58 @@
       </p:sp>
       <p:sp>
         <p:nvSpPr>
-          <p:cNvPr id="3" name="TextBox 2"/>
+          <p:cNvPr id="3" name="Rectangle 2"/>
+          <p:cNvSpPr/>
+          <p:nvPr/>
+        </p:nvSpPr>
+        <p:spPr>
+          <a:xfrm>
+            <a:off x="0" y="777240"/>
+            <a:ext cx="12191695" cy="54864"/>
+          </a:xfrm>
+          <a:prstGeom prst="rect">
+            <a:avLst/>
+          </a:prstGeom>
+          <a:solidFill>
+            <a:srgbClr val="E8B40F"/>
+          </a:solidFill>
+          <a:ln>
+            <a:noFill/>
+          </a:ln>
+        </p:spPr>
+        <p:style>
+          <a:lnRef idx="1">
+            <a:schemeClr val="accent1"/>
+          </a:lnRef>
+          <a:fillRef idx="3">
+            <a:schemeClr val="accent1"/>
+          </a:fillRef>
+          <a:effectRef idx="2">
+            <a:schemeClr val="accent1"/>
+          </a:effectRef>
+          <a:fontRef idx="minor">
+            <a:schemeClr val="lt1"/>
+          </a:fontRef>
+        </p:style>
+        <p:txBody>
+          <a:bodyPr rtlCol="0" anchor="ctr"/>
+          <a:lstStyle/>
+          <a:p>
+            <a:pPr algn="ctr"/>
+            <a:endParaRPr/>
+          </a:p>
+        </p:txBody>
+      </p:sp>
+      <p:sp>
+        <p:nvSpPr>
+          <p:cNvPr id="4" name="TextBox 3"/>
           <p:cNvSpPr txBox="1"/>
           <p:nvPr/>
         </p:nvSpPr>
         <p:spPr>
           <a:xfrm>
             <a:off x="457200" y="91440"/>
-            <a:ext cx="10972800" cy="640080"/>
+            <a:ext cx="11247120" cy="640080"/>
           </a:xfrm>
           <a:prstGeom prst="rect">
             <a:avLst/>
@@ -6887,10 +12308,11 @@
           <a:p>
             <a:pPr algn="l"/>
             <a:r>
-              <a:rPr sz="2800" b="1">
+              <a:rPr sz="2800" b="1" i="0">
                 <a:solidFill>
                   <a:srgbClr val="FFFFFF"/>
                 </a:solidFill>
+                <a:latin typeface="Calibri"/>
               </a:rPr>
               <a:t>P1 — Quais ministérios mais gastam via CPGF?</a:t>
             </a:r>
@@ -6899,14 +12321,14 @@
       </p:sp>
       <p:sp>
         <p:nvSpPr>
-          <p:cNvPr id="4" name="TextBox 3"/>
+          <p:cNvPr id="5" name="TextBox 4"/>
           <p:cNvSpPr txBox="1"/>
           <p:nvPr/>
         </p:nvSpPr>
         <p:spPr>
           <a:xfrm>
-            <a:off x="457200" y="777240"/>
-            <a:ext cx="10972800" cy="365760"/>
+            <a:off x="457200" y="914400"/>
+            <a:ext cx="11247120" cy="457200"/>
           </a:xfrm>
           <a:prstGeom prst="rect">
             <a:avLst/>
@@ -6919,20 +12341,22 @@
           </a:bodyPr>
           <a:lstStyle/>
           <a:p>
-            <a:r>
-              <a:rPr sz="1400" i="1">
-                <a:solidFill>
-                  <a:srgbClr val="1F3A5F"/>
-                </a:solidFill>
-              </a:rPr>
-              <a:t>JOIN 3 tabelas + GROUP BY + agregações</a:t>
+            <a:pPr algn="l"/>
+            <a:r>
+              <a:rPr sz="1500" b="0" i="1">
+                <a:solidFill>
+                  <a:srgbClr val="555B66"/>
+                </a:solidFill>
+                <a:latin typeface="Calibri"/>
+              </a:rPr>
+              <a:t>JOIN de 3 tabelas + GROUP BY + agregações</a:t>
             </a:r>
           </a:p>
         </p:txBody>
       </p:sp>
       <p:pic>
         <p:nvPicPr>
-          <p:cNvPr id="5" name="Picture 4" descr="q1_gasto_por_ministerio.png"/>
+          <p:cNvPr id="6" name="Picture 5" descr="q1_gasto_por_ministerio.png"/>
           <p:cNvPicPr>
             <a:picLocks noChangeAspect="1"/>
           </p:cNvPicPr>
@@ -6946,14 +12370,49 @@
         </p:blipFill>
         <p:spPr>
           <a:xfrm>
-            <a:off x="463143" y="1280160"/>
-            <a:ext cx="11265408" cy="5120640"/>
+            <a:off x="664311" y="1554480"/>
+            <a:ext cx="10863072" cy="4937760"/>
           </a:xfrm>
           <a:prstGeom prst="rect">
             <a:avLst/>
           </a:prstGeom>
         </p:spPr>
       </p:pic>
+      <p:sp>
+        <p:nvSpPr>
+          <p:cNvPr id="7" name="TextBox 6"/>
+          <p:cNvSpPr txBox="1"/>
+          <p:nvPr/>
+        </p:nvSpPr>
+        <p:spPr>
+          <a:xfrm>
+            <a:off x="365760" y="6446520"/>
+            <a:ext cx="11430000" cy="320040"/>
+          </a:xfrm>
+          <a:prstGeom prst="rect">
+            <a:avLst/>
+          </a:prstGeom>
+          <a:noFill/>
+        </p:spPr>
+        <p:txBody>
+          <a:bodyPr wrap="none">
+            <a:spAutoFit/>
+          </a:bodyPr>
+          <a:lstStyle/>
+          <a:p>
+            <a:pPr algn="r"/>
+            <a:r>
+              <a:rPr sz="900" b="0" i="1">
+                <a:solidFill>
+                  <a:srgbClr val="1F3A5F"/>
+                </a:solidFill>
+                <a:latin typeface="Calibri"/>
+              </a:rPr>
+              <a:t>TP Banco de Dados · DCC/UFMG · 9/17</a:t>
+            </a:r>
+          </a:p>
+        </p:txBody>
+      </p:sp>
     </p:spTree>
   </p:cSld>
   <p:clrMapOvr>
